--- a/labs/lab04/slides/slides.pptx
+++ b/labs/lab04/slides/slides.pptx
@@ -4,6 +4,9 @@
   <p:sldMasterIdLst>
     <p:sldMasterId id="2147483696" r:id="rId1"/>
   </p:sldMasterIdLst>
+  <p:notesMasterIdLst>
+    <p:notesMasterId r:id="rId26"/>
+  </p:notesMasterIdLst>
   <p:sldIdLst>
     <p:sldId id="256" r:id="rId2"/>
     <p:sldId id="257" r:id="rId3"/>
@@ -26,6 +29,9 @@
     <p:sldId id="274" r:id="rId20"/>
     <p:sldId id="275" r:id="rId21"/>
     <p:sldId id="276" r:id="rId22"/>
+    <p:sldId id="277" r:id="rId23"/>
+    <p:sldId id="278" r:id="rId24"/>
+    <p:sldId id="279" r:id="rId25"/>
   </p:sldIdLst>
   <p:sldSz cx="12192000" cy="6858000"/>
   <p:notesSz cx="6858000" cy="9144000"/>
@@ -132,6 +138,2241 @@
 </p:presentation>
 </file>
 
+<file path=ppt/notesMasters/notesMaster1.xml><?xml version="1.0" encoding="utf-8"?>
+<p:notesMaster xmlns:a="http://schemas.openxmlformats.org/drawingml/2006/main" xmlns:r="http://schemas.openxmlformats.org/officeDocument/2006/relationships" xmlns:p="http://schemas.openxmlformats.org/presentationml/2006/main">
+  <p:cSld>
+    <p:bg>
+      <p:bgRef idx="1001">
+        <a:schemeClr val="bg1"/>
+      </p:bgRef>
+    </p:bg>
+    <p:spTree>
+      <p:nvGrpSpPr>
+        <p:cNvPr id="1" name=""/>
+        <p:cNvGrpSpPr/>
+        <p:nvPr/>
+      </p:nvGrpSpPr>
+      <p:grpSpPr>
+        <a:xfrm>
+          <a:off x="0" y="0"/>
+          <a:ext cx="0" cy="0"/>
+          <a:chOff x="0" y="0"/>
+          <a:chExt cx="0" cy="0"/>
+        </a:xfrm>
+      </p:grpSpPr>
+      <p:sp>
+        <p:nvSpPr>
+          <p:cNvPr id="2" name="Header Placeholder 1"/>
+          <p:cNvSpPr>
+            <a:spLocks noGrp="1"/>
+          </p:cNvSpPr>
+          <p:nvPr>
+            <p:ph type="hdr" sz="quarter"/>
+          </p:nvPr>
+        </p:nvSpPr>
+        <p:spPr>
+          <a:xfrm>
+            <a:off x="0" y="0"/>
+            <a:ext cx="2971800" cy="458788"/>
+          </a:xfrm>
+          <a:prstGeom prst="rect">
+            <a:avLst/>
+          </a:prstGeom>
+        </p:spPr>
+        <p:txBody>
+          <a:bodyPr vert="horz" lIns="91440" tIns="45720" rIns="91440" bIns="45720" rtlCol="0"/>
+          <a:lstStyle>
+            <a:lvl1pPr algn="l">
+              <a:defRPr sz="1200"/>
+            </a:lvl1pPr>
+          </a:lstStyle>
+          <a:p>
+            <a:endParaRPr lang="en-US"/>
+          </a:p>
+        </p:txBody>
+      </p:sp>
+      <p:sp>
+        <p:nvSpPr>
+          <p:cNvPr id="3" name="Date Placeholder 2"/>
+          <p:cNvSpPr>
+            <a:spLocks noGrp="1"/>
+          </p:cNvSpPr>
+          <p:nvPr>
+            <p:ph type="dt" idx="1"/>
+          </p:nvPr>
+        </p:nvSpPr>
+        <p:spPr>
+          <a:xfrm>
+            <a:off x="3884613" y="0"/>
+            <a:ext cx="2971800" cy="458788"/>
+          </a:xfrm>
+          <a:prstGeom prst="rect">
+            <a:avLst/>
+          </a:prstGeom>
+        </p:spPr>
+        <p:txBody>
+          <a:bodyPr vert="horz" lIns="91440" tIns="45720" rIns="91440" bIns="45720" rtlCol="0"/>
+          <a:lstStyle>
+            <a:lvl1pPr algn="r">
+              <a:defRPr sz="1200"/>
+            </a:lvl1pPr>
+          </a:lstStyle>
+          <a:p>
+            <a:fld id="{0F9C1CCF-B725-44A7-AA57-5E433BD85C9F}" type="datetimeFigureOut">
+              <a:rPr lang="en-US" smtClean="0"/>
+              <a:t>1/2/22</a:t>
+            </a:fld>
+            <a:endParaRPr lang="en-US"/>
+          </a:p>
+        </p:txBody>
+      </p:sp>
+      <p:sp>
+        <p:nvSpPr>
+          <p:cNvPr id="4" name="Slide Image Placeholder 3"/>
+          <p:cNvSpPr>
+            <a:spLocks noGrp="1" noRot="1" noChangeAspect="1"/>
+          </p:cNvSpPr>
+          <p:nvPr>
+            <p:ph type="sldImg" idx="2"/>
+          </p:nvPr>
+        </p:nvSpPr>
+        <p:spPr>
+          <a:xfrm>
+            <a:off x="685800" y="1143000"/>
+            <a:ext cx="5486400" cy="3086100"/>
+          </a:xfrm>
+          <a:prstGeom prst="rect">
+            <a:avLst/>
+          </a:prstGeom>
+          <a:noFill/>
+          <a:ln w="12700">
+            <a:solidFill>
+              <a:prstClr val="black"/>
+            </a:solidFill>
+          </a:ln>
+        </p:spPr>
+        <p:txBody>
+          <a:bodyPr vert="horz" lIns="91440" tIns="45720" rIns="91440" bIns="45720" rtlCol="0" anchor="ctr"/>
+          <a:lstStyle/>
+          <a:p>
+            <a:endParaRPr lang="en-US"/>
+          </a:p>
+        </p:txBody>
+      </p:sp>
+      <p:sp>
+        <p:nvSpPr>
+          <p:cNvPr id="5" name="Notes Placeholder 4"/>
+          <p:cNvSpPr>
+            <a:spLocks noGrp="1"/>
+          </p:cNvSpPr>
+          <p:nvPr>
+            <p:ph type="body" sz="quarter" idx="3"/>
+          </p:nvPr>
+        </p:nvSpPr>
+        <p:spPr>
+          <a:xfrm>
+            <a:off x="685800" y="4400550"/>
+            <a:ext cx="5486400" cy="3600450"/>
+          </a:xfrm>
+          <a:prstGeom prst="rect">
+            <a:avLst/>
+          </a:prstGeom>
+        </p:spPr>
+        <p:txBody>
+          <a:bodyPr vert="horz" lIns="91440" tIns="45720" rIns="91440" bIns="45720" rtlCol="0"/>
+          <a:lstStyle/>
+          <a:p>
+            <a:pPr lvl="0"/>
+            <a:r>
+              <a:rPr lang="en-US"/>
+              <a:t>Click to edit Master text styles</a:t>
+            </a:r>
+          </a:p>
+          <a:p>
+            <a:pPr lvl="1"/>
+            <a:r>
+              <a:rPr lang="en-US"/>
+              <a:t>Second level</a:t>
+            </a:r>
+          </a:p>
+          <a:p>
+            <a:pPr lvl="2"/>
+            <a:r>
+              <a:rPr lang="en-US"/>
+              <a:t>Third level</a:t>
+            </a:r>
+          </a:p>
+          <a:p>
+            <a:pPr lvl="3"/>
+            <a:r>
+              <a:rPr lang="en-US"/>
+              <a:t>Fourth level</a:t>
+            </a:r>
+          </a:p>
+          <a:p>
+            <a:pPr lvl="4"/>
+            <a:r>
+              <a:rPr lang="en-US"/>
+              <a:t>Fifth level</a:t>
+            </a:r>
+          </a:p>
+        </p:txBody>
+      </p:sp>
+      <p:sp>
+        <p:nvSpPr>
+          <p:cNvPr id="6" name="Footer Placeholder 5"/>
+          <p:cNvSpPr>
+            <a:spLocks noGrp="1"/>
+          </p:cNvSpPr>
+          <p:nvPr>
+            <p:ph type="ftr" sz="quarter" idx="4"/>
+          </p:nvPr>
+        </p:nvSpPr>
+        <p:spPr>
+          <a:xfrm>
+            <a:off x="0" y="8685213"/>
+            <a:ext cx="2971800" cy="458787"/>
+          </a:xfrm>
+          <a:prstGeom prst="rect">
+            <a:avLst/>
+          </a:prstGeom>
+        </p:spPr>
+        <p:txBody>
+          <a:bodyPr vert="horz" lIns="91440" tIns="45720" rIns="91440" bIns="45720" rtlCol="0" anchor="b"/>
+          <a:lstStyle>
+            <a:lvl1pPr algn="l">
+              <a:defRPr sz="1200"/>
+            </a:lvl1pPr>
+          </a:lstStyle>
+          <a:p>
+            <a:endParaRPr lang="en-US"/>
+          </a:p>
+        </p:txBody>
+      </p:sp>
+      <p:sp>
+        <p:nvSpPr>
+          <p:cNvPr id="7" name="Slide Number Placeholder 6"/>
+          <p:cNvSpPr>
+            <a:spLocks noGrp="1"/>
+          </p:cNvSpPr>
+          <p:nvPr>
+            <p:ph type="sldNum" sz="quarter" idx="5"/>
+          </p:nvPr>
+        </p:nvSpPr>
+        <p:spPr>
+          <a:xfrm>
+            <a:off x="3884613" y="8685213"/>
+            <a:ext cx="2971800" cy="458787"/>
+          </a:xfrm>
+          <a:prstGeom prst="rect">
+            <a:avLst/>
+          </a:prstGeom>
+        </p:spPr>
+        <p:txBody>
+          <a:bodyPr vert="horz" lIns="91440" tIns="45720" rIns="91440" bIns="45720" rtlCol="0" anchor="b"/>
+          <a:lstStyle>
+            <a:lvl1pPr algn="r">
+              <a:defRPr sz="1200"/>
+            </a:lvl1pPr>
+          </a:lstStyle>
+          <a:p>
+            <a:fld id="{18BDFEC3-8487-43E8-A154-7C12CBC1FFF2}" type="slidenum">
+              <a:rPr lang="en-US" smtClean="0"/>
+              <a:t>‹#›</a:t>
+            </a:fld>
+            <a:endParaRPr lang="en-US"/>
+          </a:p>
+        </p:txBody>
+      </p:sp>
+    </p:spTree>
+    <p:extLst>
+      <p:ext uri="{BB962C8B-B14F-4D97-AF65-F5344CB8AC3E}">
+        <p14:creationId xmlns:p14="http://schemas.microsoft.com/office/powerpoint/2010/main" val="3782709779"/>
+      </p:ext>
+    </p:extLst>
+  </p:cSld>
+  <p:clrMap bg1="lt1" tx1="dk1" bg2="lt2" tx2="dk2" accent1="accent1" accent2="accent2" accent3="accent3" accent4="accent4" accent5="accent5" accent6="accent6" hlink="hlink" folHlink="folHlink"/>
+  <p:notesStyle>
+    <a:lvl1pPr marL="0" algn="l" defTabSz="914400" rtl="0" eaLnBrk="1" latinLnBrk="0" hangingPunct="1">
+      <a:defRPr sz="1200" kern="1200">
+        <a:solidFill>
+          <a:schemeClr val="tx1"/>
+        </a:solidFill>
+        <a:latin typeface="+mn-lt"/>
+        <a:ea typeface="+mn-ea"/>
+        <a:cs typeface="+mn-cs"/>
+      </a:defRPr>
+    </a:lvl1pPr>
+    <a:lvl2pPr marL="457200" algn="l" defTabSz="914400" rtl="0" eaLnBrk="1" latinLnBrk="0" hangingPunct="1">
+      <a:defRPr sz="1200" kern="1200">
+        <a:solidFill>
+          <a:schemeClr val="tx1"/>
+        </a:solidFill>
+        <a:latin typeface="+mn-lt"/>
+        <a:ea typeface="+mn-ea"/>
+        <a:cs typeface="+mn-cs"/>
+      </a:defRPr>
+    </a:lvl2pPr>
+    <a:lvl3pPr marL="914400" algn="l" defTabSz="914400" rtl="0" eaLnBrk="1" latinLnBrk="0" hangingPunct="1">
+      <a:defRPr sz="1200" kern="1200">
+        <a:solidFill>
+          <a:schemeClr val="tx1"/>
+        </a:solidFill>
+        <a:latin typeface="+mn-lt"/>
+        <a:ea typeface="+mn-ea"/>
+        <a:cs typeface="+mn-cs"/>
+      </a:defRPr>
+    </a:lvl3pPr>
+    <a:lvl4pPr marL="1371600" algn="l" defTabSz="914400" rtl="0" eaLnBrk="1" latinLnBrk="0" hangingPunct="1">
+      <a:defRPr sz="1200" kern="1200">
+        <a:solidFill>
+          <a:schemeClr val="tx1"/>
+        </a:solidFill>
+        <a:latin typeface="+mn-lt"/>
+        <a:ea typeface="+mn-ea"/>
+        <a:cs typeface="+mn-cs"/>
+      </a:defRPr>
+    </a:lvl4pPr>
+    <a:lvl5pPr marL="1828800" algn="l" defTabSz="914400" rtl="0" eaLnBrk="1" latinLnBrk="0" hangingPunct="1">
+      <a:defRPr sz="1200" kern="1200">
+        <a:solidFill>
+          <a:schemeClr val="tx1"/>
+        </a:solidFill>
+        <a:latin typeface="+mn-lt"/>
+        <a:ea typeface="+mn-ea"/>
+        <a:cs typeface="+mn-cs"/>
+      </a:defRPr>
+    </a:lvl5pPr>
+    <a:lvl6pPr marL="2286000" algn="l" defTabSz="914400" rtl="0" eaLnBrk="1" latinLnBrk="0" hangingPunct="1">
+      <a:defRPr sz="1200" kern="1200">
+        <a:solidFill>
+          <a:schemeClr val="tx1"/>
+        </a:solidFill>
+        <a:latin typeface="+mn-lt"/>
+        <a:ea typeface="+mn-ea"/>
+        <a:cs typeface="+mn-cs"/>
+      </a:defRPr>
+    </a:lvl6pPr>
+    <a:lvl7pPr marL="2743200" algn="l" defTabSz="914400" rtl="0" eaLnBrk="1" latinLnBrk="0" hangingPunct="1">
+      <a:defRPr sz="1200" kern="1200">
+        <a:solidFill>
+          <a:schemeClr val="tx1"/>
+        </a:solidFill>
+        <a:latin typeface="+mn-lt"/>
+        <a:ea typeface="+mn-ea"/>
+        <a:cs typeface="+mn-cs"/>
+      </a:defRPr>
+    </a:lvl7pPr>
+    <a:lvl8pPr marL="3200400" algn="l" defTabSz="914400" rtl="0" eaLnBrk="1" latinLnBrk="0" hangingPunct="1">
+      <a:defRPr sz="1200" kern="1200">
+        <a:solidFill>
+          <a:schemeClr val="tx1"/>
+        </a:solidFill>
+        <a:latin typeface="+mn-lt"/>
+        <a:ea typeface="+mn-ea"/>
+        <a:cs typeface="+mn-cs"/>
+      </a:defRPr>
+    </a:lvl8pPr>
+    <a:lvl9pPr marL="3657600" algn="l" defTabSz="914400" rtl="0" eaLnBrk="1" latinLnBrk="0" hangingPunct="1">
+      <a:defRPr sz="1200" kern="1200">
+        <a:solidFill>
+          <a:schemeClr val="tx1"/>
+        </a:solidFill>
+        <a:latin typeface="+mn-lt"/>
+        <a:ea typeface="+mn-ea"/>
+        <a:cs typeface="+mn-cs"/>
+      </a:defRPr>
+    </a:lvl9pPr>
+  </p:notesStyle>
+</p:notesMaster>
+</file>
+
+<file path=ppt/notesSlides/notesSlide1.xml><?xml version="1.0" encoding="utf-8"?>
+<p:notes xmlns:a="http://schemas.openxmlformats.org/drawingml/2006/main" xmlns:r="http://schemas.openxmlformats.org/officeDocument/2006/relationships" xmlns:p="http://schemas.openxmlformats.org/presentationml/2006/main">
+  <p:cSld>
+    <p:spTree>
+      <p:nvGrpSpPr>
+        <p:cNvPr id="1" name=""/>
+        <p:cNvGrpSpPr/>
+        <p:nvPr/>
+      </p:nvGrpSpPr>
+      <p:grpSpPr>
+        <a:xfrm>
+          <a:off x="0" y="0"/>
+          <a:ext cx="0" cy="0"/>
+          <a:chOff x="0" y="0"/>
+          <a:chExt cx="0" cy="0"/>
+        </a:xfrm>
+      </p:grpSpPr>
+      <p:sp>
+        <p:nvSpPr>
+          <p:cNvPr id="2" name="Slide Image Placeholder 1"/>
+          <p:cNvSpPr>
+            <a:spLocks noGrp="1" noRot="1" noChangeAspect="1"/>
+          </p:cNvSpPr>
+          <p:nvPr>
+            <p:ph type="sldImg"/>
+          </p:nvPr>
+        </p:nvSpPr>
+        <p:spPr/>
+      </p:sp>
+      <p:sp>
+        <p:nvSpPr>
+          <p:cNvPr id="3" name="Notes Placeholder 2"/>
+          <p:cNvSpPr>
+            <a:spLocks noGrp="1"/>
+          </p:cNvSpPr>
+          <p:nvPr>
+            <p:ph type="body" idx="1"/>
+          </p:nvPr>
+        </p:nvSpPr>
+        <p:spPr/>
+        <p:txBody>
+          <a:bodyPr/>
+          <a:lstStyle/>
+          <a:p>
+            <a:pPr lvl="0" indent="0" marL="0">
+              <a:buNone/>
+            </a:pPr>
+            <a:r>
+              <a:rPr/>
+              <a:t>Ask students to open all three sets of files before beginning. Emphasize that the worksheet is the working document; the paper comes later.</a:t>
+            </a:r>
+          </a:p>
+        </p:txBody>
+      </p:sp>
+      <p:sp>
+        <p:nvSpPr>
+          <p:cNvPr id="4" name="Slide Number Placeholder 3"/>
+          <p:cNvSpPr>
+            <a:spLocks noGrp="1"/>
+          </p:cNvSpPr>
+          <p:nvPr>
+            <p:ph type="sldNum" sz="quarter" idx="10"/>
+          </p:nvPr>
+        </p:nvSpPr>
+        <p:spPr/>
+        <p:txBody>
+          <a:bodyPr/>
+          <a:lstStyle/>
+          <a:p>
+            <a:fld id="{18BDFEC3-8487-43E8-A154-7C12CBC1FFF2}" type="slidenum">
+              <a:rPr lang="en-US"/>
+              <a:t>2</a:t>
+            </a:fld>
+            <a:endParaRPr lang="en-US"/>
+          </a:p>
+        </p:txBody>
+      </p:sp>
+    </p:spTree>
+  </p:cSld>
+</p:notes>
+</file>
+
+<file path=ppt/notesSlides/notesSlide10.xml><?xml version="1.0" encoding="utf-8"?>
+<p:notes xmlns:a="http://schemas.openxmlformats.org/drawingml/2006/main" xmlns:r="http://schemas.openxmlformats.org/officeDocument/2006/relationships" xmlns:p="http://schemas.openxmlformats.org/presentationml/2006/main">
+  <p:cSld>
+    <p:spTree>
+      <p:nvGrpSpPr>
+        <p:cNvPr id="1" name=""/>
+        <p:cNvGrpSpPr/>
+        <p:nvPr/>
+      </p:nvGrpSpPr>
+      <p:grpSpPr>
+        <a:xfrm>
+          <a:off x="0" y="0"/>
+          <a:ext cx="0" cy="0"/>
+          <a:chOff x="0" y="0"/>
+          <a:chExt cx="0" cy="0"/>
+        </a:xfrm>
+      </p:grpSpPr>
+      <p:sp>
+        <p:nvSpPr>
+          <p:cNvPr id="2" name="Slide Image Placeholder 1"/>
+          <p:cNvSpPr>
+            <a:spLocks noGrp="1" noRot="1" noChangeAspect="1"/>
+          </p:cNvSpPr>
+          <p:nvPr>
+            <p:ph type="sldImg"/>
+          </p:nvPr>
+        </p:nvSpPr>
+        <p:spPr/>
+      </p:sp>
+      <p:sp>
+        <p:nvSpPr>
+          <p:cNvPr id="3" name="Notes Placeholder 2"/>
+          <p:cNvSpPr>
+            <a:spLocks noGrp="1"/>
+          </p:cNvSpPr>
+          <p:nvPr>
+            <p:ph type="body" idx="1"/>
+          </p:nvPr>
+        </p:nvSpPr>
+        <p:spPr/>
+        <p:txBody>
+          <a:bodyPr/>
+          <a:lstStyle/>
+          <a:p>
+            <a:pPr lvl="0" indent="0" marL="0">
+              <a:buNone/>
+            </a:pPr>
+            <a:r>
+              <a:rPr/>
+              <a:t>Ask students what changed before discussing the results: this article studies a different outcome and uses an observational rather than experimental design.</a:t>
+            </a:r>
+          </a:p>
+        </p:txBody>
+      </p:sp>
+      <p:sp>
+        <p:nvSpPr>
+          <p:cNvPr id="4" name="Slide Number Placeholder 3"/>
+          <p:cNvSpPr>
+            <a:spLocks noGrp="1"/>
+          </p:cNvSpPr>
+          <p:nvPr>
+            <p:ph type="sldNum" sz="quarter" idx="10"/>
+          </p:nvPr>
+        </p:nvSpPr>
+        <p:spPr/>
+        <p:txBody>
+          <a:bodyPr/>
+          <a:lstStyle/>
+          <a:p>
+            <a:fld id="{18BDFEC3-8487-43E8-A154-7C12CBC1FFF2}" type="slidenum">
+              <a:rPr lang="en-US"/>
+              <a:t>11</a:t>
+            </a:fld>
+            <a:endParaRPr lang="en-US"/>
+          </a:p>
+        </p:txBody>
+      </p:sp>
+    </p:spTree>
+  </p:cSld>
+</p:notes>
+</file>
+
+<file path=ppt/notesSlides/notesSlide11.xml><?xml version="1.0" encoding="utf-8"?>
+<p:notes xmlns:a="http://schemas.openxmlformats.org/drawingml/2006/main" xmlns:r="http://schemas.openxmlformats.org/officeDocument/2006/relationships" xmlns:p="http://schemas.openxmlformats.org/presentationml/2006/main">
+  <p:cSld>
+    <p:spTree>
+      <p:nvGrpSpPr>
+        <p:cNvPr id="1" name=""/>
+        <p:cNvGrpSpPr/>
+        <p:nvPr/>
+      </p:nvGrpSpPr>
+      <p:grpSpPr>
+        <a:xfrm>
+          <a:off x="0" y="0"/>
+          <a:ext cx="0" cy="0"/>
+          <a:chOff x="0" y="0"/>
+          <a:chExt cx="0" cy="0"/>
+        </a:xfrm>
+      </p:grpSpPr>
+      <p:sp>
+        <p:nvSpPr>
+          <p:cNvPr id="2" name="Slide Image Placeholder 1"/>
+          <p:cNvSpPr>
+            <a:spLocks noGrp="1" noRot="1" noChangeAspect="1"/>
+          </p:cNvSpPr>
+          <p:nvPr>
+            <p:ph type="sldImg"/>
+          </p:nvPr>
+        </p:nvSpPr>
+        <p:spPr/>
+      </p:sp>
+      <p:sp>
+        <p:nvSpPr>
+          <p:cNvPr id="3" name="Notes Placeholder 2"/>
+          <p:cNvSpPr>
+            <a:spLocks noGrp="1"/>
+          </p:cNvSpPr>
+          <p:nvPr>
+            <p:ph type="body" idx="1"/>
+          </p:nvPr>
+        </p:nvSpPr>
+        <p:spPr/>
+        <p:txBody>
+          <a:bodyPr/>
+          <a:lstStyle/>
+          <a:p>
+            <a:pPr lvl="0" indent="0" marL="0">
+              <a:buNone/>
+            </a:pPr>
+            <a:r>
+              <a:rPr/>
+              <a:t>The servers followed their usual behavior. Because each server brought their own personality and service style to the posture category, posture was confounded with server characteristics.</a:t>
+            </a:r>
+          </a:p>
+        </p:txBody>
+      </p:sp>
+      <p:sp>
+        <p:nvSpPr>
+          <p:cNvPr id="4" name="Slide Number Placeholder 3"/>
+          <p:cNvSpPr>
+            <a:spLocks noGrp="1"/>
+          </p:cNvSpPr>
+          <p:nvPr>
+            <p:ph type="sldNum" sz="quarter" idx="10"/>
+          </p:nvPr>
+        </p:nvSpPr>
+        <p:spPr/>
+        <p:txBody>
+          <a:bodyPr/>
+          <a:lstStyle/>
+          <a:p>
+            <a:fld id="{18BDFEC3-8487-43E8-A154-7C12CBC1FFF2}" type="slidenum">
+              <a:rPr lang="en-US"/>
+              <a:t>12</a:t>
+            </a:fld>
+            <a:endParaRPr lang="en-US"/>
+          </a:p>
+        </p:txBody>
+      </p:sp>
+    </p:spTree>
+  </p:cSld>
+</p:notes>
+</file>
+
+<file path=ppt/notesSlides/notesSlide12.xml><?xml version="1.0" encoding="utf-8"?>
+<p:notes xmlns:a="http://schemas.openxmlformats.org/drawingml/2006/main" xmlns:r="http://schemas.openxmlformats.org/officeDocument/2006/relationships" xmlns:p="http://schemas.openxmlformats.org/presentationml/2006/main">
+  <p:cSld>
+    <p:spTree>
+      <p:nvGrpSpPr>
+        <p:cNvPr id="1" name=""/>
+        <p:cNvGrpSpPr/>
+        <p:nvPr/>
+      </p:nvGrpSpPr>
+      <p:grpSpPr>
+        <a:xfrm>
+          <a:off x="0" y="0"/>
+          <a:ext cx="0" cy="0"/>
+          <a:chOff x="0" y="0"/>
+          <a:chExt cx="0" cy="0"/>
+        </a:xfrm>
+      </p:grpSpPr>
+      <p:sp>
+        <p:nvSpPr>
+          <p:cNvPr id="2" name="Slide Image Placeholder 1"/>
+          <p:cNvSpPr>
+            <a:spLocks noGrp="1" noRot="1" noChangeAspect="1"/>
+          </p:cNvSpPr>
+          <p:nvPr>
+            <p:ph type="sldImg"/>
+          </p:nvPr>
+        </p:nvSpPr>
+        <p:spPr/>
+      </p:sp>
+      <p:sp>
+        <p:nvSpPr>
+          <p:cNvPr id="3" name="Notes Placeholder 2"/>
+          <p:cNvSpPr>
+            <a:spLocks noGrp="1"/>
+          </p:cNvSpPr>
+          <p:nvPr>
+            <p:ph type="body" idx="1"/>
+          </p:nvPr>
+        </p:nvSpPr>
+        <p:spPr/>
+        <p:txBody>
+          <a:bodyPr/>
+          <a:lstStyle/>
+          <a:p>
+            <a:pPr lvl="0" indent="0" marL="0">
+              <a:buNone/>
+            </a:pPr>
+            <a:r>
+              <a:rPr/>
+              <a:t>After removing one extreme score from each condition, add-on sales averaged $5.60 for squatting and $2.80 for standing. Initial visits averaged 64 versus 34 seconds. Keep the distinction between the pattern and the causal claim explicit.</a:t>
+            </a:r>
+          </a:p>
+        </p:txBody>
+      </p:sp>
+      <p:sp>
+        <p:nvSpPr>
+          <p:cNvPr id="4" name="Slide Number Placeholder 3"/>
+          <p:cNvSpPr>
+            <a:spLocks noGrp="1"/>
+          </p:cNvSpPr>
+          <p:nvPr>
+            <p:ph type="sldNum" sz="quarter" idx="10"/>
+          </p:nvPr>
+        </p:nvSpPr>
+        <p:spPr/>
+        <p:txBody>
+          <a:bodyPr/>
+          <a:lstStyle/>
+          <a:p>
+            <a:fld id="{18BDFEC3-8487-43E8-A154-7C12CBC1FFF2}" type="slidenum">
+              <a:rPr lang="en-US"/>
+              <a:t>13</a:t>
+            </a:fld>
+            <a:endParaRPr lang="en-US"/>
+          </a:p>
+        </p:txBody>
+      </p:sp>
+    </p:spTree>
+  </p:cSld>
+</p:notes>
+</file>
+
+<file path=ppt/notesSlides/notesSlide13.xml><?xml version="1.0" encoding="utf-8"?>
+<p:notes xmlns:a="http://schemas.openxmlformats.org/drawingml/2006/main" xmlns:r="http://schemas.openxmlformats.org/officeDocument/2006/relationships" xmlns:p="http://schemas.openxmlformats.org/presentationml/2006/main">
+  <p:cSld>
+    <p:spTree>
+      <p:nvGrpSpPr>
+        <p:cNvPr id="1" name=""/>
+        <p:cNvGrpSpPr/>
+        <p:nvPr/>
+      </p:nvGrpSpPr>
+      <p:grpSpPr>
+        <a:xfrm>
+          <a:off x="0" y="0"/>
+          <a:ext cx="0" cy="0"/>
+          <a:chOff x="0" y="0"/>
+          <a:chExt cx="0" cy="0"/>
+        </a:xfrm>
+      </p:grpSpPr>
+      <p:sp>
+        <p:nvSpPr>
+          <p:cNvPr id="2" name="Slide Image Placeholder 1"/>
+          <p:cNvSpPr>
+            <a:spLocks noGrp="1" noRot="1" noChangeAspect="1"/>
+          </p:cNvSpPr>
+          <p:nvPr>
+            <p:ph type="sldImg"/>
+          </p:nvPr>
+        </p:nvSpPr>
+        <p:spPr/>
+      </p:sp>
+      <p:sp>
+        <p:nvSpPr>
+          <p:cNvPr id="3" name="Notes Placeholder 2"/>
+          <p:cNvSpPr>
+            <a:spLocks noGrp="1"/>
+          </p:cNvSpPr>
+          <p:nvPr>
+            <p:ph type="body" idx="1"/>
+          </p:nvPr>
+        </p:nvSpPr>
+        <p:spPr/>
+        <p:txBody>
+          <a:bodyPr/>
+          <a:lstStyle/>
+          <a:p>
+            <a:pPr lvl="0" indent="0" marL="0">
+              <a:buNone/>
+            </a:pPr>
+            <a:r>
+              <a:rPr/>
+              <a:t>Use the design comparison to structure the synthesis. Students should not treat the two articles as equally strong causal evidence.</a:t>
+            </a:r>
+          </a:p>
+        </p:txBody>
+      </p:sp>
+      <p:sp>
+        <p:nvSpPr>
+          <p:cNvPr id="4" name="Slide Number Placeholder 3"/>
+          <p:cNvSpPr>
+            <a:spLocks noGrp="1"/>
+          </p:cNvSpPr>
+          <p:nvPr>
+            <p:ph type="sldNum" sz="quarter" idx="10"/>
+          </p:nvPr>
+        </p:nvSpPr>
+        <p:spPr/>
+        <p:txBody>
+          <a:bodyPr/>
+          <a:lstStyle/>
+          <a:p>
+            <a:fld id="{18BDFEC3-8487-43E8-A154-7C12CBC1FFF2}" type="slidenum">
+              <a:rPr lang="en-US"/>
+              <a:t>14</a:t>
+            </a:fld>
+            <a:endParaRPr lang="en-US"/>
+          </a:p>
+        </p:txBody>
+      </p:sp>
+    </p:spTree>
+  </p:cSld>
+</p:notes>
+</file>
+
+<file path=ppt/notesSlides/notesSlide14.xml><?xml version="1.0" encoding="utf-8"?>
+<p:notes xmlns:a="http://schemas.openxmlformats.org/drawingml/2006/main" xmlns:r="http://schemas.openxmlformats.org/officeDocument/2006/relationships" xmlns:p="http://schemas.openxmlformats.org/presentationml/2006/main">
+  <p:cSld>
+    <p:spTree>
+      <p:nvGrpSpPr>
+        <p:cNvPr id="1" name=""/>
+        <p:cNvGrpSpPr/>
+        <p:nvPr/>
+      </p:nvGrpSpPr>
+      <p:grpSpPr>
+        <a:xfrm>
+          <a:off x="0" y="0"/>
+          <a:ext cx="0" cy="0"/>
+          <a:chOff x="0" y="0"/>
+          <a:chExt cx="0" cy="0"/>
+        </a:xfrm>
+      </p:grpSpPr>
+      <p:sp>
+        <p:nvSpPr>
+          <p:cNvPr id="2" name="Slide Image Placeholder 1"/>
+          <p:cNvSpPr>
+            <a:spLocks noGrp="1" noRot="1" noChangeAspect="1"/>
+          </p:cNvSpPr>
+          <p:nvPr>
+            <p:ph type="sldImg"/>
+          </p:nvPr>
+        </p:nvSpPr>
+        <p:spPr/>
+      </p:sp>
+      <p:sp>
+        <p:nvSpPr>
+          <p:cNvPr id="3" name="Notes Placeholder 2"/>
+          <p:cNvSpPr>
+            <a:spLocks noGrp="1"/>
+          </p:cNvSpPr>
+          <p:nvPr>
+            <p:ph type="body" idx="1"/>
+          </p:nvPr>
+        </p:nvSpPr>
+        <p:spPr/>
+        <p:txBody>
+          <a:bodyPr/>
+          <a:lstStyle/>
+          <a:p>
+            <a:pPr lvl="0" indent="0" marL="0">
+              <a:buNone/>
+            </a:pPr>
+            <a:r>
+              <a:rPr/>
+              <a:t>The paragraph should move between articles rather than summarize one and then the other. Encourage students to mention the design difference because it changes confidence in the conclusions.</a:t>
+            </a:r>
+          </a:p>
+        </p:txBody>
+      </p:sp>
+      <p:sp>
+        <p:nvSpPr>
+          <p:cNvPr id="4" name="Slide Number Placeholder 3"/>
+          <p:cNvSpPr>
+            <a:spLocks noGrp="1"/>
+          </p:cNvSpPr>
+          <p:nvPr>
+            <p:ph type="sldNum" sz="quarter" idx="10"/>
+          </p:nvPr>
+        </p:nvSpPr>
+        <p:spPr/>
+        <p:txBody>
+          <a:bodyPr/>
+          <a:lstStyle/>
+          <a:p>
+            <a:fld id="{18BDFEC3-8487-43E8-A154-7C12CBC1FFF2}" type="slidenum">
+              <a:rPr lang="en-US"/>
+              <a:t>15</a:t>
+            </a:fld>
+            <a:endParaRPr lang="en-US"/>
+          </a:p>
+        </p:txBody>
+      </p:sp>
+    </p:spTree>
+  </p:cSld>
+</p:notes>
+</file>
+
+<file path=ppt/notesSlides/notesSlide15.xml><?xml version="1.0" encoding="utf-8"?>
+<p:notes xmlns:a="http://schemas.openxmlformats.org/drawingml/2006/main" xmlns:r="http://schemas.openxmlformats.org/officeDocument/2006/relationships" xmlns:p="http://schemas.openxmlformats.org/presentationml/2006/main">
+  <p:cSld>
+    <p:spTree>
+      <p:nvGrpSpPr>
+        <p:cNvPr id="1" name=""/>
+        <p:cNvGrpSpPr/>
+        <p:nvPr/>
+      </p:nvGrpSpPr>
+      <p:grpSpPr>
+        <a:xfrm>
+          <a:off x="0" y="0"/>
+          <a:ext cx="0" cy="0"/>
+          <a:chOff x="0" y="0"/>
+          <a:chExt cx="0" cy="0"/>
+        </a:xfrm>
+      </p:grpSpPr>
+      <p:sp>
+        <p:nvSpPr>
+          <p:cNvPr id="2" name="Slide Image Placeholder 1"/>
+          <p:cNvSpPr>
+            <a:spLocks noGrp="1" noRot="1" noChangeAspect="1"/>
+          </p:cNvSpPr>
+          <p:nvPr>
+            <p:ph type="sldImg"/>
+          </p:nvPr>
+        </p:nvSpPr>
+        <p:spPr/>
+      </p:sp>
+      <p:sp>
+        <p:nvSpPr>
+          <p:cNvPr id="3" name="Notes Placeholder 2"/>
+          <p:cNvSpPr>
+            <a:spLocks noGrp="1"/>
+          </p:cNvSpPr>
+          <p:nvPr>
+            <p:ph type="body" idx="1"/>
+          </p:nvPr>
+        </p:nvSpPr>
+        <p:spPr/>
+        <p:txBody>
+          <a:bodyPr/>
+          <a:lstStyle/>
+          <a:p>
+            <a:pPr lvl="0" indent="0" marL="0">
+              <a:buNone/>
+            </a:pPr>
+            <a:r>
+              <a:rPr/>
+              <a:t>This mechanism question is an example, not a required proposal topic. Students may pursue another justified question as long as the reviewed evidence leads clearly to it.</a:t>
+            </a:r>
+          </a:p>
+        </p:txBody>
+      </p:sp>
+      <p:sp>
+        <p:nvSpPr>
+          <p:cNvPr id="4" name="Slide Number Placeholder 3"/>
+          <p:cNvSpPr>
+            <a:spLocks noGrp="1"/>
+          </p:cNvSpPr>
+          <p:nvPr>
+            <p:ph type="sldNum" sz="quarter" idx="10"/>
+          </p:nvPr>
+        </p:nvSpPr>
+        <p:spPr/>
+        <p:txBody>
+          <a:bodyPr/>
+          <a:lstStyle/>
+          <a:p>
+            <a:fld id="{18BDFEC3-8487-43E8-A154-7C12CBC1FFF2}" type="slidenum">
+              <a:rPr lang="en-US"/>
+              <a:t>16</a:t>
+            </a:fld>
+            <a:endParaRPr lang="en-US"/>
+          </a:p>
+        </p:txBody>
+      </p:sp>
+    </p:spTree>
+  </p:cSld>
+</p:notes>
+</file>
+
+<file path=ppt/notesSlides/notesSlide16.xml><?xml version="1.0" encoding="utf-8"?>
+<p:notes xmlns:a="http://schemas.openxmlformats.org/drawingml/2006/main" xmlns:r="http://schemas.openxmlformats.org/officeDocument/2006/relationships" xmlns:p="http://schemas.openxmlformats.org/presentationml/2006/main">
+  <p:cSld>
+    <p:spTree>
+      <p:nvGrpSpPr>
+        <p:cNvPr id="1" name=""/>
+        <p:cNvGrpSpPr/>
+        <p:nvPr/>
+      </p:nvGrpSpPr>
+      <p:grpSpPr>
+        <a:xfrm>
+          <a:off x="0" y="0"/>
+          <a:ext cx="0" cy="0"/>
+          <a:chOff x="0" y="0"/>
+          <a:chExt cx="0" cy="0"/>
+        </a:xfrm>
+      </p:grpSpPr>
+      <p:sp>
+        <p:nvSpPr>
+          <p:cNvPr id="2" name="Slide Image Placeholder 1"/>
+          <p:cNvSpPr>
+            <a:spLocks noGrp="1" noRot="1" noChangeAspect="1"/>
+          </p:cNvSpPr>
+          <p:nvPr>
+            <p:ph type="sldImg"/>
+          </p:nvPr>
+        </p:nvSpPr>
+        <p:spPr/>
+      </p:sp>
+      <p:sp>
+        <p:nvSpPr>
+          <p:cNvPr id="3" name="Notes Placeholder 2"/>
+          <p:cNvSpPr>
+            <a:spLocks noGrp="1"/>
+          </p:cNvSpPr>
+          <p:nvPr>
+            <p:ph type="body" idx="1"/>
+          </p:nvPr>
+        </p:nvSpPr>
+        <p:spPr/>
+        <p:txBody>
+          <a:bodyPr/>
+          <a:lstStyle/>
+          <a:p>
+            <a:pPr lvl="0" indent="0" marL="0">
+              <a:buNone/>
+            </a:pPr>
+            <a:r>
+              <a:rPr/>
+              <a:t>Have students read their sentence aloud. A reader should be able to identify exactly who is studied, what changes, what is measured, and what direction is expected.</a:t>
+            </a:r>
+          </a:p>
+        </p:txBody>
+      </p:sp>
+      <p:sp>
+        <p:nvSpPr>
+          <p:cNvPr id="4" name="Slide Number Placeholder 3"/>
+          <p:cNvSpPr>
+            <a:spLocks noGrp="1"/>
+          </p:cNvSpPr>
+          <p:nvPr>
+            <p:ph type="sldNum" sz="quarter" idx="10"/>
+          </p:nvPr>
+        </p:nvSpPr>
+        <p:spPr/>
+        <p:txBody>
+          <a:bodyPr/>
+          <a:lstStyle/>
+          <a:p>
+            <a:fld id="{18BDFEC3-8487-43E8-A154-7C12CBC1FFF2}" type="slidenum">
+              <a:rPr lang="en-US"/>
+              <a:t>17</a:t>
+            </a:fld>
+            <a:endParaRPr lang="en-US"/>
+          </a:p>
+        </p:txBody>
+      </p:sp>
+    </p:spTree>
+  </p:cSld>
+</p:notes>
+</file>
+
+<file path=ppt/notesSlides/notesSlide17.xml><?xml version="1.0" encoding="utf-8"?>
+<p:notes xmlns:a="http://schemas.openxmlformats.org/drawingml/2006/main" xmlns:r="http://schemas.openxmlformats.org/officeDocument/2006/relationships" xmlns:p="http://schemas.openxmlformats.org/presentationml/2006/main">
+  <p:cSld>
+    <p:spTree>
+      <p:nvGrpSpPr>
+        <p:cNvPr id="1" name=""/>
+        <p:cNvGrpSpPr/>
+        <p:nvPr/>
+      </p:nvGrpSpPr>
+      <p:grpSpPr>
+        <a:xfrm>
+          <a:off x="0" y="0"/>
+          <a:ext cx="0" cy="0"/>
+          <a:chOff x="0" y="0"/>
+          <a:chExt cx="0" cy="0"/>
+        </a:xfrm>
+      </p:grpSpPr>
+      <p:sp>
+        <p:nvSpPr>
+          <p:cNvPr id="2" name="Slide Image Placeholder 1"/>
+          <p:cNvSpPr>
+            <a:spLocks noGrp="1" noRot="1" noChangeAspect="1"/>
+          </p:cNvSpPr>
+          <p:nvPr>
+            <p:ph type="sldImg"/>
+          </p:nvPr>
+        </p:nvSpPr>
+        <p:spPr/>
+      </p:sp>
+      <p:sp>
+        <p:nvSpPr>
+          <p:cNvPr id="3" name="Notes Placeholder 2"/>
+          <p:cNvSpPr>
+            <a:spLocks noGrp="1"/>
+          </p:cNvSpPr>
+          <p:nvPr>
+            <p:ph type="body" idx="1"/>
+          </p:nvPr>
+        </p:nvSpPr>
+        <p:spPr/>
+        <p:txBody>
+          <a:bodyPr/>
+          <a:lstStyle/>
+          <a:p>
+            <a:pPr lvl="0" indent="0" marL="0">
+              <a:buNone/>
+            </a:pPr>
+            <a:r>
+              <a:rPr/>
+              <a:t>The method must be detailed enough for replication, but the first draft can begin with these five decisions. Ask students to check that each choice directly tests the hypothesis.</a:t>
+            </a:r>
+          </a:p>
+        </p:txBody>
+      </p:sp>
+      <p:sp>
+        <p:nvSpPr>
+          <p:cNvPr id="4" name="Slide Number Placeholder 3"/>
+          <p:cNvSpPr>
+            <a:spLocks noGrp="1"/>
+          </p:cNvSpPr>
+          <p:nvPr>
+            <p:ph type="sldNum" sz="quarter" idx="10"/>
+          </p:nvPr>
+        </p:nvSpPr>
+        <p:spPr/>
+        <p:txBody>
+          <a:bodyPr/>
+          <a:lstStyle/>
+          <a:p>
+            <a:fld id="{18BDFEC3-8487-43E8-A154-7C12CBC1FFF2}" type="slidenum">
+              <a:rPr lang="en-US"/>
+              <a:t>18</a:t>
+            </a:fld>
+            <a:endParaRPr lang="en-US"/>
+          </a:p>
+        </p:txBody>
+      </p:sp>
+    </p:spTree>
+  </p:cSld>
+</p:notes>
+</file>
+
+<file path=ppt/notesSlides/notesSlide18.xml><?xml version="1.0" encoding="utf-8"?>
+<p:notes xmlns:a="http://schemas.openxmlformats.org/drawingml/2006/main" xmlns:r="http://schemas.openxmlformats.org/officeDocument/2006/relationships" xmlns:p="http://schemas.openxmlformats.org/presentationml/2006/main">
+  <p:cSld>
+    <p:spTree>
+      <p:nvGrpSpPr>
+        <p:cNvPr id="1" name=""/>
+        <p:cNvGrpSpPr/>
+        <p:nvPr/>
+      </p:nvGrpSpPr>
+      <p:grpSpPr>
+        <a:xfrm>
+          <a:off x="0" y="0"/>
+          <a:ext cx="0" cy="0"/>
+          <a:chOff x="0" y="0"/>
+          <a:chExt cx="0" cy="0"/>
+        </a:xfrm>
+      </p:grpSpPr>
+      <p:sp>
+        <p:nvSpPr>
+          <p:cNvPr id="2" name="Slide Image Placeholder 1"/>
+          <p:cNvSpPr>
+            <a:spLocks noGrp="1" noRot="1" noChangeAspect="1"/>
+          </p:cNvSpPr>
+          <p:nvPr>
+            <p:ph type="sldImg"/>
+          </p:nvPr>
+        </p:nvSpPr>
+        <p:spPr/>
+      </p:sp>
+      <p:sp>
+        <p:nvSpPr>
+          <p:cNvPr id="3" name="Notes Placeholder 2"/>
+          <p:cNvSpPr>
+            <a:spLocks noGrp="1"/>
+          </p:cNvSpPr>
+          <p:nvPr>
+            <p:ph type="body" idx="1"/>
+          </p:nvPr>
+        </p:nvSpPr>
+        <p:spPr/>
+        <p:txBody>
+          <a:bodyPr/>
+          <a:lstStyle/>
+          <a:p>
+            <a:pPr lvl="0" indent="0" marL="0">
+              <a:buNone/>
+            </a:pPr>
+            <a:r>
+              <a:rPr/>
+              <a:t>For internal validity, ask what else could differ between conditions. For external validity, ask exactly which people, places, tasks, and times the sample can represent.</a:t>
+            </a:r>
+          </a:p>
+        </p:txBody>
+      </p:sp>
+      <p:sp>
+        <p:nvSpPr>
+          <p:cNvPr id="4" name="Slide Number Placeholder 3"/>
+          <p:cNvSpPr>
+            <a:spLocks noGrp="1"/>
+          </p:cNvSpPr>
+          <p:nvPr>
+            <p:ph type="sldNum" sz="quarter" idx="10"/>
+          </p:nvPr>
+        </p:nvSpPr>
+        <p:spPr/>
+        <p:txBody>
+          <a:bodyPr/>
+          <a:lstStyle/>
+          <a:p>
+            <a:fld id="{18BDFEC3-8487-43E8-A154-7C12CBC1FFF2}" type="slidenum">
+              <a:rPr lang="en-US"/>
+              <a:t>19</a:t>
+            </a:fld>
+            <a:endParaRPr lang="en-US"/>
+          </a:p>
+        </p:txBody>
+      </p:sp>
+    </p:spTree>
+  </p:cSld>
+</p:notes>
+</file>
+
+<file path=ppt/notesSlides/notesSlide19.xml><?xml version="1.0" encoding="utf-8"?>
+<p:notes xmlns:a="http://schemas.openxmlformats.org/drawingml/2006/main" xmlns:r="http://schemas.openxmlformats.org/officeDocument/2006/relationships" xmlns:p="http://schemas.openxmlformats.org/presentationml/2006/main">
+  <p:cSld>
+    <p:spTree>
+      <p:nvGrpSpPr>
+        <p:cNvPr id="1" name=""/>
+        <p:cNvGrpSpPr/>
+        <p:nvPr/>
+      </p:nvGrpSpPr>
+      <p:grpSpPr>
+        <a:xfrm>
+          <a:off x="0" y="0"/>
+          <a:ext cx="0" cy="0"/>
+          <a:chOff x="0" y="0"/>
+          <a:chExt cx="0" cy="0"/>
+        </a:xfrm>
+      </p:grpSpPr>
+      <p:sp>
+        <p:nvSpPr>
+          <p:cNvPr id="2" name="Slide Image Placeholder 1"/>
+          <p:cNvSpPr>
+            <a:spLocks noGrp="1" noRot="1" noChangeAspect="1"/>
+          </p:cNvSpPr>
+          <p:nvPr>
+            <p:ph type="sldImg"/>
+          </p:nvPr>
+        </p:nvSpPr>
+        <p:spPr/>
+      </p:sp>
+      <p:sp>
+        <p:nvSpPr>
+          <p:cNvPr id="3" name="Notes Placeholder 2"/>
+          <p:cNvSpPr>
+            <a:spLocks noGrp="1"/>
+          </p:cNvSpPr>
+          <p:nvPr>
+            <p:ph type="body" idx="1"/>
+          </p:nvPr>
+        </p:nvSpPr>
+        <p:spPr/>
+        <p:txBody>
+          <a:bodyPr/>
+          <a:lstStyle/>
+          <a:p>
+            <a:pPr lvl="0" indent="0" marL="0">
+              <a:buNone/>
+            </a:pPr>
+            <a:r>
+              <a:rPr/>
+              <a:t>Students should compose these completed worksheet sections into a paper rather than drafting the paper from a blank page. Preserve the worksheet’s order.</a:t>
+            </a:r>
+          </a:p>
+        </p:txBody>
+      </p:sp>
+      <p:sp>
+        <p:nvSpPr>
+          <p:cNvPr id="4" name="Slide Number Placeholder 3"/>
+          <p:cNvSpPr>
+            <a:spLocks noGrp="1"/>
+          </p:cNvSpPr>
+          <p:nvPr>
+            <p:ph type="sldNum" sz="quarter" idx="10"/>
+          </p:nvPr>
+        </p:nvSpPr>
+        <p:spPr/>
+        <p:txBody>
+          <a:bodyPr/>
+          <a:lstStyle/>
+          <a:p>
+            <a:fld id="{18BDFEC3-8487-43E8-A154-7C12CBC1FFF2}" type="slidenum">
+              <a:rPr lang="en-US"/>
+              <a:t>20</a:t>
+            </a:fld>
+            <a:endParaRPr lang="en-US"/>
+          </a:p>
+        </p:txBody>
+      </p:sp>
+    </p:spTree>
+  </p:cSld>
+</p:notes>
+</file>
+
+<file path=ppt/notesSlides/notesSlide2.xml><?xml version="1.0" encoding="utf-8"?>
+<p:notes xmlns:a="http://schemas.openxmlformats.org/drawingml/2006/main" xmlns:r="http://schemas.openxmlformats.org/officeDocument/2006/relationships" xmlns:p="http://schemas.openxmlformats.org/presentationml/2006/main">
+  <p:cSld>
+    <p:spTree>
+      <p:nvGrpSpPr>
+        <p:cNvPr id="1" name=""/>
+        <p:cNvGrpSpPr/>
+        <p:nvPr/>
+      </p:nvGrpSpPr>
+      <p:grpSpPr>
+        <a:xfrm>
+          <a:off x="0" y="0"/>
+          <a:ext cx="0" cy="0"/>
+          <a:chOff x="0" y="0"/>
+          <a:chExt cx="0" cy="0"/>
+        </a:xfrm>
+      </p:grpSpPr>
+      <p:sp>
+        <p:nvSpPr>
+          <p:cNvPr id="2" name="Slide Image Placeholder 1"/>
+          <p:cNvSpPr>
+            <a:spLocks noGrp="1" noRot="1" noChangeAspect="1"/>
+          </p:cNvSpPr>
+          <p:nvPr>
+            <p:ph type="sldImg"/>
+          </p:nvPr>
+        </p:nvSpPr>
+        <p:spPr/>
+      </p:sp>
+      <p:sp>
+        <p:nvSpPr>
+          <p:cNvPr id="3" name="Notes Placeholder 2"/>
+          <p:cNvSpPr>
+            <a:spLocks noGrp="1"/>
+          </p:cNvSpPr>
+          <p:nvPr>
+            <p:ph type="body" idx="1"/>
+          </p:nvPr>
+        </p:nvSpPr>
+        <p:spPr/>
+        <p:txBody>
+          <a:bodyPr/>
+          <a:lstStyle/>
+          <a:p>
+            <a:pPr lvl="0" indent="0" marL="0">
+              <a:buNone/>
+            </a:pPr>
+            <a:r>
+              <a:rPr/>
+              <a:t>Show students where the article summaries, synthesis, and proposal appear in the worksheet. The gray rows contain grading information and should not be completed.</a:t>
+            </a:r>
+          </a:p>
+        </p:txBody>
+      </p:sp>
+      <p:sp>
+        <p:nvSpPr>
+          <p:cNvPr id="4" name="Slide Number Placeholder 3"/>
+          <p:cNvSpPr>
+            <a:spLocks noGrp="1"/>
+          </p:cNvSpPr>
+          <p:nvPr>
+            <p:ph type="sldNum" sz="quarter" idx="10"/>
+          </p:nvPr>
+        </p:nvSpPr>
+        <p:spPr/>
+        <p:txBody>
+          <a:bodyPr/>
+          <a:lstStyle/>
+          <a:p>
+            <a:fld id="{18BDFEC3-8487-43E8-A154-7C12CBC1FFF2}" type="slidenum">
+              <a:rPr lang="en-US"/>
+              <a:t>3</a:t>
+            </a:fld>
+            <a:endParaRPr lang="en-US"/>
+          </a:p>
+        </p:txBody>
+      </p:sp>
+    </p:spTree>
+  </p:cSld>
+</p:notes>
+</file>
+
+<file path=ppt/notesSlides/notesSlide20.xml><?xml version="1.0" encoding="utf-8"?>
+<p:notes xmlns:a="http://schemas.openxmlformats.org/drawingml/2006/main" xmlns:r="http://schemas.openxmlformats.org/officeDocument/2006/relationships" xmlns:p="http://schemas.openxmlformats.org/presentationml/2006/main">
+  <p:cSld>
+    <p:spTree>
+      <p:nvGrpSpPr>
+        <p:cNvPr id="1" name=""/>
+        <p:cNvGrpSpPr/>
+        <p:nvPr/>
+      </p:nvGrpSpPr>
+      <p:grpSpPr>
+        <a:xfrm>
+          <a:off x="0" y="0"/>
+          <a:ext cx="0" cy="0"/>
+          <a:chOff x="0" y="0"/>
+          <a:chExt cx="0" cy="0"/>
+        </a:xfrm>
+      </p:grpSpPr>
+      <p:sp>
+        <p:nvSpPr>
+          <p:cNvPr id="2" name="Slide Image Placeholder 1"/>
+          <p:cNvSpPr>
+            <a:spLocks noGrp="1" noRot="1" noChangeAspect="1"/>
+          </p:cNvSpPr>
+          <p:nvPr>
+            <p:ph type="sldImg"/>
+          </p:nvPr>
+        </p:nvSpPr>
+        <p:spPr/>
+      </p:sp>
+      <p:sp>
+        <p:nvSpPr>
+          <p:cNvPr id="3" name="Notes Placeholder 2"/>
+          <p:cNvSpPr>
+            <a:spLocks noGrp="1"/>
+          </p:cNvSpPr>
+          <p:nvPr>
+            <p:ph type="body" idx="1"/>
+          </p:nvPr>
+        </p:nvSpPr>
+        <p:spPr/>
+        <p:txBody>
+          <a:bodyPr/>
+          <a:lstStyle/>
+          <a:p>
+            <a:pPr lvl="0" indent="0" marL="0">
+              <a:buNone/>
+            </a:pPr>
+            <a:r>
+              <a:rPr/>
+              <a:t>Ask students to move or revise any sentence that does not support the topic sentence. This keeps article details from becoming an unstructured list.</a:t>
+            </a:r>
+          </a:p>
+        </p:txBody>
+      </p:sp>
+      <p:sp>
+        <p:nvSpPr>
+          <p:cNvPr id="4" name="Slide Number Placeholder 3"/>
+          <p:cNvSpPr>
+            <a:spLocks noGrp="1"/>
+          </p:cNvSpPr>
+          <p:nvPr>
+            <p:ph type="sldNum" sz="quarter" idx="10"/>
+          </p:nvPr>
+        </p:nvSpPr>
+        <p:spPr/>
+        <p:txBody>
+          <a:bodyPr/>
+          <a:lstStyle/>
+          <a:p>
+            <a:fld id="{18BDFEC3-8487-43E8-A154-7C12CBC1FFF2}" type="slidenum">
+              <a:rPr lang="en-US"/>
+              <a:t>21</a:t>
+            </a:fld>
+            <a:endParaRPr lang="en-US"/>
+          </a:p>
+        </p:txBody>
+      </p:sp>
+    </p:spTree>
+  </p:cSld>
+</p:notes>
+</file>
+
+<file path=ppt/notesSlides/notesSlide21.xml><?xml version="1.0" encoding="utf-8"?>
+<p:notes xmlns:a="http://schemas.openxmlformats.org/drawingml/2006/main" xmlns:r="http://schemas.openxmlformats.org/officeDocument/2006/relationships" xmlns:p="http://schemas.openxmlformats.org/presentationml/2006/main">
+  <p:cSld>
+    <p:spTree>
+      <p:nvGrpSpPr>
+        <p:cNvPr id="1" name=""/>
+        <p:cNvGrpSpPr/>
+        <p:nvPr/>
+      </p:nvGrpSpPr>
+      <p:grpSpPr>
+        <a:xfrm>
+          <a:off x="0" y="0"/>
+          <a:ext cx="0" cy="0"/>
+          <a:chOff x="0" y="0"/>
+          <a:chExt cx="0" cy="0"/>
+        </a:xfrm>
+      </p:grpSpPr>
+      <p:sp>
+        <p:nvSpPr>
+          <p:cNvPr id="2" name="Slide Image Placeholder 1"/>
+          <p:cNvSpPr>
+            <a:spLocks noGrp="1" noRot="1" noChangeAspect="1"/>
+          </p:cNvSpPr>
+          <p:nvPr>
+            <p:ph type="sldImg"/>
+          </p:nvPr>
+        </p:nvSpPr>
+        <p:spPr/>
+      </p:sp>
+      <p:sp>
+        <p:nvSpPr>
+          <p:cNvPr id="3" name="Notes Placeholder 2"/>
+          <p:cNvSpPr>
+            <a:spLocks noGrp="1"/>
+          </p:cNvSpPr>
+          <p:nvPr>
+            <p:ph type="body" idx="1"/>
+          </p:nvPr>
+        </p:nvSpPr>
+        <p:spPr/>
+        <p:txBody>
+          <a:bodyPr/>
+          <a:lstStyle/>
+          <a:p>
+            <a:pPr lvl="0" indent="0" marL="0">
+              <a:buNone/>
+            </a:pPr>
+            <a:r>
+              <a:rPr/>
+              <a:t>Use this example to distinguish synthesis from sentence combining. Both skills reduce repetition, but synthesis also explains how pieces of evidence relate.</a:t>
+            </a:r>
+          </a:p>
+        </p:txBody>
+      </p:sp>
+      <p:sp>
+        <p:nvSpPr>
+          <p:cNvPr id="4" name="Slide Number Placeholder 3"/>
+          <p:cNvSpPr>
+            <a:spLocks noGrp="1"/>
+          </p:cNvSpPr>
+          <p:nvPr>
+            <p:ph type="sldNum" sz="quarter" idx="10"/>
+          </p:nvPr>
+        </p:nvSpPr>
+        <p:spPr/>
+        <p:txBody>
+          <a:bodyPr/>
+          <a:lstStyle/>
+          <a:p>
+            <a:fld id="{18BDFEC3-8487-43E8-A154-7C12CBC1FFF2}" type="slidenum">
+              <a:rPr lang="en-US"/>
+              <a:t>22</a:t>
+            </a:fld>
+            <a:endParaRPr lang="en-US"/>
+          </a:p>
+        </p:txBody>
+      </p:sp>
+    </p:spTree>
+  </p:cSld>
+</p:notes>
+</file>
+
+<file path=ppt/notesSlides/notesSlide22.xml><?xml version="1.0" encoding="utf-8"?>
+<p:notes xmlns:a="http://schemas.openxmlformats.org/drawingml/2006/main" xmlns:r="http://schemas.openxmlformats.org/officeDocument/2006/relationships" xmlns:p="http://schemas.openxmlformats.org/presentationml/2006/main">
+  <p:cSld>
+    <p:spTree>
+      <p:nvGrpSpPr>
+        <p:cNvPr id="1" name=""/>
+        <p:cNvGrpSpPr/>
+        <p:nvPr/>
+      </p:nvGrpSpPr>
+      <p:grpSpPr>
+        <a:xfrm>
+          <a:off x="0" y="0"/>
+          <a:ext cx="0" cy="0"/>
+          <a:chOff x="0" y="0"/>
+          <a:chExt cx="0" cy="0"/>
+        </a:xfrm>
+      </p:grpSpPr>
+      <p:sp>
+        <p:nvSpPr>
+          <p:cNvPr id="2" name="Slide Image Placeholder 1"/>
+          <p:cNvSpPr>
+            <a:spLocks noGrp="1" noRot="1" noChangeAspect="1"/>
+          </p:cNvSpPr>
+          <p:nvPr>
+            <p:ph type="sldImg"/>
+          </p:nvPr>
+        </p:nvSpPr>
+        <p:spPr/>
+      </p:sp>
+      <p:sp>
+        <p:nvSpPr>
+          <p:cNvPr id="3" name="Notes Placeholder 2"/>
+          <p:cNvSpPr>
+            <a:spLocks noGrp="1"/>
+          </p:cNvSpPr>
+          <p:nvPr>
+            <p:ph type="body" idx="1"/>
+          </p:nvPr>
+        </p:nvSpPr>
+        <p:spPr/>
+        <p:txBody>
+          <a:bodyPr/>
+          <a:lstStyle/>
+          <a:p>
+            <a:pPr lvl="0" indent="0" marL="0">
+              <a:buNone/>
+            </a:pPr>
+            <a:r>
+              <a:rPr/>
+              <a:t>Direct quotations are not needed for this assignment. Remind students to repeat the paper title at the top of the first body page and to include both course articles in the reference list.</a:t>
+            </a:r>
+          </a:p>
+        </p:txBody>
+      </p:sp>
+      <p:sp>
+        <p:nvSpPr>
+          <p:cNvPr id="4" name="Slide Number Placeholder 3"/>
+          <p:cNvSpPr>
+            <a:spLocks noGrp="1"/>
+          </p:cNvSpPr>
+          <p:nvPr>
+            <p:ph type="sldNum" sz="quarter" idx="10"/>
+          </p:nvPr>
+        </p:nvSpPr>
+        <p:spPr/>
+        <p:txBody>
+          <a:bodyPr/>
+          <a:lstStyle/>
+          <a:p>
+            <a:fld id="{18BDFEC3-8487-43E8-A154-7C12CBC1FFF2}" type="slidenum">
+              <a:rPr lang="en-US"/>
+              <a:t>23</a:t>
+            </a:fld>
+            <a:endParaRPr lang="en-US"/>
+          </a:p>
+        </p:txBody>
+      </p:sp>
+    </p:spTree>
+  </p:cSld>
+</p:notes>
+</file>
+
+<file path=ppt/notesSlides/notesSlide23.xml><?xml version="1.0" encoding="utf-8"?>
+<p:notes xmlns:a="http://schemas.openxmlformats.org/drawingml/2006/main" xmlns:r="http://schemas.openxmlformats.org/officeDocument/2006/relationships" xmlns:p="http://schemas.openxmlformats.org/presentationml/2006/main">
+  <p:cSld>
+    <p:spTree>
+      <p:nvGrpSpPr>
+        <p:cNvPr id="1" name=""/>
+        <p:cNvGrpSpPr/>
+        <p:nvPr/>
+      </p:nvGrpSpPr>
+      <p:grpSpPr>
+        <a:xfrm>
+          <a:off x="0" y="0"/>
+          <a:ext cx="0" cy="0"/>
+          <a:chOff x="0" y="0"/>
+          <a:chExt cx="0" cy="0"/>
+        </a:xfrm>
+      </p:grpSpPr>
+      <p:sp>
+        <p:nvSpPr>
+          <p:cNvPr id="2" name="Slide Image Placeholder 1"/>
+          <p:cNvSpPr>
+            <a:spLocks noGrp="1" noRot="1" noChangeAspect="1"/>
+          </p:cNvSpPr>
+          <p:nvPr>
+            <p:ph type="sldImg"/>
+          </p:nvPr>
+        </p:nvSpPr>
+        <p:spPr/>
+      </p:sp>
+      <p:sp>
+        <p:nvSpPr>
+          <p:cNvPr id="3" name="Notes Placeholder 2"/>
+          <p:cNvSpPr>
+            <a:spLocks noGrp="1"/>
+          </p:cNvSpPr>
+          <p:nvPr>
+            <p:ph type="body" idx="1"/>
+          </p:nvPr>
+        </p:nvSpPr>
+        <p:spPr/>
+        <p:txBody>
+          <a:bodyPr/>
+          <a:lstStyle/>
+          <a:p>
+            <a:pPr lvl="0" indent="0" marL="0">
+              <a:buNone/>
+            </a:pPr>
+            <a:r>
+              <a:rPr/>
+              <a:t>Leave this slide visible during work time. Encourage students to request feedback at the end of each stage rather than waiting until the full paper is drafted.</a:t>
+            </a:r>
+          </a:p>
+        </p:txBody>
+      </p:sp>
+      <p:sp>
+        <p:nvSpPr>
+          <p:cNvPr id="4" name="Slide Number Placeholder 3"/>
+          <p:cNvSpPr>
+            <a:spLocks noGrp="1"/>
+          </p:cNvSpPr>
+          <p:nvPr>
+            <p:ph type="sldNum" sz="quarter" idx="10"/>
+          </p:nvPr>
+        </p:nvSpPr>
+        <p:spPr/>
+        <p:txBody>
+          <a:bodyPr/>
+          <a:lstStyle/>
+          <a:p>
+            <a:fld id="{18BDFEC3-8487-43E8-A154-7C12CBC1FFF2}" type="slidenum">
+              <a:rPr lang="en-US"/>
+              <a:t>24</a:t>
+            </a:fld>
+            <a:endParaRPr lang="en-US"/>
+          </a:p>
+        </p:txBody>
+      </p:sp>
+    </p:spTree>
+  </p:cSld>
+</p:notes>
+</file>
+
+<file path=ppt/notesSlides/notesSlide3.xml><?xml version="1.0" encoding="utf-8"?>
+<p:notes xmlns:a="http://schemas.openxmlformats.org/drawingml/2006/main" xmlns:r="http://schemas.openxmlformats.org/officeDocument/2006/relationships" xmlns:p="http://schemas.openxmlformats.org/presentationml/2006/main">
+  <p:cSld>
+    <p:spTree>
+      <p:nvGrpSpPr>
+        <p:cNvPr id="1" name=""/>
+        <p:cNvGrpSpPr/>
+        <p:nvPr/>
+      </p:nvGrpSpPr>
+      <p:grpSpPr>
+        <a:xfrm>
+          <a:off x="0" y="0"/>
+          <a:ext cx="0" cy="0"/>
+          <a:chOff x="0" y="0"/>
+          <a:chExt cx="0" cy="0"/>
+        </a:xfrm>
+      </p:grpSpPr>
+      <p:sp>
+        <p:nvSpPr>
+          <p:cNvPr id="2" name="Slide Image Placeholder 1"/>
+          <p:cNvSpPr>
+            <a:spLocks noGrp="1" noRot="1" noChangeAspect="1"/>
+          </p:cNvSpPr>
+          <p:nvPr>
+            <p:ph type="sldImg"/>
+          </p:nvPr>
+        </p:nvSpPr>
+        <p:spPr/>
+      </p:sp>
+      <p:sp>
+        <p:nvSpPr>
+          <p:cNvPr id="3" name="Notes Placeholder 2"/>
+          <p:cNvSpPr>
+            <a:spLocks noGrp="1"/>
+          </p:cNvSpPr>
+          <p:nvPr>
+            <p:ph type="body" idx="1"/>
+          </p:nvPr>
+        </p:nvSpPr>
+        <p:spPr/>
+        <p:txBody>
+          <a:bodyPr/>
+          <a:lstStyle/>
+          <a:p>
+            <a:pPr lvl="0" indent="0" marL="0">
+              <a:buNone/>
+            </a:pPr>
+            <a:r>
+              <a:rPr/>
+              <a:t>Use the diagram as a transition: the proposal is not a separate task. It should grow from what the two articles establish and what they leave unanswered.</a:t>
+            </a:r>
+          </a:p>
+        </p:txBody>
+      </p:sp>
+      <p:sp>
+        <p:nvSpPr>
+          <p:cNvPr id="4" name="Slide Number Placeholder 3"/>
+          <p:cNvSpPr>
+            <a:spLocks noGrp="1"/>
+          </p:cNvSpPr>
+          <p:nvPr>
+            <p:ph type="sldNum" sz="quarter" idx="10"/>
+          </p:nvPr>
+        </p:nvSpPr>
+        <p:spPr/>
+        <p:txBody>
+          <a:bodyPr/>
+          <a:lstStyle/>
+          <a:p>
+            <a:fld id="{18BDFEC3-8487-43E8-A154-7C12CBC1FFF2}" type="slidenum">
+              <a:rPr lang="en-US"/>
+              <a:t>4</a:t>
+            </a:fld>
+            <a:endParaRPr lang="en-US"/>
+          </a:p>
+        </p:txBody>
+      </p:sp>
+    </p:spTree>
+  </p:cSld>
+</p:notes>
+</file>
+
+<file path=ppt/notesSlides/notesSlide4.xml><?xml version="1.0" encoding="utf-8"?>
+<p:notes xmlns:a="http://schemas.openxmlformats.org/drawingml/2006/main" xmlns:r="http://schemas.openxmlformats.org/officeDocument/2006/relationships" xmlns:p="http://schemas.openxmlformats.org/presentationml/2006/main">
+  <p:cSld>
+    <p:spTree>
+      <p:nvGrpSpPr>
+        <p:cNvPr id="1" name=""/>
+        <p:cNvGrpSpPr/>
+        <p:nvPr/>
+      </p:nvGrpSpPr>
+      <p:grpSpPr>
+        <a:xfrm>
+          <a:off x="0" y="0"/>
+          <a:ext cx="0" cy="0"/>
+          <a:chOff x="0" y="0"/>
+          <a:chExt cx="0" cy="0"/>
+        </a:xfrm>
+      </p:grpSpPr>
+      <p:sp>
+        <p:nvSpPr>
+          <p:cNvPr id="2" name="Slide Image Placeholder 1"/>
+          <p:cNvSpPr>
+            <a:spLocks noGrp="1" noRot="1" noChangeAspect="1"/>
+          </p:cNvSpPr>
+          <p:nvPr>
+            <p:ph type="sldImg"/>
+          </p:nvPr>
+        </p:nvSpPr>
+        <p:spPr/>
+      </p:sp>
+      <p:sp>
+        <p:nvSpPr>
+          <p:cNvPr id="3" name="Notes Placeholder 2"/>
+          <p:cNvSpPr>
+            <a:spLocks noGrp="1"/>
+          </p:cNvSpPr>
+          <p:nvPr>
+            <p:ph type="body" idx="1"/>
+          </p:nvPr>
+        </p:nvSpPr>
+        <p:spPr/>
+        <p:txBody>
+          <a:bodyPr/>
+          <a:lstStyle/>
+          <a:p>
+            <a:pPr lvl="0" indent="0" marL="0">
+              <a:buNone/>
+            </a:pPr>
+            <a:r>
+              <a:rPr/>
+              <a:t>These questions compress the worksheet prompts into a repeatable reading routine. Model the routine with Study 1, then have students repeat it for the remaining studies.</a:t>
+            </a:r>
+          </a:p>
+        </p:txBody>
+      </p:sp>
+      <p:sp>
+        <p:nvSpPr>
+          <p:cNvPr id="4" name="Slide Number Placeholder 3"/>
+          <p:cNvSpPr>
+            <a:spLocks noGrp="1"/>
+          </p:cNvSpPr>
+          <p:nvPr>
+            <p:ph type="sldNum" sz="quarter" idx="10"/>
+          </p:nvPr>
+        </p:nvSpPr>
+        <p:spPr/>
+        <p:txBody>
+          <a:bodyPr/>
+          <a:lstStyle/>
+          <a:p>
+            <a:fld id="{18BDFEC3-8487-43E8-A154-7C12CBC1FFF2}" type="slidenum">
+              <a:rPr lang="en-US"/>
+              <a:t>5</a:t>
+            </a:fld>
+            <a:endParaRPr lang="en-US"/>
+          </a:p>
+        </p:txBody>
+      </p:sp>
+    </p:spTree>
+  </p:cSld>
+</p:notes>
+</file>
+
+<file path=ppt/notesSlides/notesSlide5.xml><?xml version="1.0" encoding="utf-8"?>
+<p:notes xmlns:a="http://schemas.openxmlformats.org/drawingml/2006/main" xmlns:r="http://schemas.openxmlformats.org/officeDocument/2006/relationships" xmlns:p="http://schemas.openxmlformats.org/presentationml/2006/main">
+  <p:cSld>
+    <p:spTree>
+      <p:nvGrpSpPr>
+        <p:cNvPr id="1" name=""/>
+        <p:cNvGrpSpPr/>
+        <p:nvPr/>
+      </p:nvGrpSpPr>
+      <p:grpSpPr>
+        <a:xfrm>
+          <a:off x="0" y="0"/>
+          <a:ext cx="0" cy="0"/>
+          <a:chOff x="0" y="0"/>
+          <a:chExt cx="0" cy="0"/>
+        </a:xfrm>
+      </p:grpSpPr>
+      <p:sp>
+        <p:nvSpPr>
+          <p:cNvPr id="2" name="Slide Image Placeholder 1"/>
+          <p:cNvSpPr>
+            <a:spLocks noGrp="1" noRot="1" noChangeAspect="1"/>
+          </p:cNvSpPr>
+          <p:nvPr>
+            <p:ph type="sldImg"/>
+          </p:nvPr>
+        </p:nvSpPr>
+        <p:spPr/>
+      </p:sp>
+      <p:sp>
+        <p:nvSpPr>
+          <p:cNvPr id="3" name="Notes Placeholder 2"/>
+          <p:cNvSpPr>
+            <a:spLocks noGrp="1"/>
+          </p:cNvSpPr>
+          <p:nvPr>
+            <p:ph type="body" idx="1"/>
+          </p:nvPr>
+        </p:nvSpPr>
+        <p:spPr/>
+        <p:txBody>
+          <a:bodyPr/>
+          <a:lstStyle/>
+          <a:p>
+            <a:pPr lvl="0" indent="0" marL="0">
+              <a:buNone/>
+            </a:pPr>
+            <a:r>
+              <a:rPr/>
+              <a:t>Begin with the title and abstract. Ask students to identify the independent variable, dependent variable, and predicted direction before reading the method.</a:t>
+            </a:r>
+          </a:p>
+        </p:txBody>
+      </p:sp>
+      <p:sp>
+        <p:nvSpPr>
+          <p:cNvPr id="4" name="Slide Number Placeholder 3"/>
+          <p:cNvSpPr>
+            <a:spLocks noGrp="1"/>
+          </p:cNvSpPr>
+          <p:nvPr>
+            <p:ph type="sldNum" sz="quarter" idx="10"/>
+          </p:nvPr>
+        </p:nvSpPr>
+        <p:spPr/>
+        <p:txBody>
+          <a:bodyPr/>
+          <a:lstStyle/>
+          <a:p>
+            <a:fld id="{18BDFEC3-8487-43E8-A154-7C12CBC1FFF2}" type="slidenum">
+              <a:rPr lang="en-US"/>
+              <a:t>6</a:t>
+            </a:fld>
+            <a:endParaRPr lang="en-US"/>
+          </a:p>
+        </p:txBody>
+      </p:sp>
+    </p:spTree>
+  </p:cSld>
+</p:notes>
+</file>
+
+<file path=ppt/notesSlides/notesSlide6.xml><?xml version="1.0" encoding="utf-8"?>
+<p:notes xmlns:a="http://schemas.openxmlformats.org/drawingml/2006/main" xmlns:r="http://schemas.openxmlformats.org/officeDocument/2006/relationships" xmlns:p="http://schemas.openxmlformats.org/presentationml/2006/main">
+  <p:cSld>
+    <p:spTree>
+      <p:nvGrpSpPr>
+        <p:cNvPr id="1" name=""/>
+        <p:cNvGrpSpPr/>
+        <p:nvPr/>
+      </p:nvGrpSpPr>
+      <p:grpSpPr>
+        <a:xfrm>
+          <a:off x="0" y="0"/>
+          <a:ext cx="0" cy="0"/>
+          <a:chOff x="0" y="0"/>
+          <a:chExt cx="0" cy="0"/>
+        </a:xfrm>
+      </p:grpSpPr>
+      <p:sp>
+        <p:nvSpPr>
+          <p:cNvPr id="2" name="Slide Image Placeholder 1"/>
+          <p:cNvSpPr>
+            <a:spLocks noGrp="1" noRot="1" noChangeAspect="1"/>
+          </p:cNvSpPr>
+          <p:nvPr>
+            <p:ph type="sldImg"/>
+          </p:nvPr>
+        </p:nvSpPr>
+        <p:spPr/>
+      </p:sp>
+      <p:sp>
+        <p:nvSpPr>
+          <p:cNvPr id="3" name="Notes Placeholder 2"/>
+          <p:cNvSpPr>
+            <a:spLocks noGrp="1"/>
+          </p:cNvSpPr>
+          <p:nvPr>
+            <p:ph type="body" idx="1"/>
+          </p:nvPr>
+        </p:nvSpPr>
+        <p:spPr/>
+        <p:txBody>
+          <a:bodyPr/>
+          <a:lstStyle/>
+          <a:p>
+            <a:pPr lvl="0" indent="0" marL="0">
+              <a:buNone/>
+            </a:pPr>
+            <a:r>
+              <a:rPr/>
+              <a:t>The coin toss is the critical design detail. Because posture was assigned by table, Study 1 is an experiment even though it occurred in a natural restaurant setting.</a:t>
+            </a:r>
+          </a:p>
+        </p:txBody>
+      </p:sp>
+      <p:sp>
+        <p:nvSpPr>
+          <p:cNvPr id="4" name="Slide Number Placeholder 3"/>
+          <p:cNvSpPr>
+            <a:spLocks noGrp="1"/>
+          </p:cNvSpPr>
+          <p:nvPr>
+            <p:ph type="sldNum" sz="quarter" idx="10"/>
+          </p:nvPr>
+        </p:nvSpPr>
+        <p:spPr/>
+        <p:txBody>
+          <a:bodyPr/>
+          <a:lstStyle/>
+          <a:p>
+            <a:fld id="{18BDFEC3-8487-43E8-A154-7C12CBC1FFF2}" type="slidenum">
+              <a:rPr lang="en-US"/>
+              <a:t>7</a:t>
+            </a:fld>
+            <a:endParaRPr lang="en-US"/>
+          </a:p>
+        </p:txBody>
+      </p:sp>
+    </p:spTree>
+  </p:cSld>
+</p:notes>
+</file>
+
+<file path=ppt/notesSlides/notesSlide7.xml><?xml version="1.0" encoding="utf-8"?>
+<p:notes xmlns:a="http://schemas.openxmlformats.org/drawingml/2006/main" xmlns:r="http://schemas.openxmlformats.org/officeDocument/2006/relationships" xmlns:p="http://schemas.openxmlformats.org/presentationml/2006/main">
+  <p:cSld>
+    <p:spTree>
+      <p:nvGrpSpPr>
+        <p:cNvPr id="1" name=""/>
+        <p:cNvGrpSpPr/>
+        <p:nvPr/>
+      </p:nvGrpSpPr>
+      <p:grpSpPr>
+        <a:xfrm>
+          <a:off x="0" y="0"/>
+          <a:ext cx="0" cy="0"/>
+          <a:chOff x="0" y="0"/>
+          <a:chExt cx="0" cy="0"/>
+        </a:xfrm>
+      </p:grpSpPr>
+      <p:sp>
+        <p:nvSpPr>
+          <p:cNvPr id="2" name="Slide Image Placeholder 1"/>
+          <p:cNvSpPr>
+            <a:spLocks noGrp="1" noRot="1" noChangeAspect="1"/>
+          </p:cNvSpPr>
+          <p:nvPr>
+            <p:ph type="sldImg"/>
+          </p:nvPr>
+        </p:nvSpPr>
+        <p:spPr/>
+      </p:sp>
+      <p:sp>
+        <p:nvSpPr>
+          <p:cNvPr id="3" name="Notes Placeholder 2"/>
+          <p:cNvSpPr>
+            <a:spLocks noGrp="1"/>
+          </p:cNvSpPr>
+          <p:nvPr>
+            <p:ph type="body" idx="1"/>
+          </p:nvPr>
+        </p:nvSpPr>
+        <p:spPr/>
+        <p:txBody>
+          <a:bodyPr/>
+          <a:lstStyle/>
+          <a:p>
+            <a:pPr lvl="0" indent="0" marL="0">
+              <a:buNone/>
+            </a:pPr>
+            <a:r>
+              <a:rPr/>
+              <a:t>Tip percentage and bill-adjusted tips showed the same pattern. Ask students why the server’s expectation and the single-server sample still matter despite random assignment.</a:t>
+            </a:r>
+          </a:p>
+        </p:txBody>
+      </p:sp>
+      <p:sp>
+        <p:nvSpPr>
+          <p:cNvPr id="4" name="Slide Number Placeholder 3"/>
+          <p:cNvSpPr>
+            <a:spLocks noGrp="1"/>
+          </p:cNvSpPr>
+          <p:nvPr>
+            <p:ph type="sldNum" sz="quarter" idx="10"/>
+          </p:nvPr>
+        </p:nvSpPr>
+        <p:spPr/>
+        <p:txBody>
+          <a:bodyPr/>
+          <a:lstStyle/>
+          <a:p>
+            <a:fld id="{18BDFEC3-8487-43E8-A154-7C12CBC1FFF2}" type="slidenum">
+              <a:rPr lang="en-US"/>
+              <a:t>8</a:t>
+            </a:fld>
+            <a:endParaRPr lang="en-US"/>
+          </a:p>
+        </p:txBody>
+      </p:sp>
+    </p:spTree>
+  </p:cSld>
+</p:notes>
+</file>
+
+<file path=ppt/notesSlides/notesSlide8.xml><?xml version="1.0" encoding="utf-8"?>
+<p:notes xmlns:a="http://schemas.openxmlformats.org/drawingml/2006/main" xmlns:r="http://schemas.openxmlformats.org/officeDocument/2006/relationships" xmlns:p="http://schemas.openxmlformats.org/presentationml/2006/main">
+  <p:cSld>
+    <p:spTree>
+      <p:nvGrpSpPr>
+        <p:cNvPr id="1" name=""/>
+        <p:cNvGrpSpPr/>
+        <p:nvPr/>
+      </p:nvGrpSpPr>
+      <p:grpSpPr>
+        <a:xfrm>
+          <a:off x="0" y="0"/>
+          <a:ext cx="0" cy="0"/>
+          <a:chOff x="0" y="0"/>
+          <a:chExt cx="0" cy="0"/>
+        </a:xfrm>
+      </p:grpSpPr>
+      <p:sp>
+        <p:nvSpPr>
+          <p:cNvPr id="2" name="Slide Image Placeholder 1"/>
+          <p:cNvSpPr>
+            <a:spLocks noGrp="1" noRot="1" noChangeAspect="1"/>
+          </p:cNvSpPr>
+          <p:nvPr>
+            <p:ph type="sldImg"/>
+          </p:nvPr>
+        </p:nvSpPr>
+        <p:spPr/>
+      </p:sp>
+      <p:sp>
+        <p:nvSpPr>
+          <p:cNvPr id="3" name="Notes Placeholder 2"/>
+          <p:cNvSpPr>
+            <a:spLocks noGrp="1"/>
+          </p:cNvSpPr>
+          <p:nvPr>
+            <p:ph type="body" idx="1"/>
+          </p:nvPr>
+        </p:nvSpPr>
+        <p:spPr/>
+        <p:txBody>
+          <a:bodyPr/>
+          <a:lstStyle/>
+          <a:p>
+            <a:pPr lvl="0" indent="0" marL="0">
+              <a:buNone/>
+            </a:pPr>
+            <a:r>
+              <a:rPr/>
+              <a:t>The second server did not expect posture to affect tips. The effect also appeared for tip percentage and bill-adjusted tips. The weekday interaction is a secondary qualification, not the main takeaway for the slide.</a:t>
+            </a:r>
+          </a:p>
+        </p:txBody>
+      </p:sp>
+      <p:sp>
+        <p:nvSpPr>
+          <p:cNvPr id="4" name="Slide Number Placeholder 3"/>
+          <p:cNvSpPr>
+            <a:spLocks noGrp="1"/>
+          </p:cNvSpPr>
+          <p:nvPr>
+            <p:ph type="sldNum" sz="quarter" idx="10"/>
+          </p:nvPr>
+        </p:nvSpPr>
+        <p:spPr/>
+        <p:txBody>
+          <a:bodyPr/>
+          <a:lstStyle/>
+          <a:p>
+            <a:fld id="{18BDFEC3-8487-43E8-A154-7C12CBC1FFF2}" type="slidenum">
+              <a:rPr lang="en-US"/>
+              <a:t>9</a:t>
+            </a:fld>
+            <a:endParaRPr lang="en-US"/>
+          </a:p>
+        </p:txBody>
+      </p:sp>
+    </p:spTree>
+  </p:cSld>
+</p:notes>
+</file>
+
+<file path=ppt/notesSlides/notesSlide9.xml><?xml version="1.0" encoding="utf-8"?>
+<p:notes xmlns:a="http://schemas.openxmlformats.org/drawingml/2006/main" xmlns:r="http://schemas.openxmlformats.org/officeDocument/2006/relationships" xmlns:p="http://schemas.openxmlformats.org/presentationml/2006/main">
+  <p:cSld>
+    <p:spTree>
+      <p:nvGrpSpPr>
+        <p:cNvPr id="1" name=""/>
+        <p:cNvGrpSpPr/>
+        <p:nvPr/>
+      </p:nvGrpSpPr>
+      <p:grpSpPr>
+        <a:xfrm>
+          <a:off x="0" y="0"/>
+          <a:ext cx="0" cy="0"/>
+          <a:chOff x="0" y="0"/>
+          <a:chExt cx="0" cy="0"/>
+        </a:xfrm>
+      </p:grpSpPr>
+      <p:sp>
+        <p:nvSpPr>
+          <p:cNvPr id="2" name="Slide Image Placeholder 1"/>
+          <p:cNvSpPr>
+            <a:spLocks noGrp="1" noRot="1" noChangeAspect="1"/>
+          </p:cNvSpPr>
+          <p:nvPr>
+            <p:ph type="sldImg"/>
+          </p:nvPr>
+        </p:nvSpPr>
+        <p:spPr/>
+      </p:sp>
+      <p:sp>
+        <p:nvSpPr>
+          <p:cNvPr id="3" name="Notes Placeholder 2"/>
+          <p:cNvSpPr>
+            <a:spLocks noGrp="1"/>
+          </p:cNvSpPr>
+          <p:nvPr>
+            <p:ph type="body" idx="1"/>
+          </p:nvPr>
+        </p:nvSpPr>
+        <p:spPr/>
+        <p:txBody>
+          <a:bodyPr/>
+          <a:lstStyle/>
+          <a:p>
+            <a:pPr lvl="0" indent="0" marL="0">
+              <a:buNone/>
+            </a:pPr>
+            <a:r>
+              <a:rPr/>
+              <a:t>Model integration as a relationship among studies, not two separate summaries. The second study broadens the context and weakens the expectancy explanation from Study 1.</a:t>
+            </a:r>
+          </a:p>
+        </p:txBody>
+      </p:sp>
+      <p:sp>
+        <p:nvSpPr>
+          <p:cNvPr id="4" name="Slide Number Placeholder 3"/>
+          <p:cNvSpPr>
+            <a:spLocks noGrp="1"/>
+          </p:cNvSpPr>
+          <p:nvPr>
+            <p:ph type="sldNum" sz="quarter" idx="10"/>
+          </p:nvPr>
+        </p:nvSpPr>
+        <p:spPr/>
+        <p:txBody>
+          <a:bodyPr/>
+          <a:lstStyle/>
+          <a:p>
+            <a:fld id="{18BDFEC3-8487-43E8-A154-7C12CBC1FFF2}" type="slidenum">
+              <a:rPr lang="en-US"/>
+              <a:t>10</a:t>
+            </a:fld>
+            <a:endParaRPr lang="en-US"/>
+          </a:p>
+        </p:txBody>
+      </p:sp>
+    </p:spTree>
+  </p:cSld>
+</p:notes>
+</file>
+
 <file path=ppt/slideLayouts/slideLayout1.xml><?xml version="1.0" encoding="utf-8"?>
 <p:sldLayout xmlns:a="http://schemas.openxmlformats.org/drawingml/2006/main" xmlns:r="http://schemas.openxmlformats.org/officeDocument/2006/relationships" xmlns:p="http://schemas.openxmlformats.org/presentationml/2006/main" type="title" preserve="1">
   <p:cSld name="Title Slide">
@@ -229,10 +2470,7 @@
               <a:buNone/>
               <a:defRPr sz="2000">
                 <a:solidFill>
-                  <a:schemeClr val="tx1">
-                    <a:lumMod val="75000"/>
-                    <a:lumOff val="25000"/>
-                  </a:schemeClr>
+                  <a:srgbClr val="FFFFFF"/>
                 </a:solidFill>
               </a:defRPr>
             </a:lvl1pPr>
@@ -2974,7 +5212,7 @@
         </a:buClr>
         <a:buFont charset="0" panose="020B0604020202020204" pitchFamily="34" typeface="Arial"/>
         <a:buChar char="•"/>
-        <a:defRPr kern="1200" sz="1800">
+        <a:defRPr kern="1200" sz="2000">
           <a:solidFill>
             <a:schemeClr val="tx1">
               <a:lumMod val="85000"/>
@@ -2998,7 +5236,7 @@
         </a:buClr>
         <a:buFont charset="0" panose="020B0604020202020204" pitchFamily="34" typeface="Arial"/>
         <a:buChar char="•"/>
-        <a:defRPr kern="1200" sz="1600">
+        <a:defRPr kern="1200" sz="2000">
           <a:solidFill>
             <a:schemeClr val="tx1">
               <a:lumMod val="85000"/>
@@ -3022,7 +5260,7 @@
         </a:buClr>
         <a:buFont charset="0" panose="020B0604020202020204" pitchFamily="34" typeface="Arial"/>
         <a:buChar char="•"/>
-        <a:defRPr kern="1200" sz="1600">
+        <a:defRPr kern="1200" sz="2000">
           <a:solidFill>
             <a:schemeClr val="tx1">
               <a:lumMod val="85000"/>
@@ -3046,7 +5284,7 @@
         </a:buClr>
         <a:buFont charset="0" panose="020B0604020202020204" pitchFamily="34" typeface="Arial"/>
         <a:buChar char="•"/>
-        <a:defRPr kern="1200" sz="1600">
+        <a:defRPr kern="1200" sz="2000">
           <a:solidFill>
             <a:schemeClr val="tx1">
               <a:lumMod val="85000"/>
@@ -3070,7 +5308,7 @@
         </a:buClr>
         <a:buFont charset="0" panose="020B0604020202020204" pitchFamily="34" typeface="Arial"/>
         <a:buChar char="•"/>
-        <a:defRPr kern="1200" sz="1600">
+        <a:defRPr kern="1200" sz="2000">
           <a:solidFill>
             <a:schemeClr val="tx1">
               <a:lumMod val="85000"/>
@@ -3094,7 +5332,7 @@
         </a:buClr>
         <a:buFont charset="0" panose="020B0604020202020204" pitchFamily="34" typeface="Arial"/>
         <a:buChar char="•"/>
-        <a:defRPr kern="1200" sz="1600">
+        <a:defRPr kern="1200" sz="2000">
           <a:solidFill>
             <a:schemeClr val="tx1"/>
           </a:solidFill>
@@ -3115,7 +5353,7 @@
         </a:buClr>
         <a:buFont charset="0" panose="020B0604020202020204" pitchFamily="34" typeface="Arial"/>
         <a:buChar char="•"/>
-        <a:defRPr kern="1200" sz="1600">
+        <a:defRPr kern="1200" sz="2000">
           <a:solidFill>
             <a:schemeClr val="tx1"/>
           </a:solidFill>
@@ -3136,7 +5374,7 @@
         </a:buClr>
         <a:buFont charset="0" panose="020B0604020202020204" pitchFamily="34" typeface="Arial"/>
         <a:buChar char="•"/>
-        <a:defRPr baseline="0" kern="1200" sz="1600">
+        <a:defRPr baseline="0" kern="1200" sz="2000">
           <a:solidFill>
             <a:schemeClr val="tx1"/>
           </a:solidFill>
@@ -3157,7 +5395,7 @@
         </a:buClr>
         <a:buFont charset="0" panose="020B0604020202020204" pitchFamily="34" typeface="Arial"/>
         <a:buChar char="•"/>
-        <a:defRPr baseline="0" kern="1200" sz="1600">
+        <a:defRPr baseline="0" kern="1200" sz="2000">
           <a:solidFill>
             <a:schemeClr val="tx1"/>
           </a:solidFill>
@@ -3172,7 +5410,7 @@
         <a:defRPr lang="en-US"/>
       </a:defPPr>
       <a:lvl1pPr algn="l" defTabSz="914400" eaLnBrk="1" hangingPunct="1" latinLnBrk="0" marL="0" rtl="0">
-        <a:defRPr kern="1200" sz="1800">
+        <a:defRPr kern="1200" sz="2000">
           <a:solidFill>
             <a:schemeClr val="tx1"/>
           </a:solidFill>
@@ -3182,7 +5420,7 @@
         </a:defRPr>
       </a:lvl1pPr>
       <a:lvl2pPr algn="l" defTabSz="914400" eaLnBrk="1" hangingPunct="1" latinLnBrk="0" marL="457200" rtl="0">
-        <a:defRPr kern="1200" sz="1800">
+        <a:defRPr kern="1200" sz="2000">
           <a:solidFill>
             <a:schemeClr val="tx1"/>
           </a:solidFill>
@@ -3192,7 +5430,7 @@
         </a:defRPr>
       </a:lvl2pPr>
       <a:lvl3pPr algn="l" defTabSz="914400" eaLnBrk="1" hangingPunct="1" latinLnBrk="0" marL="914400" rtl="0">
-        <a:defRPr kern="1200" sz="1800">
+        <a:defRPr kern="1200" sz="2000">
           <a:solidFill>
             <a:schemeClr val="tx1"/>
           </a:solidFill>
@@ -3202,7 +5440,7 @@
         </a:defRPr>
       </a:lvl3pPr>
       <a:lvl4pPr algn="l" defTabSz="914400" eaLnBrk="1" hangingPunct="1" latinLnBrk="0" marL="1371600" rtl="0">
-        <a:defRPr kern="1200" sz="1800">
+        <a:defRPr kern="1200" sz="2000">
           <a:solidFill>
             <a:schemeClr val="tx1"/>
           </a:solidFill>
@@ -3212,7 +5450,7 @@
         </a:defRPr>
       </a:lvl4pPr>
       <a:lvl5pPr algn="l" defTabSz="914400" eaLnBrk="1" hangingPunct="1" latinLnBrk="0" marL="1828800" rtl="0">
-        <a:defRPr kern="1200" sz="1800">
+        <a:defRPr kern="1200" sz="2000">
           <a:solidFill>
             <a:schemeClr val="tx1"/>
           </a:solidFill>
@@ -3222,7 +5460,7 @@
         </a:defRPr>
       </a:lvl5pPr>
       <a:lvl6pPr algn="l" defTabSz="914400" eaLnBrk="1" hangingPunct="1" latinLnBrk="0" marL="2286000" rtl="0">
-        <a:defRPr kern="1200" sz="1800">
+        <a:defRPr kern="1200" sz="2000">
           <a:solidFill>
             <a:schemeClr val="tx1"/>
           </a:solidFill>
@@ -3232,7 +5470,7 @@
         </a:defRPr>
       </a:lvl6pPr>
       <a:lvl7pPr algn="l" defTabSz="914400" eaLnBrk="1" hangingPunct="1" latinLnBrk="0" marL="2743200" rtl="0">
-        <a:defRPr kern="1200" sz="1800">
+        <a:defRPr kern="1200" sz="2000">
           <a:solidFill>
             <a:schemeClr val="tx1"/>
           </a:solidFill>
@@ -3242,7 +5480,7 @@
         </a:defRPr>
       </a:lvl7pPr>
       <a:lvl8pPr algn="l" defTabSz="914400" eaLnBrk="1" hangingPunct="1" latinLnBrk="0" marL="3200400" rtl="0">
-        <a:defRPr kern="1200" sz="1800">
+        <a:defRPr kern="1200" sz="2000">
           <a:solidFill>
             <a:schemeClr val="tx1"/>
           </a:solidFill>
@@ -3252,7 +5490,7 @@
         </a:defRPr>
       </a:lvl8pPr>
       <a:lvl9pPr algn="l" defTabSz="914400" eaLnBrk="1" hangingPunct="1" latinLnBrk="0" marL="3657600" rtl="0">
-        <a:defRPr kern="1200" sz="1800">
+        <a:defRPr kern="1200" sz="2000">
           <a:solidFill>
             <a:schemeClr val="tx1"/>
           </a:solidFill>
@@ -3316,7 +5554,7 @@
             </a:pPr>
             <a:r>
               <a:rPr/>
-              <a:t>How to Improve your Writing</a:t>
+              <a:t>Reviewing the Literature</a:t>
             </a:r>
           </a:p>
         </p:txBody>
@@ -3347,13 +5585,13 @@
             </a:pPr>
             <a:r>
               <a:rPr/>
-              <a:t>Adapted from slides How to Improve Your Writing with many thanks to: James A. Burns University of Nebraska-Lincoln</a:t>
+              <a:t>Lab 04 · Literature Review &amp; Proposal</a:t>
             </a:r>
             <a:br/>
             <a:br/>
             <a:r>
               <a:rPr/>
-              <a:t>PSYCH 350-Lab</a:t>
+              <a:t>PSYC 350 Laboratory</a:t>
             </a:r>
           </a:p>
         </p:txBody>
@@ -3405,7 +5643,7 @@
             </a:pPr>
             <a:r>
               <a:rPr/>
-              <a:t>Here is an example</a:t>
+              <a:t>9 Integrate before moving on</a:t>
             </a:r>
           </a:p>
         </p:txBody>
@@ -3425,44 +5663,42 @@
           <a:bodyPr/>
           <a:lstStyle/>
           <a:p>
-            <a:pPr lvl="0" indent="0" marL="0">
-              <a:buNone/>
-            </a:pPr>
-            <a:r>
-              <a:rPr/>
-              <a:t>The paragraph talked about the psychological treatment of social phobia in adults.</a:t>
-            </a:r>
-          </a:p>
-          <a:p>
-            <a:pPr lvl="0" indent="0" marL="0">
-              <a:buNone/>
-            </a:pPr>
-            <a:r>
-              <a:rPr/>
-              <a:t>The transition sentence at the end of the paragraph is:</a:t>
-            </a:r>
-          </a:p>
-          <a:p>
-            <a:pPr lvl="0" indent="0" marL="1270000">
-              <a:buNone/>
-            </a:pPr>
-            <a:r>
-              <a:rPr sz="2000"/>
-              <a:t>“Although much investigation has been done into the treatment of social phobia in adults, very little work has been done to address treatment avenues for children who suffer from the disorder.”</a:t>
-            </a:r>
-          </a:p>
-          <a:p>
-            <a:pPr lvl="0"/>
-            <a:r>
-              <a:rPr/>
-              <a:t>Can you guess what the next paragraph will be about?</a:t>
-            </a:r>
-          </a:p>
-          <a:p>
-            <a:pPr lvl="0"/>
-            <a:r>
-              <a:rPr/>
-              <a:t>You got it, the next paragraph will be about the treatment of children with social phobia!</a:t>
+            <a:pPr lvl="0" indent="-457200" marL="457200">
+              <a:buAutoNum type="arabicPeriod"/>
+            </a:pPr>
+            <a:r>
+              <a:rPr b="1"/>
+              <a:t>Same:</a:t>
+            </a:r>
+            <a:r>
+              <a:rPr/>
+              <a:t> Assigned posture during the first table visit</a:t>
+            </a:r>
+          </a:p>
+          <a:p>
+            <a:pPr lvl="0" indent="-457200" marL="457200">
+              <a:buAutoNum type="arabicPeriod"/>
+            </a:pPr>
+            <a:r>
+              <a:rPr b="1"/>
+              <a:t>Different:</a:t>
+            </a:r>
+            <a:r>
+              <a:rPr/>
+              <a:t> Server, restaurant, and customer sample</a:t>
+            </a:r>
+          </a:p>
+          <a:p>
+            <a:pPr lvl="0" indent="-457200" marL="457200">
+              <a:buAutoNum type="arabicPeriod"/>
+            </a:pPr>
+            <a:r>
+              <a:rPr b="1"/>
+              <a:t>Together:</a:t>
+            </a:r>
+            <a:r>
+              <a:rPr/>
+              <a:t> Replication strengthens the evidence that squatting increased tips</a:t>
             </a:r>
           </a:p>
         </p:txBody>
@@ -3514,32 +5750,91 @@
             </a:pPr>
             <a:r>
               <a:rPr/>
-              <a:t>Paragraphs</a:t>
-            </a:r>
-          </a:p>
-        </p:txBody>
-      </p:sp>
-      <p:sp>
-        <p:nvSpPr>
-          <p:cNvPr id="3" name="Content Placeholder 2"/>
-          <p:cNvSpPr>
-            <a:spLocks noGrp="1"/>
-          </p:cNvSpPr>
-          <p:nvPr>
-            <p:ph idx="1"/>
-          </p:nvPr>
-        </p:nvSpPr>
-        <p:spPr/>
-        <p:txBody>
-          <a:bodyPr/>
-          <a:lstStyle/>
+              <a:t>10 Read VanVolkinburg next</a:t>
+            </a:r>
+          </a:p>
+        </p:txBody>
+      </p:sp>
+      <p:pic>
+        <p:nvPicPr>
+          <p:cNvPr descr="First page of VanVolkinburg's article Restaurant Server Posture Related to Add-On Sales, showing its title, abstract, and opening paragraphs" id="0" name="Picture 1"/>
+          <p:cNvPicPr>
+            <a:picLocks noGrp="1" noChangeAspect="1"/>
+          </p:cNvPicPr>
+          <p:nvPr/>
+        </p:nvPicPr>
+        <p:blipFill>
+          <a:blip r:embed="rId3"/>
+          <a:stretch>
+            <a:fillRect/>
+          </a:stretch>
+        </p:blipFill>
+        <p:spPr bwMode="auto">
+          <a:xfrm>
+            <a:off x="2349500" y="2628900"/>
+            <a:ext cx="2400300" cy="3098800"/>
+          </a:xfrm>
+          <a:prstGeom prst="rect">
+            <a:avLst/>
+          </a:prstGeom>
+          <a:noFill/>
+          <a:ln w="9525">
+            <a:noFill/>
+            <a:headEnd/>
+            <a:tailEnd/>
+          </a:ln>
+        </p:spPr>
+      </p:pic>
+      <p:sp>
+        <p:nvSpPr>
+          <p:cNvPr id="4" name="Content Placeholder 3"/>
+          <p:cNvSpPr>
+            <a:spLocks noGrp="1"/>
+          </p:cNvSpPr>
+          <p:nvPr>
+            <p:ph idx="2" sz="half"/>
+          </p:nvPr>
+        </p:nvSpPr>
+        <p:spPr/>
+        <p:txBody>
+          <a:bodyPr/>
+          <a:lstStyle/>
+          <a:p>
+            <a:pPr lvl="0"/>
+            <a:r>
+              <a:rPr b="1"/>
+              <a:t>One observational study</a:t>
+            </a:r>
+          </a:p>
+          <a:p>
+            <a:pPr lvl="0"/>
+            <a:r>
+              <a:rPr b="1"/>
+              <a:t>Four servers</a:t>
+            </a:r>
+            <a:r>
+              <a:rPr/>
+              <a:t> and 54 patrons</a:t>
+            </a:r>
+          </a:p>
+          <a:p>
+            <a:pPr lvl="0"/>
+            <a:r>
+              <a:rPr b="1"/>
+              <a:t>Outcomes:</a:t>
+            </a:r>
+            <a:r>
+              <a:rPr/>
+              <a:t> visit time and add-on sales</a:t>
+            </a:r>
+          </a:p>
           <a:p>
             <a:pPr lvl="0" indent="0" marL="0">
               <a:buNone/>
             </a:pPr>
             <a:r>
               <a:rPr/>
-              <a:t>So, if we look at the format for any given paragraph, it should look like this.</a:t>
+              <a:t>Course article: VanVolkinburg (1998)</a:t>
             </a:r>
           </a:p>
         </p:txBody>
@@ -3568,130 +5863,82 @@
       </p:grpSpPr>
       <p:sp>
         <p:nvSpPr>
+          <p:cNvPr id="2" name="Title 1"/>
+          <p:cNvSpPr>
+            <a:spLocks noGrp="1"/>
+          </p:cNvSpPr>
+          <p:nvPr>
+            <p:ph type="title"/>
+          </p:nvPr>
+        </p:nvSpPr>
+        <p:spPr>
+          <a:xfrm>
+            <a:off x="1097280" y="964692"/>
+            <a:ext cx="9997440" cy="1188720"/>
+          </a:xfrm>
+        </p:spPr>
+        <p:txBody>
+          <a:bodyPr/>
+          <a:lstStyle/>
+          <a:p>
+            <a:pPr lvl="0" indent="0" marL="0">
+              <a:buNone/>
+            </a:pPr>
+            <a:r>
+              <a:rPr/>
+              <a:t>11 Here, researchers observed habits</a:t>
+            </a:r>
+          </a:p>
+        </p:txBody>
+      </p:sp>
+      <p:sp>
+        <p:nvSpPr>
           <p:cNvPr id="3" name="Content Placeholder 2"/>
           <p:cNvSpPr>
             <a:spLocks noGrp="1"/>
           </p:cNvSpPr>
           <p:nvPr>
-            <p:ph idx="1" sz="half"/>
-          </p:nvPr>
-        </p:nvSpPr>
-        <p:spPr/>
-        <p:txBody>
-          <a:bodyPr/>
-          <a:lstStyle/>
-          <a:p>
-            <a:pPr lvl="0"/>
-            <a:r>
-              <a:rPr/>
-              <a:t>TOPIC SENTENCE (new paragraph)</a:t>
-            </a:r>
-          </a:p>
-          <a:p>
-            <a:pPr lvl="1"/>
-            <a:r>
-              <a:rPr/>
-              <a:t>content sentence #1</a:t>
-            </a:r>
-          </a:p>
-          <a:p>
-            <a:pPr lvl="1"/>
-            <a:r>
-              <a:rPr/>
-              <a:t>content sentence #2</a:t>
-            </a:r>
-          </a:p>
-          <a:p>
-            <a:pPr lvl="1"/>
-            <a:r>
-              <a:rPr/>
-              <a:t>content sentence #3</a:t>
-            </a:r>
-          </a:p>
-          <a:p>
-            <a:pPr lvl="1"/>
-            <a:r>
-              <a:rPr/>
-              <a:t>. . .</a:t>
-            </a:r>
-          </a:p>
-          <a:p>
-            <a:pPr lvl="1"/>
-            <a:r>
-              <a:rPr/>
-              <a:t>content sentence #8</a:t>
-            </a:r>
-          </a:p>
-          <a:p>
-            <a:pPr lvl="0"/>
-            <a:r>
-              <a:rPr/>
-              <a:t>TRANSITION SENTENCE</a:t>
-            </a:r>
-          </a:p>
-        </p:txBody>
-      </p:sp>
-      <p:sp>
-        <p:nvSpPr>
-          <p:cNvPr id="4" name="Content Placeholder 3"/>
-          <p:cNvSpPr>
-            <a:spLocks noGrp="1"/>
-          </p:cNvSpPr>
-          <p:nvPr>
-            <p:ph idx="2" sz="half"/>
-          </p:nvPr>
-        </p:nvSpPr>
-        <p:spPr/>
-        <p:txBody>
-          <a:bodyPr/>
-          <a:lstStyle/>
-          <a:p>
-            <a:pPr lvl="0"/>
-            <a:r>
-              <a:rPr/>
-              <a:t>TOPIC SENTENCE (new paragraph)</a:t>
-            </a:r>
-          </a:p>
-          <a:p>
-            <a:pPr lvl="1"/>
-            <a:r>
-              <a:rPr/>
-              <a:t>content sentence #1</a:t>
-            </a:r>
-          </a:p>
-          <a:p>
-            <a:pPr lvl="1"/>
-            <a:r>
-              <a:rPr/>
-              <a:t>content sentence #2</a:t>
-            </a:r>
-          </a:p>
-          <a:p>
-            <a:pPr lvl="1"/>
-            <a:r>
-              <a:rPr/>
-              <a:t>. . .</a:t>
-            </a:r>
-          </a:p>
-          <a:p>
-            <a:pPr lvl="1"/>
-            <a:r>
-              <a:rPr/>
-              <a:t>content sentence #5</a:t>
-            </a:r>
-          </a:p>
-          <a:p>
-            <a:pPr lvl="0"/>
-            <a:r>
-              <a:rPr/>
-              <a:t>TRANSITION SENTENCE</a:t>
-            </a:r>
-          </a:p>
-          <a:p>
-            <a:pPr lvl="0"/>
-            <a:r>
-              <a:rPr/>
-              <a:t>… and so on until the paper is finished!</a:t>
+            <p:ph idx="1"/>
+          </p:nvPr>
+        </p:nvSpPr>
+        <p:spPr/>
+        <p:txBody>
+          <a:bodyPr/>
+          <a:lstStyle/>
+          <a:p>
+            <a:pPr lvl="0" indent="-457200" marL="457200">
+              <a:buAutoNum type="arabicPeriod"/>
+            </a:pPr>
+            <a:r>
+              <a:rPr/>
+              <a:t>Two servers usually squatted.</a:t>
+            </a:r>
+          </a:p>
+          <a:p>
+            <a:pPr lvl="0" indent="-457200" marL="457200">
+              <a:buAutoNum type="arabicPeriod"/>
+            </a:pPr>
+            <a:r>
+              <a:rPr/>
+              <a:t>Two servers usually stood.</a:t>
+            </a:r>
+          </a:p>
+          <a:p>
+            <a:pPr lvl="0" indent="-457200" marL="457200">
+              <a:buAutoNum type="arabicPeriod"/>
+            </a:pPr>
+            <a:r>
+              <a:rPr/>
+              <a:t>Researchers recorded visit time and sales.</a:t>
+            </a:r>
+          </a:p>
+          <a:p>
+            <a:pPr lvl="0" indent="0" marL="0">
+              <a:buNone/>
+            </a:pPr>
+            <a:r>
+              <a:rPr b="1"/>
+              <a:t>No posture condition was assigned.</a:t>
             </a:r>
           </a:p>
         </p:txBody>
@@ -3743,172 +5990,64 @@
             </a:pPr>
             <a:r>
               <a:rPr/>
-              <a:t>There is no limit on how long a paragraph should be</a:t>
-            </a:r>
-          </a:p>
-        </p:txBody>
-      </p:sp>
-      <p:sp>
-        <p:nvSpPr>
-          <p:cNvPr id="1026" name="prose" descr=""/>
-          <p:cNvSpPr/>
-          <p:nvPr/>
-        </p:nvSpPr>
-        <p:spPr>
-          <a:xfrm>
-            <a:off x="1097280" y="2633472"/>
-            <a:ext cx="9994392" cy="182880"/>
-          </a:xfrm>
-          <a:prstGeom prst="roundRect">
-            <a:avLst>
-              <a:gd name="adj" fmla="val 6000"/>
-            </a:avLst>
-          </a:prstGeom>
-          <a:noFill/>
-          <a:ln>
-            <a:noFill/>
-          </a:ln>
-        </p:spPr>
-        <p:txBody>
-          <a:bodyPr lIns="91440" tIns="68580" rIns="91440" bIns="68580" anchor="t" wrap="square">
-            <a:normAutofit/>
-          </a:bodyPr>
-          <a:lstStyle/>
-          <a:p>
-            <a:pPr algn="l"/>
-            <a:r>
-              <a:rPr lang="en-US" sz="1200" b="0" dirty="0">
-                <a:solidFill>
-                  <a:srgbClr val="010B13"/>
-                </a:solidFill>
-              </a:rPr>
-              <a:t>CLARITY IS ACHIEVED BY COMBINING SIMPLE, WELL-DESCRIBED IDEAS !!</a:t>
-            </a:r>
-          </a:p>
-        </p:txBody>
-      </p:sp>
-      <p:sp>
-        <p:nvSpPr>
-          <p:cNvPr id="1027" name="callout-warning" descr="warning callout: But remember. If a paragraph is over 1 double-spaced page, it is probably too long. The reader may forget what idea the paragraph was discussing to begin with.Remember that paragraphs that are too big, often are trying to say too much at one time.Consider separating these multiple ideas and give each of them a separate paragraph, for a more complete description. REMEMBER CLARITY IS THE ISSUE !"/>
-          <p:cNvSpPr/>
-          <p:nvPr/>
-        </p:nvSpPr>
-        <p:spPr>
-          <a:xfrm>
-            <a:off x="1097280" y="2907792"/>
-            <a:ext cx="9994392" cy="1630680"/>
-          </a:xfrm>
-          <a:prstGeom prst="roundRect">
-            <a:avLst>
-              <a:gd name="adj" fmla="val 6000"/>
-            </a:avLst>
-          </a:prstGeom>
-          <a:solidFill>
-            <a:srgbClr val="FEFDFA"/>
-          </a:solidFill>
-          <a:ln w="19050">
-            <a:solidFill>
-              <a:srgbClr val="CC6600"/>
-            </a:solidFill>
-          </a:ln>
-        </p:spPr>
-        <p:txBody>
-          <a:bodyPr lIns="91440" tIns="68580" rIns="91440" bIns="68580" anchor="t" wrap="square">
-            <a:normAutofit/>
-          </a:bodyPr>
-          <a:lstStyle/>
-          <a:p/>
-        </p:txBody>
-      </p:sp>
-      <p:sp>
-        <p:nvSpPr>
-          <p:cNvPr id="1028" name="callout-title" descr=""/>
-          <p:cNvSpPr/>
-          <p:nvPr/>
-        </p:nvSpPr>
-        <p:spPr>
-          <a:xfrm>
-            <a:off x="1097280" y="2907792"/>
-            <a:ext cx="9994392" cy="320040"/>
-          </a:xfrm>
-          <a:prstGeom prst="roundRect">
-            <a:avLst>
-              <a:gd name="adj" fmla="val 6000"/>
-            </a:avLst>
-          </a:prstGeom>
-          <a:solidFill>
-            <a:srgbClr val="CC6600"/>
-          </a:solidFill>
-          <a:ln>
-            <a:noFill/>
-          </a:ln>
-        </p:spPr>
-        <p:txBody>
-          <a:bodyPr lIns="91440" tIns="68580" rIns="91440" bIns="68580" anchor="t" wrap="square">
-            <a:normAutofit/>
-          </a:bodyPr>
-          <a:lstStyle/>
-          <a:p>
-            <a:pPr algn="l"/>
-            <a:r>
-              <a:rPr lang="en-US" sz="1400" b="1" dirty="0">
-                <a:solidFill>
-                  <a:srgbClr val="FEFDFA"/>
-                </a:solidFill>
-              </a:rPr>
-              <a:t>But remember</a:t>
-            </a:r>
-          </a:p>
-        </p:txBody>
-      </p:sp>
-      <p:sp>
-        <p:nvSpPr>
-          <p:cNvPr id="1029" name="callout-body" descr=""/>
-          <p:cNvSpPr/>
-          <p:nvPr/>
-        </p:nvSpPr>
-        <p:spPr>
-          <a:xfrm>
-            <a:off x="1097280" y="3227832"/>
-            <a:ext cx="9994392" cy="1310640"/>
-          </a:xfrm>
-          <a:prstGeom prst="roundRect">
-            <a:avLst>
-              <a:gd name="adj" fmla="val 6000"/>
-            </a:avLst>
-          </a:prstGeom>
-          <a:solidFill>
-            <a:srgbClr val="FEFDFA"/>
-          </a:solidFill>
-          <a:ln>
-            <a:noFill/>
-          </a:ln>
-        </p:spPr>
-        <p:txBody>
-          <a:bodyPr lIns="91440" tIns="68580" rIns="91440" bIns="68580" anchor="t" wrap="square">
-            <a:normAutofit/>
-          </a:bodyPr>
-          <a:lstStyle/>
-          <a:p>
-            <a:pPr algn="l"/>
-            <a:r>
-              <a:rPr lang="en-US" sz="1200" b="0" dirty="0">
-                <a:solidFill>
-                  <a:srgbClr val="010B13"/>
-                </a:solidFill>
-              </a:rPr>
-              <a:t>If a paragraph is over 1 double-spaced page, it is probably too long. The reader may forget what idea the paragraph was discussing to begin with.Remember that paragraphs that are too big, often are trying to say too much at one time.Consider separating these multiple ideas and give each of them a separate paragraph, for a more complete description.</a:t>
-            </a:r>
-          </a:p>
-          <a:p>
-            <a:pPr algn="l"/>
-            <a:r>
-              <a:rPr lang="en-US" sz="1200" b="0" dirty="0">
-                <a:solidFill>
-                  <a:srgbClr val="010B13"/>
-                </a:solidFill>
-              </a:rPr>
-              <a:t>REMEMBER CLARITY IS THE ISSUE !</a:t>
+              <a:t>12 Match the claim to the design</a:t>
+            </a:r>
+          </a:p>
+        </p:txBody>
+      </p:sp>
+      <p:sp>
+        <p:nvSpPr>
+          <p:cNvPr id="3" name="Content Placeholder 2"/>
+          <p:cNvSpPr>
+            <a:spLocks noGrp="1"/>
+          </p:cNvSpPr>
+          <p:nvPr>
+            <p:ph idx="1"/>
+          </p:nvPr>
+        </p:nvSpPr>
+        <p:spPr/>
+        <p:txBody>
+          <a:bodyPr/>
+          <a:lstStyle/>
+          <a:p>
+            <a:pPr lvl="0"/>
+            <a:r>
+              <a:rPr b="1"/>
+              <a:t>Pattern:</a:t>
+            </a:r>
+            <a:r>
+              <a:rPr/>
+              <a:t> Squatting servers spent more time at tables and had higher add-on sales after extreme scores were removed.</a:t>
+            </a:r>
+          </a:p>
+          <a:p>
+            <a:pPr lvl="0"/>
+            <a:r>
+              <a:rPr b="1"/>
+              <a:t>Limit:</a:t>
+            </a:r>
+            <a:r>
+              <a:rPr/>
+              <a:t> Posture and server characteristics varied together.</a:t>
+            </a:r>
+          </a:p>
+          <a:p>
+            <a:pPr lvl="0"/>
+            <a:r>
+              <a:rPr b="1"/>
+              <a:t>Claim:</a:t>
+            </a:r>
+            <a:r>
+              <a:rPr/>
+              <a:t> Posture was </a:t>
+            </a:r>
+            <a:r>
+              <a:rPr b="1"/>
+              <a:t>related to</a:t>
+            </a:r>
+            <a:r>
+              <a:rPr/>
+              <a:t> the outcomes; it was not shown to cause them.</a:t>
             </a:r>
           </a:p>
         </p:txBody>
@@ -3960,165 +6099,231 @@
             </a:pPr>
             <a:r>
               <a:rPr/>
-              <a:t>Ordering Paragraphs</a:t>
-            </a:r>
-          </a:p>
-        </p:txBody>
-      </p:sp>
-      <p:sp>
-        <p:nvSpPr>
-          <p:cNvPr id="1030" name="prose" descr=""/>
-          <p:cNvSpPr/>
-          <p:nvPr/>
-        </p:nvSpPr>
-        <p:spPr>
-          <a:xfrm>
-            <a:off x="1097280" y="2633472"/>
-            <a:ext cx="9994392" cy="182880"/>
-          </a:xfrm>
-          <a:prstGeom prst="roundRect">
-            <a:avLst>
-              <a:gd name="adj" fmla="val 6000"/>
-            </a:avLst>
-          </a:prstGeom>
-          <a:noFill/>
-          <a:ln>
-            <a:noFill/>
-          </a:ln>
-        </p:spPr>
-        <p:txBody>
-          <a:bodyPr lIns="91440" tIns="68580" rIns="91440" bIns="68580" anchor="t" wrap="square">
-            <a:normAutofit/>
-          </a:bodyPr>
-          <a:lstStyle/>
-          <a:p>
-            <a:pPr algn="l"/>
-            <a:r>
-              <a:rPr lang="en-US" sz="1200" b="0" dirty="0">
-                <a:solidFill>
-                  <a:srgbClr val="010B13"/>
-                </a:solidFill>
-              </a:rPr>
-              <a:t>OK, in what order do I put the paragraphs?</a:t>
-            </a:r>
-          </a:p>
-        </p:txBody>
-      </p:sp>
-      <p:sp>
-        <p:nvSpPr>
-          <p:cNvPr id="1031" name="callout-tip" descr="tip callout: Tip. The “rule of thumb” is that you begin with the most general idea, then narrow the focus with each successive paragraph, and finally return to remind the reader of the general idea. Here’s an example."/>
-          <p:cNvSpPr/>
-          <p:nvPr/>
-        </p:nvSpPr>
-        <p:spPr>
-          <a:xfrm>
-            <a:off x="1097280" y="2907792"/>
-            <a:ext cx="9994392" cy="1082040"/>
-          </a:xfrm>
-          <a:prstGeom prst="roundRect">
-            <a:avLst>
-              <a:gd name="adj" fmla="val 6000"/>
-            </a:avLst>
-          </a:prstGeom>
-          <a:solidFill>
-            <a:srgbClr val="FEFDFA"/>
-          </a:solidFill>
-          <a:ln w="19050">
-            <a:solidFill>
-              <a:srgbClr val="009955"/>
-            </a:solidFill>
-          </a:ln>
-        </p:spPr>
-        <p:txBody>
-          <a:bodyPr lIns="91440" tIns="68580" rIns="91440" bIns="68580" anchor="t" wrap="square">
-            <a:normAutofit/>
-          </a:bodyPr>
-          <a:lstStyle/>
-          <a:p/>
-        </p:txBody>
-      </p:sp>
-      <p:sp>
-        <p:nvSpPr>
-          <p:cNvPr id="1032" name="callout-title" descr=""/>
-          <p:cNvSpPr/>
-          <p:nvPr/>
-        </p:nvSpPr>
-        <p:spPr>
-          <a:xfrm>
-            <a:off x="1097280" y="2907792"/>
-            <a:ext cx="9994392" cy="320040"/>
-          </a:xfrm>
-          <a:prstGeom prst="roundRect">
-            <a:avLst>
-              <a:gd name="adj" fmla="val 6000"/>
-            </a:avLst>
-          </a:prstGeom>
-          <a:solidFill>
-            <a:srgbClr val="009955"/>
-          </a:solidFill>
-          <a:ln>
-            <a:noFill/>
-          </a:ln>
-        </p:spPr>
-        <p:txBody>
-          <a:bodyPr lIns="91440" tIns="68580" rIns="91440" bIns="68580" anchor="t" wrap="square">
-            <a:normAutofit/>
-          </a:bodyPr>
-          <a:lstStyle/>
-          <a:p>
-            <a:pPr algn="l"/>
-            <a:r>
-              <a:rPr lang="en-US" sz="1400" b="1" dirty="0">
-                <a:solidFill>
-                  <a:srgbClr val="FEFDFA"/>
-                </a:solidFill>
-              </a:rPr>
-              <a:t>Tip</a:t>
-            </a:r>
-          </a:p>
-        </p:txBody>
-      </p:sp>
-      <p:sp>
-        <p:nvSpPr>
-          <p:cNvPr id="1033" name="callout-body" descr=""/>
-          <p:cNvSpPr/>
-          <p:nvPr/>
-        </p:nvSpPr>
-        <p:spPr>
-          <a:xfrm>
-            <a:off x="1097280" y="3227832"/>
-            <a:ext cx="9994392" cy="762000"/>
-          </a:xfrm>
-          <a:prstGeom prst="roundRect">
-            <a:avLst>
-              <a:gd name="adj" fmla="val 6000"/>
-            </a:avLst>
-          </a:prstGeom>
-          <a:solidFill>
-            <a:srgbClr val="FEFDFA"/>
-          </a:solidFill>
-          <a:ln>
-            <a:noFill/>
-          </a:ln>
-        </p:spPr>
-        <p:txBody>
-          <a:bodyPr lIns="91440" tIns="68580" rIns="91440" bIns="68580" anchor="t" wrap="square">
-            <a:normAutofit/>
-          </a:bodyPr>
-          <a:lstStyle/>
-          <a:p>
-            <a:pPr algn="l"/>
-            <a:r>
-              <a:rPr lang="en-US" sz="1200" b="0" dirty="0">
-                <a:solidFill>
-                  <a:srgbClr val="010B13"/>
-                </a:solidFill>
-              </a:rPr>
-              <a:t>The “rule of thumb” is that you begin with the most general idea, then narrow the focus with each successive paragraph, and finally return to remind the reader of the general idea. Here’s an example.</a:t>
-            </a:r>
-          </a:p>
-        </p:txBody>
-      </p:sp>
+              <a:t>13 The designs support different claims</a:t>
+            </a:r>
+          </a:p>
+        </p:txBody>
+      </p:sp>
+      <p:graphicFrame>
+        <p:nvGraphicFramePr>
+          <p:cNvPr id="6" name="Content Placeholder 5"/>
+          <p:cNvGraphicFramePr>
+            <a:graphicFrameLocks noGrp="1"/>
+          </p:cNvGraphicFramePr>
+          <p:nvPr>
+            <p:ph idx="1"/>
+          </p:nvPr>
+        </p:nvGraphicFramePr>
+        <p:xfrm>
+          <a:off x="1092200" y="2628900"/>
+          <a:ext cx="9994900" cy="3098800"/>
+        </p:xfrm>
+        <a:graphic>
+          <a:graphicData uri="http://schemas.openxmlformats.org/drawingml/2006/table">
+            <a:tbl>
+              <a:tblPr firstRow="1" bandRow="1">
+                <a:tableStyleId>{5C22544A-7EE6-4342-B048-85BDC9FD1C3A}</a:tableStyleId>
+              </a:tblPr>
+              <a:tblGrid>
+                <a:gridCol w="2489200"/>
+                <a:gridCol w="2489200"/>
+                <a:gridCol w="2489200"/>
+                <a:gridCol w="2489200"/>
+              </a:tblGrid>
+              <a:tr h="0">
+                <a:tc>
+                  <a:txBody>
+                    <a:bodyPr/>
+                    <a:lstStyle/>
+                    <a:p>
+                      <a:pPr lvl="0" indent="0" marL="0">
+                        <a:buNone/>
+                      </a:pPr>
+                      <a:r>
+                        <a:rPr/>
+                        <a:t>Article</a:t>
+                      </a:r>
+                    </a:p>
+                  </a:txBody>
+                  <a:tcPr/>
+                </a:tc>
+                <a:tc>
+                  <a:txBody>
+                    <a:bodyPr/>
+                    <a:lstStyle/>
+                    <a:p>
+                      <a:pPr lvl="0" indent="0" marL="0">
+                        <a:buNone/>
+                      </a:pPr>
+                      <a:r>
+                        <a:rPr/>
+                        <a:t>Posture</a:t>
+                      </a:r>
+                    </a:p>
+                  </a:txBody>
+                  <a:tcPr/>
+                </a:tc>
+                <a:tc>
+                  <a:txBody>
+                    <a:bodyPr/>
+                    <a:lstStyle/>
+                    <a:p>
+                      <a:pPr lvl="0" indent="0" marL="0">
+                        <a:buNone/>
+                      </a:pPr>
+                      <a:r>
+                        <a:rPr/>
+                        <a:t>Main outcome</a:t>
+                      </a:r>
+                    </a:p>
+                  </a:txBody>
+                  <a:tcPr/>
+                </a:tc>
+                <a:tc>
+                  <a:txBody>
+                    <a:bodyPr/>
+                    <a:lstStyle/>
+                    <a:p>
+                      <a:pPr lvl="0" indent="0" marL="0">
+                        <a:buNone/>
+                      </a:pPr>
+                      <a:r>
+                        <a:rPr/>
+                        <a:t>Strongest claim</a:t>
+                      </a:r>
+                    </a:p>
+                  </a:txBody>
+                  <a:tcPr/>
+                </a:tc>
+              </a:tr>
+              <a:tr h="0">
+                <a:tc>
+                  <a:txBody>
+                    <a:bodyPr/>
+                    <a:lstStyle/>
+                    <a:p>
+                      <a:pPr lvl="0" indent="0" marL="0">
+                        <a:buNone/>
+                      </a:pPr>
+                      <a:r>
+                        <a:rPr/>
+                        <a:t>Lynn &amp; Mynier</a:t>
+                      </a:r>
+                    </a:p>
+                  </a:txBody>
+                </a:tc>
+                <a:tc>
+                  <a:txBody>
+                    <a:bodyPr/>
+                    <a:lstStyle/>
+                    <a:p>
+                      <a:pPr lvl="0" indent="0" marL="0">
+                        <a:buNone/>
+                      </a:pPr>
+                      <a:r>
+                        <a:rPr/>
+                        <a:t>Assigned</a:t>
+                      </a:r>
+                    </a:p>
+                  </a:txBody>
+                </a:tc>
+                <a:tc>
+                  <a:txBody>
+                    <a:bodyPr/>
+                    <a:lstStyle/>
+                    <a:p>
+                      <a:pPr lvl="0" indent="0" marL="0">
+                        <a:buNone/>
+                      </a:pPr>
+                      <a:r>
+                        <a:rPr/>
+                        <a:t>Tips</a:t>
+                      </a:r>
+                    </a:p>
+                  </a:txBody>
+                </a:tc>
+                <a:tc>
+                  <a:txBody>
+                    <a:bodyPr/>
+                    <a:lstStyle/>
+                    <a:p>
+                      <a:pPr lvl="0" indent="0" marL="0">
+                        <a:buNone/>
+                      </a:pPr>
+                      <a:r>
+                        <a:rPr/>
+                        <a:t>Causal effect</a:t>
+                      </a:r>
+                    </a:p>
+                  </a:txBody>
+                </a:tc>
+              </a:tr>
+              <a:tr h="0">
+                <a:tc>
+                  <a:txBody>
+                    <a:bodyPr/>
+                    <a:lstStyle/>
+                    <a:p>
+                      <a:pPr lvl="0" indent="0" marL="0">
+                        <a:buNone/>
+                      </a:pPr>
+                      <a:r>
+                        <a:rPr/>
+                        <a:t>VanVolkinburg</a:t>
+                      </a:r>
+                    </a:p>
+                  </a:txBody>
+                </a:tc>
+                <a:tc>
+                  <a:txBody>
+                    <a:bodyPr/>
+                    <a:lstStyle/>
+                    <a:p>
+                      <a:pPr lvl="0" indent="0" marL="0">
+                        <a:buNone/>
+                      </a:pPr>
+                      <a:r>
+                        <a:rPr/>
+                        <a:t>Observed</a:t>
+                      </a:r>
+                    </a:p>
+                  </a:txBody>
+                </a:tc>
+                <a:tc>
+                  <a:txBody>
+                    <a:bodyPr/>
+                    <a:lstStyle/>
+                    <a:p>
+                      <a:pPr lvl="0" indent="0" marL="0">
+                        <a:buNone/>
+                      </a:pPr>
+                      <a:r>
+                        <a:rPr/>
+                        <a:t>Time and sales</a:t>
+                      </a:r>
+                    </a:p>
+                  </a:txBody>
+                </a:tc>
+                <a:tc>
+                  <a:txBody>
+                    <a:bodyPr/>
+                    <a:lstStyle/>
+                    <a:p>
+                      <a:pPr lvl="0" indent="0" marL="0">
+                        <a:buNone/>
+                      </a:pPr>
+                      <a:r>
+                        <a:rPr/>
+                        <a:t>Association</a:t>
+                      </a:r>
+                    </a:p>
+                  </a:txBody>
+                </a:tc>
+              </a:tr>
+            </a:tbl>
+          </a:graphicData>
+        </a:graphic>
+      </p:graphicFrame>
     </p:spTree>
   </p:cSld>
 </p:sld>
@@ -4166,7 +6371,7 @@
             </a:pPr>
             <a:r>
               <a:rPr/>
-              <a:t>Ordering Paragraphs</a:t>
+              <a:t>14 Write synthesis in three moves</a:t>
             </a:r>
           </a:p>
         </p:txBody>
@@ -4178,76 +6383,50 @@
             <a:spLocks noGrp="1"/>
           </p:cNvSpPr>
           <p:nvPr>
-            <p:ph idx="1" sz="half"/>
-          </p:nvPr>
-        </p:nvSpPr>
-        <p:spPr/>
-        <p:txBody>
-          <a:bodyPr/>
-          <a:lstStyle/>
-          <a:p>
-            <a:pPr lvl="0"/>
-            <a:r>
-              <a:rPr/>
-              <a:t>Paragraph #1 Define social phobia</a:t>
-            </a:r>
-          </a:p>
-          <a:p>
-            <a:pPr lvl="0"/>
-            <a:r>
-              <a:rPr/>
-              <a:t>Paragraph #2 Describe the need for treating social phobia</a:t>
-            </a:r>
-          </a:p>
-          <a:p>
-            <a:pPr lvl="0"/>
-            <a:r>
-              <a:rPr/>
-              <a:t>Paragraph #3 Treatment of adults with social phobia</a:t>
-            </a:r>
-          </a:p>
-          <a:p>
-            <a:pPr lvl="0"/>
-            <a:r>
-              <a:rPr/>
-              <a:t>Paragraph #4 Treatment of children with social phobia</a:t>
-            </a:r>
-          </a:p>
-        </p:txBody>
-      </p:sp>
-      <p:sp>
-        <p:nvSpPr>
-          <p:cNvPr id="4" name="Content Placeholder 3"/>
-          <p:cNvSpPr>
-            <a:spLocks noGrp="1"/>
-          </p:cNvSpPr>
-          <p:nvPr>
-            <p:ph idx="2" sz="half"/>
-          </p:nvPr>
-        </p:nvSpPr>
-        <p:spPr/>
-        <p:txBody>
-          <a:bodyPr/>
-          <a:lstStyle/>
-          <a:p>
-            <a:pPr lvl="0"/>
-            <a:r>
-              <a:rPr/>
-              <a:t>Paragraph #5 Inpatient vs. outpatient treatment for children</a:t>
-            </a:r>
-          </a:p>
-          <a:p>
-            <a:pPr lvl="0"/>
-            <a:r>
-              <a:rPr/>
-              <a:t>Paragraph #6 Proposed study comparing treatments (specific hypothesis)</a:t>
-            </a:r>
-          </a:p>
-          <a:p>
-            <a:pPr lvl="0"/>
-            <a:r>
-              <a:rPr/>
-              <a:t>Paragraph #7 Brief review + what the proposed research adds</a:t>
+            <p:ph idx="1"/>
+          </p:nvPr>
+        </p:nvSpPr>
+        <p:spPr/>
+        <p:txBody>
+          <a:bodyPr/>
+          <a:lstStyle/>
+          <a:p>
+            <a:pPr lvl="0" indent="-457200" marL="457200">
+              <a:buAutoNum type="arabicPeriod"/>
+            </a:pPr>
+            <a:r>
+              <a:rPr b="1"/>
+              <a:t>Pattern:</a:t>
+            </a:r>
+            <a:r>
+              <a:rPr/>
+              <a:t> Posture relates to several customer outcomes.</a:t>
+            </a:r>
+          </a:p>
+          <a:p>
+            <a:pPr lvl="0" indent="-457200" marL="457200">
+              <a:buAutoNum type="arabicPeriod"/>
+            </a:pPr>
+            <a:r>
+              <a:rPr b="1"/>
+              <a:t>Evidence:</a:t>
+            </a:r>
+            <a:r>
+              <a:rPr/>
+              <a:t> Assigned and observed designs support different claims.</a:t>
+            </a:r>
+          </a:p>
+          <a:p>
+            <a:pPr lvl="0" indent="-457200" marL="457200">
+              <a:buAutoNum type="arabicPeriod"/>
+            </a:pPr>
+            <a:r>
+              <a:rPr b="1"/>
+              <a:t>Question:</a:t>
+            </a:r>
+            <a:r>
+              <a:rPr/>
+              <a:t> The mechanism remains uncertain.</a:t>
             </a:r>
           </a:p>
         </p:txBody>
@@ -4299,7 +6478,7 @@
             </a:pPr>
             <a:r>
               <a:rPr/>
-              <a:t>Improve your organization</a:t>
+              <a:t>15 Let the gap drive the proposal</a:t>
             </a:r>
           </a:p>
         </p:txBody>
@@ -4324,33 +6503,24 @@
             </a:pPr>
             <a:r>
               <a:rPr sz="2000"/>
-              <a:t>Organized papers are easier to read because they provide a road map !!</a:t>
-            </a:r>
-          </a:p>
-          <a:p>
-            <a:pPr lvl="0"/>
-            <a:r>
-              <a:rPr/>
-              <a:t>Make and outline BEFORE you start writing</a:t>
-            </a:r>
-          </a:p>
-          <a:p>
-            <a:pPr lvl="0"/>
-            <a:r>
-              <a:rPr/>
-              <a:t>Label each idea (paragraph) and which order you believe they should appear in your paper.</a:t>
-            </a:r>
-          </a:p>
-          <a:p>
-            <a:pPr lvl="0"/>
-            <a:r>
-              <a:rPr/>
-              <a:t>It will also be useful to write your topic sentences and transitions</a:t>
-            </a:r>
-            <a:br/>
-            <a:r>
-              <a:rPr/>
-              <a:t>before you sit down to write the rest of the paper.</a:t>
+              <a:t>Does posture change customer outcomes because it increases interaction time?</a:t>
+            </a:r>
+          </a:p>
+          <a:p>
+            <a:pPr lvl="0" indent="0" marL="0">
+              <a:buNone/>
+            </a:pPr>
+            <a:r>
+              <a:rPr/>
+              <a:t>A useful proposal tests a </a:t>
+            </a:r>
+            <a:r>
+              <a:rPr b="1"/>
+              <a:t>mechanism, boundary, or unresolved question</a:t>
+            </a:r>
+            <a:r>
+              <a:rPr/>
+              <a:t>—not merely a new sample.</a:t>
             </a:r>
           </a:p>
         </p:txBody>
@@ -4402,161 +6572,81 @@
             </a:pPr>
             <a:r>
               <a:rPr/>
-              <a:t>Improve your organization</a:t>
-            </a:r>
-          </a:p>
-        </p:txBody>
-      </p:sp>
-      <p:sp>
-        <p:nvSpPr>
-          <p:cNvPr id="1034" name="prose" descr=""/>
-          <p:cNvSpPr/>
-          <p:nvPr/>
-        </p:nvSpPr>
-        <p:spPr>
-          <a:xfrm>
-            <a:off x="1097280" y="2633472"/>
-            <a:ext cx="9994392" cy="182880"/>
-          </a:xfrm>
-          <a:prstGeom prst="roundRect">
-            <a:avLst>
-              <a:gd name="adj" fmla="val 6000"/>
-            </a:avLst>
-          </a:prstGeom>
-          <a:noFill/>
-          <a:ln>
-            <a:noFill/>
-          </a:ln>
-        </p:spPr>
-        <p:txBody>
-          <a:bodyPr lIns="91440" tIns="68580" rIns="91440" bIns="68580" anchor="t" wrap="square">
-            <a:normAutofit/>
-          </a:bodyPr>
-          <a:lstStyle/>
-          <a:p>
-            <a:pPr algn="l"/>
-            <a:r>
-              <a:rPr lang="en-US" sz="1200" b="0" dirty="0">
-                <a:solidFill>
-                  <a:srgbClr val="010B13"/>
-                </a:solidFill>
-              </a:rPr>
-              <a:t>“The way to learn to write is to write. There are no short-cuts.”</a:t>
-            </a:r>
-          </a:p>
-        </p:txBody>
-      </p:sp>
-      <p:sp>
-        <p:nvSpPr>
-          <p:cNvPr id="1035" name="callout-tip" descr="tip callout: Two things you should do after you finish your paper. Let the paper “get cold” for a day or two and re-read it (and probably re-write it - it never looks as good as you remember it being)Let someone else read it – “peer review” brings fresh ideas &amp; options"/>
-          <p:cNvSpPr/>
-          <p:nvPr/>
-        </p:nvSpPr>
-        <p:spPr>
-          <a:xfrm>
-            <a:off x="1097280" y="2907792"/>
-            <a:ext cx="9994392" cy="1082040"/>
-          </a:xfrm>
-          <a:prstGeom prst="roundRect">
-            <a:avLst>
-              <a:gd name="adj" fmla="val 6000"/>
-            </a:avLst>
-          </a:prstGeom>
-          <a:solidFill>
-            <a:srgbClr val="FEFDFA"/>
-          </a:solidFill>
-          <a:ln w="19050">
-            <a:solidFill>
-              <a:srgbClr val="009955"/>
-            </a:solidFill>
-          </a:ln>
-        </p:spPr>
-        <p:txBody>
-          <a:bodyPr lIns="91440" tIns="68580" rIns="91440" bIns="68580" anchor="t" wrap="square">
-            <a:normAutofit/>
-          </a:bodyPr>
-          <a:lstStyle/>
-          <a:p/>
-        </p:txBody>
-      </p:sp>
-      <p:sp>
-        <p:nvSpPr>
-          <p:cNvPr id="1036" name="callout-title" descr=""/>
-          <p:cNvSpPr/>
-          <p:nvPr/>
-        </p:nvSpPr>
-        <p:spPr>
-          <a:xfrm>
-            <a:off x="1097280" y="2907792"/>
-            <a:ext cx="9994392" cy="320040"/>
-          </a:xfrm>
-          <a:prstGeom prst="roundRect">
-            <a:avLst>
-              <a:gd name="adj" fmla="val 6000"/>
-            </a:avLst>
-          </a:prstGeom>
-          <a:solidFill>
-            <a:srgbClr val="009955"/>
-          </a:solidFill>
-          <a:ln>
-            <a:noFill/>
-          </a:ln>
-        </p:spPr>
-        <p:txBody>
-          <a:bodyPr lIns="91440" tIns="68580" rIns="91440" bIns="68580" anchor="t" wrap="square">
-            <a:normAutofit/>
-          </a:bodyPr>
-          <a:lstStyle/>
-          <a:p>
-            <a:pPr algn="l"/>
-            <a:r>
-              <a:rPr lang="en-US" sz="1400" b="1" dirty="0">
-                <a:solidFill>
-                  <a:srgbClr val="FEFDFA"/>
-                </a:solidFill>
-              </a:rPr>
-              <a:t>Two things you should do after you finish your paper</a:t>
-            </a:r>
-          </a:p>
-        </p:txBody>
-      </p:sp>
-      <p:sp>
-        <p:nvSpPr>
-          <p:cNvPr id="1037" name="callout-body" descr=""/>
-          <p:cNvSpPr/>
-          <p:nvPr/>
-        </p:nvSpPr>
-        <p:spPr>
-          <a:xfrm>
-            <a:off x="1097280" y="3227832"/>
-            <a:ext cx="9994392" cy="762000"/>
-          </a:xfrm>
-          <a:prstGeom prst="roundRect">
-            <a:avLst>
-              <a:gd name="adj" fmla="val 6000"/>
-            </a:avLst>
-          </a:prstGeom>
-          <a:solidFill>
-            <a:srgbClr val="FEFDFA"/>
-          </a:solidFill>
-          <a:ln>
-            <a:noFill/>
-          </a:ln>
-        </p:spPr>
-        <p:txBody>
-          <a:bodyPr lIns="91440" tIns="68580" rIns="91440" bIns="68580" anchor="t" wrap="square">
-            <a:normAutofit/>
-          </a:bodyPr>
-          <a:lstStyle/>
-          <a:p>
-            <a:pPr algn="l"/>
-            <a:r>
-              <a:rPr lang="en-US" sz="1200" b="0" dirty="0">
-                <a:solidFill>
-                  <a:srgbClr val="010B13"/>
-                </a:solidFill>
-              </a:rPr>
-              <a:t>Let the paper “get cold” for a day or two and re-read it (and probably re-write it - it never looks as good as you remember it being)Let someone else read it – “peer review” brings fresh ideas &amp; options</a:t>
+              <a:t>16 State one testable prediction</a:t>
+            </a:r>
+          </a:p>
+        </p:txBody>
+      </p:sp>
+      <p:sp>
+        <p:nvSpPr>
+          <p:cNvPr id="3" name="Content Placeholder 2"/>
+          <p:cNvSpPr>
+            <a:spLocks noGrp="1"/>
+          </p:cNvSpPr>
+          <p:nvPr>
+            <p:ph idx="1"/>
+          </p:nvPr>
+        </p:nvSpPr>
+        <p:spPr/>
+        <p:txBody>
+          <a:bodyPr/>
+          <a:lstStyle/>
+          <a:p>
+            <a:pPr lvl="0" indent="0" marL="1270000">
+              <a:buNone/>
+            </a:pPr>
+            <a:r>
+              <a:rPr sz="2000"/>
+              <a:t>Among </a:t>
+            </a:r>
+            <a:r>
+              <a:rPr sz="2000" b="1"/>
+              <a:t>[sample]</a:t>
+            </a:r>
+            <a:r>
+              <a:rPr sz="2000"/>
+              <a:t>, </a:t>
+            </a:r>
+            <a:r>
+              <a:rPr sz="2000" b="1"/>
+              <a:t>[posture condition]</a:t>
+            </a:r>
+            <a:r>
+              <a:rPr sz="2000"/>
+              <a:t> will produce </a:t>
+            </a:r>
+            <a:r>
+              <a:rPr sz="2000" b="1"/>
+              <a:t>[higher or lower outcome]</a:t>
+            </a:r>
+            <a:r>
+              <a:rPr sz="2000"/>
+              <a:t> than </a:t>
+            </a:r>
+            <a:r>
+              <a:rPr sz="2000" b="1"/>
+              <a:t>[comparison condition]</a:t>
+            </a:r>
+            <a:r>
+              <a:rPr sz="2000"/>
+              <a:t>.</a:t>
+            </a:r>
+          </a:p>
+          <a:p>
+            <a:pPr lvl="0" indent="0" marL="0">
+              <a:buNone/>
+            </a:pPr>
+            <a:r>
+              <a:rPr/>
+              <a:t>Name the </a:t>
+            </a:r>
+            <a:r>
+              <a:rPr b="1"/>
+              <a:t>sample · conditions · outcome · direction</a:t>
+            </a:r>
+            <a:r>
+              <a:rPr/>
+              <a:t>.</a:t>
             </a:r>
           </a:p>
         </p:txBody>
@@ -4608,7 +6698,7 @@
             </a:pPr>
             <a:r>
               <a:rPr/>
-              <a:t>Concise Writing</a:t>
+              <a:t>17 Plan the simplest clear method</a:t>
             </a:r>
           </a:p>
         </p:txBody>
@@ -4628,31 +6718,68 @@
           <a:bodyPr/>
           <a:lstStyle/>
           <a:p>
-            <a:pPr lvl="0"/>
-            <a:r>
-              <a:rPr/>
-              <a:t>Most reviews of articles involve reporting a variety of information, including number of participants, materials used, etc. (see grading sheets).</a:t>
-            </a:r>
-          </a:p>
-          <a:p>
-            <a:pPr lvl="0"/>
-            <a:r>
-              <a:rPr/>
-              <a:t>While it is acceptable to report each “bit” of information in its own sentence, this leads to a bloated paper that is boring to read.</a:t>
-            </a:r>
-          </a:p>
-          <a:p>
-            <a:pPr lvl="0"/>
-            <a:r>
-              <a:rPr/>
-              <a:t>Good writers learn to integrate ideas and information into concise sentences and paragraphs.</a:t>
-            </a:r>
-          </a:p>
-          <a:p>
-            <a:pPr lvl="0"/>
-            <a:r>
-              <a:rPr/>
-              <a:t>Think about each “bit” of information you are including. Are they truly separate “bits” or are they describing different aspects of the same idea? Can the bits be combined into more descriptive sentences?</a:t>
+            <a:pPr lvl="0" indent="-457200" marL="457200">
+              <a:buAutoNum type="arabicPeriod"/>
+            </a:pPr>
+            <a:r>
+              <a:rPr b="1"/>
+              <a:t>Sample:</a:t>
+            </a:r>
+            <a:r>
+              <a:rPr/>
+              <a:t> Who and how many?</a:t>
+            </a:r>
+          </a:p>
+          <a:p>
+            <a:pPr lvl="0" indent="-457200" marL="457200">
+              <a:buAutoNum type="arabicPeriod"/>
+            </a:pPr>
+            <a:r>
+              <a:rPr b="1"/>
+              <a:t>Assignment:</a:t>
+            </a:r>
+            <a:r>
+              <a:rPr/>
+              <a:t> How are conditions created?</a:t>
+            </a:r>
+          </a:p>
+          <a:p>
+            <a:pPr lvl="0" indent="-457200" marL="457200">
+              <a:buAutoNum type="arabicPeriod"/>
+            </a:pPr>
+            <a:r>
+              <a:rPr b="1"/>
+              <a:t>Procedure:</a:t>
+            </a:r>
+            <a:r>
+              <a:rPr/>
+              <a:t> What happens, in order?</a:t>
+            </a:r>
+          </a:p>
+          <a:p>
+            <a:pPr lvl="0" indent="-457200" marL="457200">
+              <a:buAutoNum type="arabicPeriod"/>
+            </a:pPr>
+            <a:r>
+              <a:rPr b="1"/>
+              <a:t>Measure:</a:t>
+            </a:r>
+            <a:r>
+              <a:rPr/>
+              <a:t> What is recorded?</a:t>
+            </a:r>
+          </a:p>
+          <a:p>
+            <a:pPr lvl="0" indent="-457200" marL="457200">
+              <a:buAutoNum type="arabicPeriod"/>
+            </a:pPr>
+            <a:r>
+              <a:rPr b="1"/>
+              <a:t>Controls:</a:t>
+            </a:r>
+            <a:r>
+              <a:rPr/>
+              <a:t> What stays constant?</a:t>
             </a:r>
           </a:p>
         </p:txBody>
@@ -4704,79 +6831,201 @@
             </a:pPr>
             <a:r>
               <a:rPr/>
-              <a:t>Examples</a:t>
-            </a:r>
-          </a:p>
-        </p:txBody>
-      </p:sp>
-      <p:sp>
-        <p:nvSpPr>
-          <p:cNvPr id="3" name="Content Placeholder 2"/>
-          <p:cNvSpPr>
-            <a:spLocks noGrp="1"/>
-          </p:cNvSpPr>
-          <p:nvPr>
-            <p:ph idx="1"/>
-          </p:nvPr>
-        </p:nvSpPr>
-        <p:spPr/>
-        <p:txBody>
-          <a:bodyPr/>
-          <a:lstStyle/>
-          <a:p>
-            <a:pPr lvl="0" indent="0" marL="0">
-              <a:buNone/>
-            </a:pPr>
-            <a:r>
-              <a:rPr b="1"/>
-              <a:t>Nonintegrated (Boring)</a:t>
-            </a:r>
-          </a:p>
-          <a:p>
-            <a:pPr lvl="0" indent="0" marL="1270000">
-              <a:buNone/>
-            </a:pPr>
-            <a:r>
-              <a:rPr sz="2000"/>
-              <a:t>Two hundred and four students participated in the study. All of the students were undergraduates in psychology. Roughly 84% of the participants were female. The materials used were the Beck Depression Inventory and the Beck Anxiety Inventory. The participants were brought into a large classroom and asked to fill out the inventories.</a:t>
-            </a:r>
-          </a:p>
-          <a:p>
-            <a:pPr lvl="0" indent="0" marL="0">
-              <a:buNone/>
-            </a:pPr>
-            <a:r>
-              <a:rPr/>
-              <a:t>(52 words, 5 sentences)</a:t>
-            </a:r>
-          </a:p>
-          <a:p>
-            <a:pPr lvl="0" indent="0" marL="0">
-              <a:buNone/>
-            </a:pPr>
-            <a:r>
-              <a:rPr b="1"/>
-              <a:t>Concise &amp; Integrated</a:t>
-            </a:r>
-          </a:p>
-          <a:p>
-            <a:pPr lvl="0" indent="0" marL="1270000">
-              <a:buNone/>
-            </a:pPr>
-            <a:r>
-              <a:rPr sz="2000"/>
-              <a:t>Two hundred and four undergraduate psychology students (84% female) participated in the study. The participants were brought into a large classroom and asked to fill out the Beck Depression Inventory and the Beck Anxiety Inventory.</a:t>
-            </a:r>
-          </a:p>
-          <a:p>
-            <a:pPr lvl="0" indent="0" marL="0">
-              <a:buNone/>
-            </a:pPr>
-            <a:r>
-              <a:rPr/>
-              <a:t>(35 words, 2 sentences)</a:t>
-            </a:r>
-          </a:p>
+              <a:t>18 Check both kinds of validity</a:t>
+            </a:r>
+          </a:p>
+        </p:txBody>
+      </p:sp>
+      <p:sp>
+        <p:nvSpPr>
+          <p:cNvPr id="1001" name="card-steel" descr="card: Internal validity. • Assign conditions fairly. • Standardize the procedure."/>
+          <p:cNvSpPr/>
+          <p:nvPr/>
+        </p:nvSpPr>
+        <p:spPr>
+          <a:xfrm>
+            <a:off x="1097280" y="2633472"/>
+            <a:ext cx="4924044" cy="1310640"/>
+          </a:xfrm>
+          <a:prstGeom prst="roundRect">
+            <a:avLst>
+              <a:gd name="adj" fmla="val 6000"/>
+            </a:avLst>
+          </a:prstGeom>
+          <a:solidFill>
+            <a:srgbClr val="FEFDFA"/>
+          </a:solidFill>
+          <a:ln w="19050">
+            <a:solidFill>
+              <a:srgbClr val="CCCCCC"/>
+            </a:solidFill>
+          </a:ln>
+        </p:spPr>
+        <p:txBody>
+          <a:bodyPr lIns="182880" tIns="182880" rIns="182880" bIns="182880" anchor="t" wrap="square">
+            <a:normAutofit/>
+          </a:bodyPr>
+          <a:lstStyle/>
+          <a:p>
+            <a:pPr algn="l"/>
+            <a:r>
+              <a:rPr lang="en-US" sz="2200" b="1" dirty="0">
+                <a:solidFill>
+                  <a:srgbClr val="010B13"/>
+                </a:solidFill>
+              </a:rPr>
+              <a:t>Internal validity</a:t>
+            </a:r>
+          </a:p>
+          <a:p>
+            <a:pPr algn="l"/>
+            <a:r>
+              <a:rPr lang="en-US" sz="2000" b="0" dirty="0">
+                <a:solidFill>
+                  <a:srgbClr val="010B13"/>
+                </a:solidFill>
+              </a:rPr>
+              <a:t>• Assign conditions fairly.</a:t>
+            </a:r>
+          </a:p>
+          <a:p>
+            <a:pPr algn="l"/>
+            <a:r>
+              <a:rPr lang="en-US" sz="2000" b="0" dirty="0">
+                <a:solidFill>
+                  <a:srgbClr val="010B13"/>
+                </a:solidFill>
+              </a:rPr>
+              <a:t>• Standardize the procedure.</a:t>
+            </a:r>
+          </a:p>
+        </p:txBody>
+      </p:sp>
+      <p:sp>
+        <p:nvSpPr>
+          <p:cNvPr id="1002" name="card-rail" descr=""/>
+          <p:cNvSpPr/>
+          <p:nvPr/>
+        </p:nvSpPr>
+        <p:spPr>
+          <a:xfrm>
+            <a:off x="1097280" y="2633472"/>
+            <a:ext cx="54864" cy="1310640"/>
+          </a:xfrm>
+          <a:prstGeom prst="roundRect">
+            <a:avLst>
+              <a:gd name="adj" fmla="val 20000"/>
+            </a:avLst>
+          </a:prstGeom>
+          <a:solidFill>
+            <a:srgbClr val="010B13"/>
+          </a:solidFill>
+          <a:ln>
+            <a:noFill/>
+          </a:ln>
+        </p:spPr>
+        <p:txBody>
+          <a:bodyPr lIns="182880" tIns="182880" rIns="182880" bIns="182880" anchor="t" wrap="square">
+            <a:normAutofit/>
+          </a:bodyPr>
+          <a:lstStyle/>
+          <a:p/>
+        </p:txBody>
+      </p:sp>
+      <p:sp>
+        <p:nvSpPr>
+          <p:cNvPr id="1003" name="card-steel" descr="card: External validity. • Define the sample and setting. • Keep conclusions within that scope."/>
+          <p:cNvSpPr/>
+          <p:nvPr/>
+        </p:nvSpPr>
+        <p:spPr>
+          <a:xfrm>
+            <a:off x="6167628" y="2633472"/>
+            <a:ext cx="4924044" cy="1920240"/>
+          </a:xfrm>
+          <a:prstGeom prst="roundRect">
+            <a:avLst>
+              <a:gd name="adj" fmla="val 6000"/>
+            </a:avLst>
+          </a:prstGeom>
+          <a:solidFill>
+            <a:srgbClr val="FEFDFA"/>
+          </a:solidFill>
+          <a:ln w="19050">
+            <a:solidFill>
+              <a:srgbClr val="CCCCCC"/>
+            </a:solidFill>
+          </a:ln>
+        </p:spPr>
+        <p:txBody>
+          <a:bodyPr lIns="182880" tIns="182880" rIns="182880" bIns="182880" anchor="t" wrap="square">
+            <a:normAutofit/>
+          </a:bodyPr>
+          <a:lstStyle/>
+          <a:p>
+            <a:pPr algn="l"/>
+            <a:r>
+              <a:rPr lang="en-US" sz="2200" b="1" dirty="0">
+                <a:solidFill>
+                  <a:srgbClr val="010B13"/>
+                </a:solidFill>
+              </a:rPr>
+              <a:t>External validity</a:t>
+            </a:r>
+          </a:p>
+          <a:p>
+            <a:pPr algn="l"/>
+            <a:r>
+              <a:rPr lang="en-US" sz="2000" b="0" dirty="0">
+                <a:solidFill>
+                  <a:srgbClr val="010B13"/>
+                </a:solidFill>
+              </a:rPr>
+              <a:t>• Define the sample and setting.</a:t>
+            </a:r>
+          </a:p>
+          <a:p>
+            <a:pPr algn="l"/>
+            <a:r>
+              <a:rPr lang="en-US" sz="2000" b="0" dirty="0">
+                <a:solidFill>
+                  <a:srgbClr val="010B13"/>
+                </a:solidFill>
+              </a:rPr>
+              <a:t>• Keep conclusions within that scope.</a:t>
+            </a:r>
+          </a:p>
+        </p:txBody>
+      </p:sp>
+      <p:sp>
+        <p:nvSpPr>
+          <p:cNvPr id="1004" name="card-rail" descr=""/>
+          <p:cNvSpPr/>
+          <p:nvPr/>
+        </p:nvSpPr>
+        <p:spPr>
+          <a:xfrm>
+            <a:off x="6167628" y="2633472"/>
+            <a:ext cx="54864" cy="1920240"/>
+          </a:xfrm>
+          <a:prstGeom prst="roundRect">
+            <a:avLst>
+              <a:gd name="adj" fmla="val 20000"/>
+            </a:avLst>
+          </a:prstGeom>
+          <a:solidFill>
+            <a:srgbClr val="010B13"/>
+          </a:solidFill>
+          <a:ln>
+            <a:noFill/>
+          </a:ln>
+        </p:spPr>
+        <p:txBody>
+          <a:bodyPr lIns="182880" tIns="182880" rIns="182880" bIns="182880" anchor="t" wrap="square">
+            <a:normAutofit/>
+          </a:bodyPr>
+          <a:lstStyle/>
+          <a:p/>
         </p:txBody>
       </p:sp>
     </p:spTree>
@@ -4826,7 +7075,7 @@
             </a:pPr>
             <a:r>
               <a:rPr/>
-              <a:t>What You Need Today</a:t>
+              <a:t>1 Get ready to build the paper</a:t>
             </a:r>
           </a:p>
         </p:txBody>
@@ -4846,37 +7095,49 @@
           <a:bodyPr/>
           <a:lstStyle/>
           <a:p>
+            <a:pPr lvl="0"/>
+            <a:r>
+              <a:rPr b="1"/>
+              <a:t>Worksheet:</a:t>
+            </a:r>
+            <a:r>
+              <a:rPr/>
+              <a:t> Lab 04 worksheet and hints sheet</a:t>
+            </a:r>
+          </a:p>
+          <a:p>
+            <a:pPr lvl="0"/>
+            <a:r>
+              <a:rPr b="1"/>
+              <a:t>Evidence:</a:t>
+            </a:r>
+            <a:r>
+              <a:rPr/>
+              <a:t> Lynn and Mynier and VanVolkinburg articles</a:t>
+            </a:r>
+          </a:p>
+          <a:p>
+            <a:pPr lvl="0"/>
+            <a:r>
+              <a:rPr b="1"/>
+              <a:t>Writing help:</a:t>
+            </a:r>
+            <a:r>
+              <a:rPr/>
+              <a:t> APA student-paper, citation, and plagiarism guides</a:t>
+            </a:r>
+          </a:p>
+          <a:p>
             <a:pPr lvl="0" indent="0" marL="0">
               <a:buNone/>
             </a:pPr>
             <a:r>
               <a:rPr/>
-              <a:t>Everything for this week is linked on the next slides – and always on the lab page under </a:t>
+              <a:t>Today’s path: </a:t>
             </a:r>
             <a:r>
               <a:rPr b="1"/>
-              <a:t>Handouts &amp; References</a:t>
-            </a:r>
-            <a:r>
-              <a:rPr/>
-              <a:t>.</a:t>
-            </a:r>
-          </a:p>
-          <a:p>
-            <a:pPr lvl="0" indent="0" marL="0">
-              <a:buNone/>
-            </a:pPr>
-            <a:r>
-              <a:rPr/>
-              <a:t>Open these </a:t>
-            </a:r>
-            <a:r>
-              <a:rPr b="1"/>
-              <a:t>before we start</a:t>
-            </a:r>
-            <a:r>
-              <a:rPr/>
-              <a:t> so you can follow along.</a:t>
+              <a:t>read → integrate → propose → compose</a:t>
             </a:r>
           </a:p>
         </p:txBody>
@@ -4913,19 +7174,11 @@
             <p:ph type="title"/>
           </p:nvPr>
         </p:nvSpPr>
-        <p:spPr bwMode="blackWhite">
+        <p:spPr>
           <a:xfrm>
-            <a:off x="1097280" y="2386744"/>
-            <a:ext cx="9997440" cy="1645920"/>
+            <a:off x="1097280" y="964692"/>
+            <a:ext cx="9997440" cy="1188720"/>
           </a:xfrm>
-          <a:solidFill>
-            <a:srgbClr val="FFFFFF"/>
-          </a:solidFill>
-          <a:ln w="38100">
-            <a:solidFill>
-              <a:srgbClr val="404040"/>
-            </a:solidFill>
-          </a:ln>
         </p:spPr>
         <p:txBody>
           <a:bodyPr/>
@@ -4936,7 +7189,68 @@
             </a:pPr>
             <a:r>
               <a:rPr/>
-              <a:t>Questions?</a:t>
+              <a:t>19 Compose from the worksheet</a:t>
+            </a:r>
+          </a:p>
+        </p:txBody>
+      </p:sp>
+      <p:sp>
+        <p:nvSpPr>
+          <p:cNvPr id="3" name="Content Placeholder 2"/>
+          <p:cNvSpPr>
+            <a:spLocks noGrp="1"/>
+          </p:cNvSpPr>
+          <p:nvPr>
+            <p:ph idx="1"/>
+          </p:nvPr>
+        </p:nvSpPr>
+        <p:spPr/>
+        <p:txBody>
+          <a:bodyPr/>
+          <a:lstStyle/>
+          <a:p>
+            <a:pPr lvl="0" indent="-457200" marL="457200">
+              <a:buAutoNum type="arabicPeriod"/>
+            </a:pPr>
+            <a:r>
+              <a:rPr/>
+              <a:t>Introduce the topic and scope.</a:t>
+            </a:r>
+          </a:p>
+          <a:p>
+            <a:pPr lvl="0" indent="-457200" marL="457200">
+              <a:buAutoNum type="arabicPeriod"/>
+            </a:pPr>
+            <a:r>
+              <a:rPr/>
+              <a:t>Integrate Lynn and Mynier’s studies.</a:t>
+            </a:r>
+          </a:p>
+          <a:p>
+            <a:pPr lvl="0" indent="-457200" marL="457200">
+              <a:buAutoNum type="arabicPeriod"/>
+            </a:pPr>
+            <a:r>
+              <a:rPr/>
+              <a:t>Summarize VanVolkinburg.</a:t>
+            </a:r>
+          </a:p>
+          <a:p>
+            <a:pPr lvl="0" indent="-457200" marL="457200">
+              <a:buAutoNum type="arabicPeriod"/>
+            </a:pPr>
+            <a:r>
+              <a:rPr/>
+              <a:t>Synthesize both articles.</a:t>
+            </a:r>
+          </a:p>
+          <a:p>
+            <a:pPr lvl="0" indent="-457200" marL="457200">
+              <a:buAutoNum type="arabicPeriod"/>
+            </a:pPr>
+            <a:r>
+              <a:rPr/>
+              <a:t>Present the proposed study.</a:t>
             </a:r>
           </a:p>
         </p:txBody>
@@ -4988,7 +7302,7 @@
             </a:pPr>
             <a:r>
               <a:rPr/>
-              <a:t>Assignments &amp; Reminders</a:t>
+              <a:t>20 Build paragraphs around one point</a:t>
             </a:r>
           </a:p>
         </p:txBody>
@@ -5008,44 +7322,484 @@
           <a:bodyPr/>
           <a:lstStyle/>
           <a:p>
+            <a:pPr lvl="0" indent="-457200" marL="457200">
+              <a:buAutoNum type="arabicPeriod"/>
+            </a:pPr>
+            <a:r>
+              <a:rPr/>
+              <a:t>State the paragraph’s main point.</a:t>
+            </a:r>
+          </a:p>
+          <a:p>
+            <a:pPr lvl="0" indent="-457200" marL="457200">
+              <a:buAutoNum type="arabicPeriod"/>
+            </a:pPr>
+            <a:r>
+              <a:rPr/>
+              <a:t>Add evidence and explain why it matters.</a:t>
+            </a:r>
+          </a:p>
+          <a:p>
+            <a:pPr lvl="0" indent="-457200" marL="457200">
+              <a:buAutoNum type="arabicPeriod"/>
+            </a:pPr>
+            <a:r>
+              <a:rPr/>
+              <a:t>Connect that point to what comes next.</a:t>
+            </a:r>
+          </a:p>
+        </p:txBody>
+      </p:sp>
+    </p:spTree>
+  </p:cSld>
+</p:sld>
+</file>
+
+<file path=ppt/slides/slide22.xml><?xml version="1.0" encoding="utf-8"?>
+<p:sld xmlns:a="http://schemas.openxmlformats.org/drawingml/2006/main" xmlns:r="http://schemas.openxmlformats.org/officeDocument/2006/relationships" xmlns:p="http://schemas.openxmlformats.org/presentationml/2006/main">
+  <p:cSld>
+    <p:spTree>
+      <p:nvGrpSpPr>
+        <p:cNvPr id="1" name=""/>
+        <p:cNvGrpSpPr/>
+        <p:nvPr/>
+      </p:nvGrpSpPr>
+      <p:grpSpPr>
+        <a:xfrm>
+          <a:off x="0" y="0"/>
+          <a:ext cx="0" cy="0"/>
+          <a:chOff x="0" y="0"/>
+          <a:chExt cx="0" cy="0"/>
+        </a:xfrm>
+      </p:grpSpPr>
+      <p:sp>
+        <p:nvSpPr>
+          <p:cNvPr id="2" name="Title 1"/>
+          <p:cNvSpPr>
+            <a:spLocks noGrp="1"/>
+          </p:cNvSpPr>
+          <p:nvPr>
+            <p:ph type="title"/>
+          </p:nvPr>
+        </p:nvSpPr>
+        <p:spPr>
+          <a:xfrm>
+            <a:off x="1097280" y="964692"/>
+            <a:ext cx="9997440" cy="1188720"/>
+          </a:xfrm>
+        </p:spPr>
+        <p:txBody>
+          <a:bodyPr/>
+          <a:lstStyle/>
+          <a:p>
             <a:pPr lvl="0" indent="0" marL="0">
               <a:buNone/>
             </a:pPr>
             <a:r>
+              <a:rPr/>
+              <a:t>21 Combine related facts</a:t>
+            </a:r>
+          </a:p>
+        </p:txBody>
+      </p:sp>
+      <p:sp>
+        <p:nvSpPr>
+          <p:cNvPr id="1005" name="card-steel" descr="card: Separate facts. Study 1 included 270 tables. A waiter served them. He flipped a coin. The coin determined his posture."/>
+          <p:cNvSpPr/>
+          <p:nvPr/>
+        </p:nvSpPr>
+        <p:spPr>
+          <a:xfrm>
+            <a:off x="1097280" y="2633472"/>
+            <a:ext cx="4924044" cy="1920240"/>
+          </a:xfrm>
+          <a:prstGeom prst="roundRect">
+            <a:avLst>
+              <a:gd name="adj" fmla="val 6000"/>
+            </a:avLst>
+          </a:prstGeom>
+          <a:solidFill>
+            <a:srgbClr val="FEFDFA"/>
+          </a:solidFill>
+          <a:ln w="19050">
+            <a:solidFill>
+              <a:srgbClr val="CCCCCC"/>
+            </a:solidFill>
+          </a:ln>
+        </p:spPr>
+        <p:txBody>
+          <a:bodyPr lIns="182880" tIns="182880" rIns="182880" bIns="182880" anchor="t" wrap="square">
+            <a:normAutofit/>
+          </a:bodyPr>
+          <a:lstStyle/>
+          <a:p>
+            <a:pPr algn="l"/>
+            <a:r>
+              <a:rPr lang="en-US" sz="2200" b="1" dirty="0">
+                <a:solidFill>
+                  <a:srgbClr val="010B13"/>
+                </a:solidFill>
+              </a:rPr>
+              <a:t>Separate facts</a:t>
+            </a:r>
+          </a:p>
+          <a:p>
+            <a:pPr algn="l"/>
+            <a:r>
+              <a:rPr lang="en-US" sz="2000" b="0" dirty="0">
+                <a:solidFill>
+                  <a:srgbClr val="010B13"/>
+                </a:solidFill>
+              </a:rPr>
+              <a:t>Study 1 included 270 tables. A waiter served them. He flipped a coin. The coin determined his posture.</a:t>
+            </a:r>
+          </a:p>
+        </p:txBody>
+      </p:sp>
+      <p:sp>
+        <p:nvSpPr>
+          <p:cNvPr id="1006" name="card-rail" descr=""/>
+          <p:cNvSpPr/>
+          <p:nvPr/>
+        </p:nvSpPr>
+        <p:spPr>
+          <a:xfrm>
+            <a:off x="1097280" y="2633472"/>
+            <a:ext cx="54864" cy="1920240"/>
+          </a:xfrm>
+          <a:prstGeom prst="roundRect">
+            <a:avLst>
+              <a:gd name="adj" fmla="val 20000"/>
+            </a:avLst>
+          </a:prstGeom>
+          <a:solidFill>
+            <a:srgbClr val="010B13"/>
+          </a:solidFill>
+          <a:ln>
+            <a:noFill/>
+          </a:ln>
+        </p:spPr>
+        <p:txBody>
+          <a:bodyPr lIns="182880" tIns="182880" rIns="182880" bIns="182880" anchor="t" wrap="square">
+            <a:normAutofit/>
+          </a:bodyPr>
+          <a:lstStyle/>
+          <a:p/>
+        </p:txBody>
+      </p:sp>
+      <p:sp>
+        <p:nvSpPr>
+          <p:cNvPr id="1007" name="card-steel" descr="card: Integrated sentence. In Study 1, a waiter used a coin toss to assign 270 tables to a standing or squatting condition."/>
+          <p:cNvSpPr/>
+          <p:nvPr/>
+        </p:nvSpPr>
+        <p:spPr>
+          <a:xfrm>
+            <a:off x="6167628" y="2633472"/>
+            <a:ext cx="4924044" cy="1920240"/>
+          </a:xfrm>
+          <a:prstGeom prst="roundRect">
+            <a:avLst>
+              <a:gd name="adj" fmla="val 6000"/>
+            </a:avLst>
+          </a:prstGeom>
+          <a:solidFill>
+            <a:srgbClr val="FEFDFA"/>
+          </a:solidFill>
+          <a:ln w="19050">
+            <a:solidFill>
+              <a:srgbClr val="CCCCCC"/>
+            </a:solidFill>
+          </a:ln>
+        </p:spPr>
+        <p:txBody>
+          <a:bodyPr lIns="182880" tIns="182880" rIns="182880" bIns="182880" anchor="t" wrap="square">
+            <a:normAutofit/>
+          </a:bodyPr>
+          <a:lstStyle/>
+          <a:p>
+            <a:pPr algn="l"/>
+            <a:r>
+              <a:rPr lang="en-US" sz="2200" b="1" dirty="0">
+                <a:solidFill>
+                  <a:srgbClr val="010B13"/>
+                </a:solidFill>
+              </a:rPr>
+              <a:t>Integrated sentence</a:t>
+            </a:r>
+          </a:p>
+          <a:p>
+            <a:pPr algn="l"/>
+            <a:r>
+              <a:rPr lang="en-US" sz="2000" b="0" dirty="0">
+                <a:solidFill>
+                  <a:srgbClr val="010B13"/>
+                </a:solidFill>
+              </a:rPr>
+              <a:t>In Study 1, a waiter used a coin toss to assign 270 tables to a standing or squatting condition.</a:t>
+            </a:r>
+          </a:p>
+        </p:txBody>
+      </p:sp>
+      <p:sp>
+        <p:nvSpPr>
+          <p:cNvPr id="1008" name="card-rail" descr=""/>
+          <p:cNvSpPr/>
+          <p:nvPr/>
+        </p:nvSpPr>
+        <p:spPr>
+          <a:xfrm>
+            <a:off x="6167628" y="2633472"/>
+            <a:ext cx="54864" cy="1920240"/>
+          </a:xfrm>
+          <a:prstGeom prst="roundRect">
+            <a:avLst>
+              <a:gd name="adj" fmla="val 20000"/>
+            </a:avLst>
+          </a:prstGeom>
+          <a:solidFill>
+            <a:srgbClr val="010B13"/>
+          </a:solidFill>
+          <a:ln>
+            <a:noFill/>
+          </a:ln>
+        </p:spPr>
+        <p:txBody>
+          <a:bodyPr lIns="182880" tIns="182880" rIns="182880" bIns="182880" anchor="t" wrap="square">
+            <a:normAutofit/>
+          </a:bodyPr>
+          <a:lstStyle/>
+          <a:p/>
+        </p:txBody>
+      </p:sp>
+    </p:spTree>
+  </p:cSld>
+</p:sld>
+</file>
+
+<file path=ppt/slides/slide23.xml><?xml version="1.0" encoding="utf-8"?>
+<p:sld xmlns:a="http://schemas.openxmlformats.org/drawingml/2006/main" xmlns:r="http://schemas.openxmlformats.org/officeDocument/2006/relationships" xmlns:p="http://schemas.openxmlformats.org/presentationml/2006/main">
+  <p:cSld>
+    <p:spTree>
+      <p:nvGrpSpPr>
+        <p:cNvPr id="1" name=""/>
+        <p:cNvGrpSpPr/>
+        <p:nvPr/>
+      </p:nvGrpSpPr>
+      <p:grpSpPr>
+        <a:xfrm>
+          <a:off x="0" y="0"/>
+          <a:ext cx="0" cy="0"/>
+          <a:chOff x="0" y="0"/>
+          <a:chExt cx="0" cy="0"/>
+        </a:xfrm>
+      </p:grpSpPr>
+      <p:sp>
+        <p:nvSpPr>
+          <p:cNvPr id="2" name="Title 1"/>
+          <p:cNvSpPr>
+            <a:spLocks noGrp="1"/>
+          </p:cNvSpPr>
+          <p:nvPr>
+            <p:ph type="title"/>
+          </p:nvPr>
+        </p:nvSpPr>
+        <p:spPr>
+          <a:xfrm>
+            <a:off x="1097280" y="964692"/>
+            <a:ext cx="9997440" cy="1188720"/>
+          </a:xfrm>
+        </p:spPr>
+        <p:txBody>
+          <a:bodyPr/>
+          <a:lstStyle/>
+          <a:p>
+            <a:pPr lvl="0" indent="0" marL="0">
+              <a:buNone/>
+            </a:pPr>
+            <a:r>
+              <a:rPr/>
+              <a:t>22 Finish with the APA checklist</a:t>
+            </a:r>
+          </a:p>
+        </p:txBody>
+      </p:sp>
+      <p:sp>
+        <p:nvSpPr>
+          <p:cNvPr id="3" name="Content Placeholder 2"/>
+          <p:cNvSpPr>
+            <a:spLocks noGrp="1"/>
+          </p:cNvSpPr>
+          <p:nvPr>
+            <p:ph idx="1"/>
+          </p:nvPr>
+        </p:nvSpPr>
+        <p:spPr/>
+        <p:txBody>
+          <a:bodyPr/>
+          <a:lstStyle/>
+          <a:p>
+            <a:pPr lvl="0"/>
+            <a:r>
+              <a:rPr/>
+              <a:t>Create an APA student title page.</a:t>
+            </a:r>
+          </a:p>
+          <a:p>
+            <a:pPr lvl="0"/>
+            <a:r>
+              <a:rPr/>
+              <a:t>Use meaningful headings; do not add an </a:t>
+            </a:r>
+            <a:r>
               <a:rPr b="1"/>
-              <a:t>Given this week:</a:t>
+              <a:t>Introduction</a:t>
+            </a:r>
+            <a:r>
+              <a:rPr/>
+              <a:t> heading.</a:t>
             </a:r>
           </a:p>
           <a:p>
             <a:pPr lvl="0"/>
             <a:r>
               <a:rPr/>
-              <a:t>Submit to your lab section before week 5: Literature review &amp; proposal worksheet (AFTER SUBMITTING CHECK THAT YOU CHOSE THE CORRECT FILE!)</a:t>
-            </a:r>
-          </a:p>
+              <a:t>Paraphrase and cite both course articles.</a:t>
+            </a:r>
+          </a:p>
+          <a:p>
+            <a:pPr lvl="0"/>
+            <a:r>
+              <a:rPr/>
+              <a:t>Add a </a:t>
+            </a:r>
+            <a:r>
+              <a:rPr b="1"/>
+              <a:t>References</a:t>
+            </a:r>
+            <a:r>
+              <a:rPr/>
+              <a:t> page.</a:t>
+            </a:r>
+          </a:p>
+          <a:p>
+            <a:pPr lvl="0"/>
+            <a:r>
+              <a:rPr/>
+              <a:t>Double-space and proofread.</a:t>
+            </a:r>
+          </a:p>
+        </p:txBody>
+      </p:sp>
+    </p:spTree>
+  </p:cSld>
+</p:sld>
+</file>
+
+<file path=ppt/slides/slide24.xml><?xml version="1.0" encoding="utf-8"?>
+<p:sld xmlns:a="http://schemas.openxmlformats.org/drawingml/2006/main" xmlns:r="http://schemas.openxmlformats.org/officeDocument/2006/relationships" xmlns:p="http://schemas.openxmlformats.org/presentationml/2006/main">
+  <p:cSld>
+    <p:spTree>
+      <p:nvGrpSpPr>
+        <p:cNvPr id="1" name=""/>
+        <p:cNvGrpSpPr/>
+        <p:nvPr/>
+      </p:nvGrpSpPr>
+      <p:grpSpPr>
+        <a:xfrm>
+          <a:off x="0" y="0"/>
+          <a:ext cx="0" cy="0"/>
+          <a:chOff x="0" y="0"/>
+          <a:chExt cx="0" cy="0"/>
+        </a:xfrm>
+      </p:grpSpPr>
+      <p:sp>
+        <p:nvSpPr>
+          <p:cNvPr id="2" name="Title 1"/>
+          <p:cNvSpPr>
+            <a:spLocks noGrp="1"/>
+          </p:cNvSpPr>
+          <p:nvPr>
+            <p:ph type="title"/>
+          </p:nvPr>
+        </p:nvSpPr>
+        <p:spPr>
+          <a:xfrm>
+            <a:off x="1097280" y="964692"/>
+            <a:ext cx="9997440" cy="1188720"/>
+          </a:xfrm>
+        </p:spPr>
+        <p:txBody>
+          <a:bodyPr/>
+          <a:lstStyle/>
           <a:p>
             <a:pPr lvl="0" indent="0" marL="0">
               <a:buNone/>
             </a:pPr>
             <a:r>
-              <a:rPr b="1"/>
-              <a:t>Due this week:</a:t>
-            </a:r>
-          </a:p>
-          <a:p>
-            <a:pPr lvl="0"/>
-            <a:r>
-              <a:rPr/>
-              <a:t>Lab 03: Research Critique #1 and Research Critique #2</a:t>
-            </a:r>
-          </a:p>
-          <a:p>
-            <a:pPr lvl="0" indent="0" marL="0">
-              <a:buNone/>
-            </a:pPr>
-            <a:r>
-              <a:rPr/>
-              <a:t>Submit to your lab section in Canvas by 11:59pm the day before your lab meets.</a:t>
+              <a:rPr/>
+              <a:t>23 Work one stage at a time</a:t>
+            </a:r>
+          </a:p>
+        </p:txBody>
+      </p:sp>
+      <p:sp>
+        <p:nvSpPr>
+          <p:cNvPr id="3" name="Content Placeholder 2"/>
+          <p:cNvSpPr>
+            <a:spLocks noGrp="1"/>
+          </p:cNvSpPr>
+          <p:nvPr>
+            <p:ph idx="1"/>
+          </p:nvPr>
+        </p:nvSpPr>
+        <p:spPr/>
+        <p:txBody>
+          <a:bodyPr/>
+          <a:lstStyle/>
+          <a:p>
+            <a:pPr lvl="0" indent="-457200" marL="457200">
+              <a:buAutoNum type="arabicPeriod"/>
+            </a:pPr>
+            <a:r>
+              <a:rPr/>
+              <a:t>Finish and integrate both Lynn and Mynier studies.</a:t>
+            </a:r>
+          </a:p>
+          <a:p>
+            <a:pPr lvl="0" indent="-457200" marL="457200">
+              <a:buAutoNum type="arabicPeriod"/>
+            </a:pPr>
+            <a:r>
+              <a:rPr/>
+              <a:t>Summarize VanVolkinburg.</a:t>
+            </a:r>
+          </a:p>
+          <a:p>
+            <a:pPr lvl="0" indent="-457200" marL="457200">
+              <a:buAutoNum type="arabicPeriod"/>
+            </a:pPr>
+            <a:r>
+              <a:rPr/>
+              <a:t>Write the cross-article synthesis.</a:t>
+            </a:r>
+          </a:p>
+          <a:p>
+            <a:pPr lvl="0" indent="-457200" marL="457200">
+              <a:buAutoNum type="arabicPeriod"/>
+            </a:pPr>
+            <a:r>
+              <a:rPr/>
+              <a:t>Draft the proposal from the remaining question.</a:t>
+            </a:r>
+          </a:p>
+          <a:p>
+            <a:pPr lvl="0" indent="-457200" marL="457200">
+              <a:buAutoNum type="arabicPeriod"/>
+            </a:pPr>
+            <a:r>
+              <a:rPr/>
+              <a:t>Compose the paper after the worksheet is complete.</a:t>
             </a:r>
           </a:p>
         </p:txBody>
@@ -5097,201 +7851,91 @@
             </a:pPr>
             <a:r>
               <a:rPr/>
-              <a:t>Scientific writing &amp; synthesizing research</a:t>
-            </a:r>
-          </a:p>
-        </p:txBody>
-      </p:sp>
-      <p:sp>
-        <p:nvSpPr>
-          <p:cNvPr id="1001" name="card-blue" descr="card: [arrow icon]. How to Improve your Writing [Web page]"/>
-          <p:cNvSpPr/>
+              <a:t>2 Start with the worksheet</a:t>
+            </a:r>
+          </a:p>
+        </p:txBody>
+      </p:sp>
+      <p:pic>
+        <p:nvPicPr>
+          <p:cNvPr descr="First page of the Lab 04 Literature Review and Proposal Worksheet, including its instructions and grading rows" id="0" name="Picture 1"/>
+          <p:cNvPicPr>
+            <a:picLocks noGrp="1" noChangeAspect="1"/>
+          </p:cNvPicPr>
           <p:nvPr/>
-        </p:nvSpPr>
-        <p:spPr>
+        </p:nvPicPr>
+        <p:blipFill>
+          <a:blip r:embed="rId3"/>
+          <a:stretch>
+            <a:fillRect/>
+          </a:stretch>
+        </p:blipFill>
+        <p:spPr bwMode="auto">
           <a:xfrm>
-            <a:off x="1097280" y="2633472"/>
-            <a:ext cx="3270504" cy="762000"/>
+            <a:off x="2349500" y="2628900"/>
+            <a:ext cx="2400300" cy="3098800"/>
           </a:xfrm>
-          <a:prstGeom prst="roundRect">
-            <a:avLst>
-              <a:gd name="adj" fmla="val 6000"/>
-            </a:avLst>
+          <a:prstGeom prst="rect">
+            <a:avLst/>
           </a:prstGeom>
-          <a:solidFill>
-            <a:srgbClr val="FEFDFA"/>
-          </a:solidFill>
-          <a:ln w="19050">
-            <a:solidFill>
-              <a:srgbClr val="CCCCCC"/>
-            </a:solidFill>
+          <a:noFill/>
+          <a:ln w="9525">
+            <a:noFill/>
+            <a:headEnd/>
+            <a:tailEnd/>
           </a:ln>
         </p:spPr>
-        <p:txBody>
-          <a:bodyPr lIns="91440" tIns="68580" rIns="91440" bIns="68580" anchor="t" wrap="square">
-            <a:normAutofit/>
-          </a:bodyPr>
-          <a:lstStyle/>
-          <a:p>
-            <a:pPr algn="l"/>
-            <a:r>
-              <a:rPr lang="en-US" sz="1400" b="1" dirty="0">
-                <a:solidFill>
-                  <a:srgbClr val="005D84"/>
-                </a:solidFill>
-              </a:rPr>
-              <a:t>[arrow icon]</a:t>
-            </a:r>
-          </a:p>
-          <a:p>
-            <a:pPr algn="l"/>
-            <a:r>
-              <a:rPr lang="en-US" sz="1200" b="0" dirty="0">
-                <a:solidFill>
-                  <a:srgbClr val="010B13"/>
-                </a:solidFill>
-              </a:rPr>
-              <a:t>How to Improve your Writing</a:t>
-            </a:r>
-          </a:p>
-          <a:p>
-            <a:pPr algn="l"/>
-            <a:r>
-              <a:rPr lang="en-US" sz="1200" b="0" dirty="0">
-                <a:solidFill>
-                  <a:srgbClr val="010B13"/>
-                </a:solidFill>
-              </a:rPr>
-              <a:t>[Web page]</a:t>
-            </a:r>
-          </a:p>
-        </p:txBody>
-      </p:sp>
-      <p:sp>
-        <p:nvSpPr>
-          <p:cNvPr id="1002" name="card-rail" descr=""/>
-          <p:cNvSpPr/>
-          <p:nvPr/>
-        </p:nvSpPr>
-        <p:spPr>
-          <a:xfrm>
-            <a:off x="1097280" y="2633472"/>
-            <a:ext cx="54864" cy="762000"/>
-          </a:xfrm>
-          <a:prstGeom prst="roundRect">
-            <a:avLst>
-              <a:gd name="adj" fmla="val 20000"/>
-            </a:avLst>
-          </a:prstGeom>
-          <a:solidFill>
-            <a:srgbClr val="005D84"/>
-          </a:solidFill>
-          <a:ln>
-            <a:noFill/>
-          </a:ln>
-        </p:spPr>
-        <p:txBody>
-          <a:bodyPr lIns="91440" tIns="68580" rIns="91440" bIns="68580" anchor="t" wrap="square">
-            <a:normAutofit/>
-          </a:bodyPr>
-          <a:lstStyle/>
-          <a:p/>
-        </p:txBody>
-      </p:sp>
-      <p:sp>
-        <p:nvSpPr>
-          <p:cNvPr id="1003" name="card-blue" descr="card: [book icon]. How to Improve your Writing (pdf version) [PowerPoint]"/>
-          <p:cNvSpPr/>
-          <p:nvPr/>
-        </p:nvSpPr>
-        <p:spPr>
-          <a:xfrm>
-            <a:off x="4459224" y="2633472"/>
-            <a:ext cx="3270504" cy="944880"/>
-          </a:xfrm>
-          <a:prstGeom prst="roundRect">
-            <a:avLst>
-              <a:gd name="adj" fmla="val 6000"/>
-            </a:avLst>
-          </a:prstGeom>
-          <a:solidFill>
-            <a:srgbClr val="FEFDFA"/>
-          </a:solidFill>
-          <a:ln w="19050">
-            <a:solidFill>
-              <a:srgbClr val="CCCCCC"/>
-            </a:solidFill>
-          </a:ln>
-        </p:spPr>
-        <p:txBody>
-          <a:bodyPr lIns="91440" tIns="68580" rIns="91440" bIns="68580" anchor="t" wrap="square">
-            <a:normAutofit/>
-          </a:bodyPr>
-          <a:lstStyle/>
-          <a:p>
-            <a:pPr algn="l"/>
-            <a:r>
-              <a:rPr lang="en-US" sz="1400" b="1" dirty="0">
-                <a:solidFill>
-                  <a:srgbClr val="005D84"/>
-                </a:solidFill>
-              </a:rPr>
-              <a:t>[book icon]</a:t>
-            </a:r>
-          </a:p>
-          <a:p>
-            <a:pPr algn="l"/>
-            <a:r>
-              <a:rPr lang="en-US" sz="1200" b="0" dirty="0">
-                <a:solidFill>
-                  <a:srgbClr val="010B13"/>
-                </a:solidFill>
-              </a:rPr>
-              <a:t>How to Improve your Writing (pdf version)</a:t>
-            </a:r>
-          </a:p>
-          <a:p>
-            <a:pPr algn="l"/>
-            <a:r>
-              <a:rPr lang="en-US" sz="1200" b="0" dirty="0">
-                <a:solidFill>
-                  <a:srgbClr val="010B13"/>
-                </a:solidFill>
-              </a:rPr>
-              <a:t>[PowerPoint]</a:t>
-            </a:r>
-          </a:p>
-        </p:txBody>
-      </p:sp>
-      <p:sp>
-        <p:nvSpPr>
-          <p:cNvPr id="1004" name="card-rail" descr=""/>
-          <p:cNvSpPr/>
-          <p:nvPr/>
-        </p:nvSpPr>
-        <p:spPr>
-          <a:xfrm>
-            <a:off x="4459224" y="2633472"/>
-            <a:ext cx="54864" cy="944880"/>
-          </a:xfrm>
-          <a:prstGeom prst="roundRect">
-            <a:avLst>
-              <a:gd name="adj" fmla="val 20000"/>
-            </a:avLst>
-          </a:prstGeom>
-          <a:solidFill>
-            <a:srgbClr val="005D84"/>
-          </a:solidFill>
-          <a:ln>
-            <a:noFill/>
-          </a:ln>
-        </p:spPr>
-        <p:txBody>
-          <a:bodyPr lIns="91440" tIns="68580" rIns="91440" bIns="68580" anchor="t" wrap="square">
-            <a:normAutofit/>
-          </a:bodyPr>
-          <a:lstStyle/>
-          <a:p/>
+      </p:pic>
+      <p:sp>
+        <p:nvSpPr>
+          <p:cNvPr id="4" name="Content Placeholder 3"/>
+          <p:cNvSpPr>
+            <a:spLocks noGrp="1"/>
+          </p:cNvSpPr>
+          <p:nvPr>
+            <p:ph idx="2" sz="half"/>
+          </p:nvPr>
+        </p:nvSpPr>
+        <p:spPr/>
+        <p:txBody>
+          <a:bodyPr/>
+          <a:lstStyle/>
+          <a:p>
+            <a:pPr lvl="0" indent="-457200" marL="457200">
+              <a:buAutoNum type="arabicPeriod"/>
+            </a:pPr>
+            <a:r>
+              <a:rPr/>
+              <a:t>Complete one section at a time.</a:t>
+            </a:r>
+          </a:p>
+          <a:p>
+            <a:pPr lvl="0" indent="-457200" marL="457200">
+              <a:buAutoNum type="arabicPeriod"/>
+            </a:pPr>
+            <a:r>
+              <a:rPr/>
+              <a:t>Use the hints sheet to check details.</a:t>
+            </a:r>
+          </a:p>
+          <a:p>
+            <a:pPr lvl="0" indent="-457200" marL="457200">
+              <a:buAutoNum type="arabicPeriod"/>
+            </a:pPr>
+            <a:r>
+              <a:rPr/>
+              <a:t>Compose the paper after the worksheet.</a:t>
+            </a:r>
+          </a:p>
+          <a:p>
+            <a:pPr lvl="0" indent="-457200" marL="457200">
+              <a:buAutoNum type="arabicPeriod"/>
+            </a:pPr>
+            <a:r>
+              <a:rPr/>
+              <a:t>Leave the gray grading rows blank.</a:t>
+            </a:r>
+          </a:p>
         </p:txBody>
       </p:sp>
     </p:spTree>
@@ -5341,299 +7985,41 @@
             </a:pPr>
             <a:r>
               <a:rPr/>
-              <a:t>Writing Literature Reviews &amp; Research Proposals</a:t>
-            </a:r>
-          </a:p>
-        </p:txBody>
-      </p:sp>
-      <p:sp>
-        <p:nvSpPr>
-          <p:cNvPr id="1005" name="card-blue" descr="card: [book icon]. APA Student Paper Guide [PDF]"/>
-          <p:cNvSpPr/>
+              <a:t>3 Literature leads to the next study</a:t>
+            </a:r>
+          </a:p>
+        </p:txBody>
+      </p:sp>
+      <p:pic>
+        <p:nvPicPr>
+          <p:cNvPr descr="Circular research process showing a research question, literature review, hypothesis, design, data collection, analysis, and reporting, with reporting feeding the next question" id="0" name="Picture 1"/>
+          <p:cNvPicPr>
+            <a:picLocks noGrp="1" noChangeAspect="1"/>
+          </p:cNvPicPr>
           <p:nvPr/>
-        </p:nvSpPr>
-        <p:spPr>
+        </p:nvPicPr>
+        <p:blipFill>
+          <a:blip r:embed="rId3"/>
+          <a:stretch>
+            <a:fillRect/>
+          </a:stretch>
+        </p:blipFill>
+        <p:spPr bwMode="auto">
           <a:xfrm>
-            <a:off x="1097280" y="2633472"/>
-            <a:ext cx="3270504" cy="762000"/>
+            <a:off x="4546600" y="2628900"/>
+            <a:ext cx="3098800" cy="3098800"/>
           </a:xfrm>
-          <a:prstGeom prst="roundRect">
-            <a:avLst>
-              <a:gd name="adj" fmla="val 6000"/>
-            </a:avLst>
+          <a:prstGeom prst="rect">
+            <a:avLst/>
           </a:prstGeom>
-          <a:solidFill>
-            <a:srgbClr val="FEFDFA"/>
-          </a:solidFill>
-          <a:ln w="19050">
-            <a:solidFill>
-              <a:srgbClr val="CCCCCC"/>
-            </a:solidFill>
+          <a:noFill/>
+          <a:ln w="9525">
+            <a:noFill/>
+            <a:headEnd/>
+            <a:tailEnd/>
           </a:ln>
         </p:spPr>
-        <p:txBody>
-          <a:bodyPr lIns="91440" tIns="68580" rIns="91440" bIns="68580" anchor="t" wrap="square">
-            <a:normAutofit/>
-          </a:bodyPr>
-          <a:lstStyle/>
-          <a:p>
-            <a:pPr algn="l"/>
-            <a:r>
-              <a:rPr lang="en-US" sz="1400" b="1" dirty="0">
-                <a:solidFill>
-                  <a:srgbClr val="005D84"/>
-                </a:solidFill>
-              </a:rPr>
-              <a:t>[book icon]</a:t>
-            </a:r>
-          </a:p>
-          <a:p>
-            <a:pPr algn="l"/>
-            <a:r>
-              <a:rPr lang="en-US" sz="1200" b="0" dirty="0">
-                <a:solidFill>
-                  <a:srgbClr val="010B13"/>
-                </a:solidFill>
-              </a:rPr>
-              <a:t>APA Student Paper Guide</a:t>
-            </a:r>
-          </a:p>
-          <a:p>
-            <a:pPr algn="l"/>
-            <a:r>
-              <a:rPr lang="en-US" sz="1200" b="0" dirty="0">
-                <a:solidFill>
-                  <a:srgbClr val="010B13"/>
-                </a:solidFill>
-              </a:rPr>
-              <a:t>[PDF]</a:t>
-            </a:r>
-          </a:p>
-        </p:txBody>
-      </p:sp>
-      <p:sp>
-        <p:nvSpPr>
-          <p:cNvPr id="1006" name="card-rail" descr=""/>
-          <p:cNvSpPr/>
-          <p:nvPr/>
-        </p:nvSpPr>
-        <p:spPr>
-          <a:xfrm>
-            <a:off x="1097280" y="2633472"/>
-            <a:ext cx="54864" cy="762000"/>
-          </a:xfrm>
-          <a:prstGeom prst="roundRect">
-            <a:avLst>
-              <a:gd name="adj" fmla="val 20000"/>
-            </a:avLst>
-          </a:prstGeom>
-          <a:solidFill>
-            <a:srgbClr val="005D84"/>
-          </a:solidFill>
-          <a:ln>
-            <a:noFill/>
-          </a:ln>
-        </p:spPr>
-        <p:txBody>
-          <a:bodyPr lIns="91440" tIns="68580" rIns="91440" bIns="68580" anchor="t" wrap="square">
-            <a:normAutofit/>
-          </a:bodyPr>
-          <a:lstStyle/>
-          <a:p/>
-        </p:txBody>
-      </p:sp>
-      <p:sp>
-        <p:nvSpPr>
-          <p:cNvPr id="1007" name="card-blue" descr="card: [book icon]. APA Avoiding Plagiarism Guide [PDF]"/>
-          <p:cNvSpPr/>
-          <p:nvPr/>
-        </p:nvSpPr>
-        <p:spPr>
-          <a:xfrm>
-            <a:off x="4459224" y="2633472"/>
-            <a:ext cx="3270504" cy="762000"/>
-          </a:xfrm>
-          <a:prstGeom prst="roundRect">
-            <a:avLst>
-              <a:gd name="adj" fmla="val 6000"/>
-            </a:avLst>
-          </a:prstGeom>
-          <a:solidFill>
-            <a:srgbClr val="FEFDFA"/>
-          </a:solidFill>
-          <a:ln w="19050">
-            <a:solidFill>
-              <a:srgbClr val="CCCCCC"/>
-            </a:solidFill>
-          </a:ln>
-        </p:spPr>
-        <p:txBody>
-          <a:bodyPr lIns="91440" tIns="68580" rIns="91440" bIns="68580" anchor="t" wrap="square">
-            <a:normAutofit/>
-          </a:bodyPr>
-          <a:lstStyle/>
-          <a:p>
-            <a:pPr algn="l"/>
-            <a:r>
-              <a:rPr lang="en-US" sz="1400" b="1" dirty="0">
-                <a:solidFill>
-                  <a:srgbClr val="005D84"/>
-                </a:solidFill>
-              </a:rPr>
-              <a:t>[book icon]</a:t>
-            </a:r>
-          </a:p>
-          <a:p>
-            <a:pPr algn="l"/>
-            <a:r>
-              <a:rPr lang="en-US" sz="1200" b="0" dirty="0">
-                <a:solidFill>
-                  <a:srgbClr val="010B13"/>
-                </a:solidFill>
-              </a:rPr>
-              <a:t>APA Avoiding Plagiarism Guide</a:t>
-            </a:r>
-          </a:p>
-          <a:p>
-            <a:pPr algn="l"/>
-            <a:r>
-              <a:rPr lang="en-US" sz="1200" b="0" dirty="0">
-                <a:solidFill>
-                  <a:srgbClr val="010B13"/>
-                </a:solidFill>
-              </a:rPr>
-              <a:t>[PDF]</a:t>
-            </a:r>
-          </a:p>
-        </p:txBody>
-      </p:sp>
-      <p:sp>
-        <p:nvSpPr>
-          <p:cNvPr id="1008" name="card-rail" descr=""/>
-          <p:cNvSpPr/>
-          <p:nvPr/>
-        </p:nvSpPr>
-        <p:spPr>
-          <a:xfrm>
-            <a:off x="4459224" y="2633472"/>
-            <a:ext cx="54864" cy="762000"/>
-          </a:xfrm>
-          <a:prstGeom prst="roundRect">
-            <a:avLst>
-              <a:gd name="adj" fmla="val 20000"/>
-            </a:avLst>
-          </a:prstGeom>
-          <a:solidFill>
-            <a:srgbClr val="005D84"/>
-          </a:solidFill>
-          <a:ln>
-            <a:noFill/>
-          </a:ln>
-        </p:spPr>
-        <p:txBody>
-          <a:bodyPr lIns="91440" tIns="68580" rIns="91440" bIns="68580" anchor="t" wrap="square">
-            <a:normAutofit/>
-          </a:bodyPr>
-          <a:lstStyle/>
-          <a:p/>
-        </p:txBody>
-      </p:sp>
-      <p:sp>
-        <p:nvSpPr>
-          <p:cNvPr id="1009" name="card-blue" descr="card: [book icon]. APA Student Paper Checklist [PDF]"/>
-          <p:cNvSpPr/>
-          <p:nvPr/>
-        </p:nvSpPr>
-        <p:spPr>
-          <a:xfrm>
-            <a:off x="7821168" y="2633472"/>
-            <a:ext cx="3270504" cy="762000"/>
-          </a:xfrm>
-          <a:prstGeom prst="roundRect">
-            <a:avLst>
-              <a:gd name="adj" fmla="val 6000"/>
-            </a:avLst>
-          </a:prstGeom>
-          <a:solidFill>
-            <a:srgbClr val="FEFDFA"/>
-          </a:solidFill>
-          <a:ln w="19050">
-            <a:solidFill>
-              <a:srgbClr val="CCCCCC"/>
-            </a:solidFill>
-          </a:ln>
-        </p:spPr>
-        <p:txBody>
-          <a:bodyPr lIns="91440" tIns="68580" rIns="91440" bIns="68580" anchor="t" wrap="square">
-            <a:normAutofit/>
-          </a:bodyPr>
-          <a:lstStyle/>
-          <a:p>
-            <a:pPr algn="l"/>
-            <a:r>
-              <a:rPr lang="en-US" sz="1400" b="1" dirty="0">
-                <a:solidFill>
-                  <a:srgbClr val="005D84"/>
-                </a:solidFill>
-              </a:rPr>
-              <a:t>[book icon]</a:t>
-            </a:r>
-          </a:p>
-          <a:p>
-            <a:pPr algn="l"/>
-            <a:r>
-              <a:rPr lang="en-US" sz="1200" b="0" dirty="0">
-                <a:solidFill>
-                  <a:srgbClr val="010B13"/>
-                </a:solidFill>
-              </a:rPr>
-              <a:t>APA Student Paper Checklist</a:t>
-            </a:r>
-          </a:p>
-          <a:p>
-            <a:pPr algn="l"/>
-            <a:r>
-              <a:rPr lang="en-US" sz="1200" b="0" dirty="0">
-                <a:solidFill>
-                  <a:srgbClr val="010B13"/>
-                </a:solidFill>
-              </a:rPr>
-              <a:t>[PDF]</a:t>
-            </a:r>
-          </a:p>
-        </p:txBody>
-      </p:sp>
-      <p:sp>
-        <p:nvSpPr>
-          <p:cNvPr id="1010" name="card-rail" descr=""/>
-          <p:cNvSpPr/>
-          <p:nvPr/>
-        </p:nvSpPr>
-        <p:spPr>
-          <a:xfrm>
-            <a:off x="7821168" y="2633472"/>
-            <a:ext cx="54864" cy="762000"/>
-          </a:xfrm>
-          <a:prstGeom prst="roundRect">
-            <a:avLst>
-              <a:gd name="adj" fmla="val 20000"/>
-            </a:avLst>
-          </a:prstGeom>
-          <a:solidFill>
-            <a:srgbClr val="005D84"/>
-          </a:solidFill>
-          <a:ln>
-            <a:noFill/>
-          </a:ln>
-        </p:spPr>
-        <p:txBody>
-          <a:bodyPr lIns="91440" tIns="68580" rIns="91440" bIns="68580" anchor="t" wrap="square">
-            <a:normAutofit/>
-          </a:bodyPr>
-          <a:lstStyle/>
-          <a:p/>
-        </p:txBody>
-      </p:sp>
+      </p:pic>
     </p:spTree>
   </p:cSld>
 </p:sld>
@@ -5681,489 +8067,70 @@
             </a:pPr>
             <a:r>
               <a:rPr/>
-              <a:t>Weekly Lab Assignment</a:t>
-            </a:r>
-          </a:p>
-        </p:txBody>
-      </p:sp>
-      <p:sp>
-        <p:nvSpPr>
-          <p:cNvPr id="1011" name="card-blue" descr="card: [book icon]. Literature Review Description [Word document]"/>
-          <p:cNvSpPr/>
-          <p:nvPr/>
-        </p:nvSpPr>
-        <p:spPr>
-          <a:xfrm>
-            <a:off x="1097280" y="2633472"/>
-            <a:ext cx="3270504" cy="762000"/>
-          </a:xfrm>
-          <a:prstGeom prst="roundRect">
-            <a:avLst>
-              <a:gd name="adj" fmla="val 6000"/>
-            </a:avLst>
-          </a:prstGeom>
-          <a:solidFill>
-            <a:srgbClr val="FEFDFA"/>
-          </a:solidFill>
-          <a:ln w="19050">
-            <a:solidFill>
-              <a:srgbClr val="CCCCCC"/>
-            </a:solidFill>
-          </a:ln>
-        </p:spPr>
-        <p:txBody>
-          <a:bodyPr lIns="91440" tIns="68580" rIns="91440" bIns="68580" anchor="t" wrap="square">
-            <a:normAutofit/>
-          </a:bodyPr>
-          <a:lstStyle/>
-          <a:p>
-            <a:pPr algn="l"/>
-            <a:r>
-              <a:rPr lang="en-US" sz="1400" b="1" dirty="0">
-                <a:solidFill>
-                  <a:srgbClr val="005D84"/>
-                </a:solidFill>
-              </a:rPr>
-              <a:t>[book icon]</a:t>
-            </a:r>
-          </a:p>
-          <a:p>
-            <a:pPr algn="l"/>
-            <a:r>
-              <a:rPr lang="en-US" sz="1200" b="0" dirty="0">
-                <a:solidFill>
-                  <a:srgbClr val="010B13"/>
-                </a:solidFill>
-              </a:rPr>
-              <a:t>Literature Review Description</a:t>
-            </a:r>
-          </a:p>
-          <a:p>
-            <a:pPr algn="l"/>
-            <a:r>
-              <a:rPr lang="en-US" sz="1200" b="0" dirty="0">
-                <a:solidFill>
-                  <a:srgbClr val="010B13"/>
-                </a:solidFill>
-              </a:rPr>
-              <a:t>[Word document]</a:t>
-            </a:r>
-          </a:p>
-        </p:txBody>
-      </p:sp>
-      <p:sp>
-        <p:nvSpPr>
-          <p:cNvPr id="1012" name="card-rail" descr=""/>
-          <p:cNvSpPr/>
-          <p:nvPr/>
-        </p:nvSpPr>
-        <p:spPr>
-          <a:xfrm>
-            <a:off x="1097280" y="2633472"/>
-            <a:ext cx="54864" cy="762000"/>
-          </a:xfrm>
-          <a:prstGeom prst="roundRect">
-            <a:avLst>
-              <a:gd name="adj" fmla="val 20000"/>
-            </a:avLst>
-          </a:prstGeom>
-          <a:solidFill>
-            <a:srgbClr val="005D84"/>
-          </a:solidFill>
-          <a:ln>
-            <a:noFill/>
-          </a:ln>
-        </p:spPr>
-        <p:txBody>
-          <a:bodyPr lIns="91440" tIns="68580" rIns="91440" bIns="68580" anchor="t" wrap="square">
-            <a:normAutofit/>
-          </a:bodyPr>
-          <a:lstStyle/>
-          <a:p/>
-        </p:txBody>
-      </p:sp>
-      <p:sp>
-        <p:nvSpPr>
-          <p:cNvPr id="1013" name="card-blue" descr="card: [book icon]. Article 1 for literature review &amp; proposal [PDF]"/>
-          <p:cNvSpPr/>
-          <p:nvPr/>
-        </p:nvSpPr>
-        <p:spPr>
-          <a:xfrm>
-            <a:off x="4459224" y="2633472"/>
-            <a:ext cx="3270504" cy="944880"/>
-          </a:xfrm>
-          <a:prstGeom prst="roundRect">
-            <a:avLst>
-              <a:gd name="adj" fmla="val 6000"/>
-            </a:avLst>
-          </a:prstGeom>
-          <a:solidFill>
-            <a:srgbClr val="FEFDFA"/>
-          </a:solidFill>
-          <a:ln w="19050">
-            <a:solidFill>
-              <a:srgbClr val="CCCCCC"/>
-            </a:solidFill>
-          </a:ln>
-        </p:spPr>
-        <p:txBody>
-          <a:bodyPr lIns="91440" tIns="68580" rIns="91440" bIns="68580" anchor="t" wrap="square">
-            <a:normAutofit/>
-          </a:bodyPr>
-          <a:lstStyle/>
-          <a:p>
-            <a:pPr algn="l"/>
-            <a:r>
-              <a:rPr lang="en-US" sz="1400" b="1" dirty="0">
-                <a:solidFill>
-                  <a:srgbClr val="005D84"/>
-                </a:solidFill>
-              </a:rPr>
-              <a:t>[book icon]</a:t>
-            </a:r>
-          </a:p>
-          <a:p>
-            <a:pPr algn="l"/>
-            <a:r>
-              <a:rPr lang="en-US" sz="1200" b="0" dirty="0">
-                <a:solidFill>
-                  <a:srgbClr val="010B13"/>
-                </a:solidFill>
-              </a:rPr>
-              <a:t>Article 1 for literature review &amp; proposal</a:t>
-            </a:r>
-          </a:p>
-          <a:p>
-            <a:pPr algn="l"/>
-            <a:r>
-              <a:rPr lang="en-US" sz="1200" b="0" dirty="0">
-                <a:solidFill>
-                  <a:srgbClr val="010B13"/>
-                </a:solidFill>
-              </a:rPr>
-              <a:t>[PDF]</a:t>
-            </a:r>
-          </a:p>
-        </p:txBody>
-      </p:sp>
-      <p:sp>
-        <p:nvSpPr>
-          <p:cNvPr id="1014" name="card-rail" descr=""/>
-          <p:cNvSpPr/>
-          <p:nvPr/>
-        </p:nvSpPr>
-        <p:spPr>
-          <a:xfrm>
-            <a:off x="4459224" y="2633472"/>
-            <a:ext cx="54864" cy="944880"/>
-          </a:xfrm>
-          <a:prstGeom prst="roundRect">
-            <a:avLst>
-              <a:gd name="adj" fmla="val 20000"/>
-            </a:avLst>
-          </a:prstGeom>
-          <a:solidFill>
-            <a:srgbClr val="005D84"/>
-          </a:solidFill>
-          <a:ln>
-            <a:noFill/>
-          </a:ln>
-        </p:spPr>
-        <p:txBody>
-          <a:bodyPr lIns="91440" tIns="68580" rIns="91440" bIns="68580" anchor="t" wrap="square">
-            <a:normAutofit/>
-          </a:bodyPr>
-          <a:lstStyle/>
-          <a:p/>
-        </p:txBody>
-      </p:sp>
-      <p:sp>
-        <p:nvSpPr>
-          <p:cNvPr id="1015" name="card-blue" descr="card: [book icon]. Article 2 for literature review &amp; proposal [PDF]"/>
-          <p:cNvSpPr/>
-          <p:nvPr/>
-        </p:nvSpPr>
-        <p:spPr>
-          <a:xfrm>
-            <a:off x="7821168" y="2633472"/>
-            <a:ext cx="3270504" cy="944880"/>
-          </a:xfrm>
-          <a:prstGeom prst="roundRect">
-            <a:avLst>
-              <a:gd name="adj" fmla="val 6000"/>
-            </a:avLst>
-          </a:prstGeom>
-          <a:solidFill>
-            <a:srgbClr val="FEFDFA"/>
-          </a:solidFill>
-          <a:ln w="19050">
-            <a:solidFill>
-              <a:srgbClr val="CCCCCC"/>
-            </a:solidFill>
-          </a:ln>
-        </p:spPr>
-        <p:txBody>
-          <a:bodyPr lIns="91440" tIns="68580" rIns="91440" bIns="68580" anchor="t" wrap="square">
-            <a:normAutofit/>
-          </a:bodyPr>
-          <a:lstStyle/>
-          <a:p>
-            <a:pPr algn="l"/>
-            <a:r>
-              <a:rPr lang="en-US" sz="1400" b="1" dirty="0">
-                <a:solidFill>
-                  <a:srgbClr val="005D84"/>
-                </a:solidFill>
-              </a:rPr>
-              <a:t>[book icon]</a:t>
-            </a:r>
-          </a:p>
-          <a:p>
-            <a:pPr algn="l"/>
-            <a:r>
-              <a:rPr lang="en-US" sz="1200" b="0" dirty="0">
-                <a:solidFill>
-                  <a:srgbClr val="010B13"/>
-                </a:solidFill>
-              </a:rPr>
-              <a:t>Article 2 for literature review &amp; proposal</a:t>
-            </a:r>
-          </a:p>
-          <a:p>
-            <a:pPr algn="l"/>
-            <a:r>
-              <a:rPr lang="en-US" sz="1200" b="0" dirty="0">
-                <a:solidFill>
-                  <a:srgbClr val="010B13"/>
-                </a:solidFill>
-              </a:rPr>
-              <a:t>[PDF]</a:t>
-            </a:r>
-          </a:p>
-        </p:txBody>
-      </p:sp>
-      <p:sp>
-        <p:nvSpPr>
-          <p:cNvPr id="1016" name="card-rail" descr=""/>
-          <p:cNvSpPr/>
-          <p:nvPr/>
-        </p:nvSpPr>
-        <p:spPr>
-          <a:xfrm>
-            <a:off x="7821168" y="2633472"/>
-            <a:ext cx="54864" cy="944880"/>
-          </a:xfrm>
-          <a:prstGeom prst="roundRect">
-            <a:avLst>
-              <a:gd name="adj" fmla="val 20000"/>
-            </a:avLst>
-          </a:prstGeom>
-          <a:solidFill>
-            <a:srgbClr val="005D84"/>
-          </a:solidFill>
-          <a:ln>
-            <a:noFill/>
-          </a:ln>
-        </p:spPr>
-        <p:txBody>
-          <a:bodyPr lIns="91440" tIns="68580" rIns="91440" bIns="68580" anchor="t" wrap="square">
-            <a:normAutofit/>
-          </a:bodyPr>
-          <a:lstStyle/>
-          <a:p/>
-        </p:txBody>
-      </p:sp>
-      <p:sp>
-        <p:nvSpPr>
-          <p:cNvPr id="1017" name="card-blue" descr="card: [book icon]. Literature review &amp; proposal worksheet [Word document]"/>
-          <p:cNvSpPr/>
-          <p:nvPr/>
-        </p:nvSpPr>
-        <p:spPr>
-          <a:xfrm>
-            <a:off x="1097280" y="3669792"/>
-            <a:ext cx="3270504" cy="944880"/>
-          </a:xfrm>
-          <a:prstGeom prst="roundRect">
-            <a:avLst>
-              <a:gd name="adj" fmla="val 6000"/>
-            </a:avLst>
-          </a:prstGeom>
-          <a:solidFill>
-            <a:srgbClr val="FEFDFA"/>
-          </a:solidFill>
-          <a:ln w="19050">
-            <a:solidFill>
-              <a:srgbClr val="CCCCCC"/>
-            </a:solidFill>
-          </a:ln>
-        </p:spPr>
-        <p:txBody>
-          <a:bodyPr lIns="91440" tIns="68580" rIns="91440" bIns="68580" anchor="t" wrap="square">
-            <a:normAutofit/>
-          </a:bodyPr>
-          <a:lstStyle/>
-          <a:p>
-            <a:pPr algn="l"/>
-            <a:r>
-              <a:rPr lang="en-US" sz="1400" b="1" dirty="0">
-                <a:solidFill>
-                  <a:srgbClr val="005D84"/>
-                </a:solidFill>
-              </a:rPr>
-              <a:t>[book icon]</a:t>
-            </a:r>
-          </a:p>
-          <a:p>
-            <a:pPr algn="l"/>
-            <a:r>
-              <a:rPr lang="en-US" sz="1200" b="0" dirty="0">
-                <a:solidFill>
-                  <a:srgbClr val="010B13"/>
-                </a:solidFill>
-              </a:rPr>
-              <a:t>Literature review &amp; proposal worksheet</a:t>
-            </a:r>
-          </a:p>
-          <a:p>
-            <a:pPr algn="l"/>
-            <a:r>
-              <a:rPr lang="en-US" sz="1200" b="0" dirty="0">
-                <a:solidFill>
-                  <a:srgbClr val="010B13"/>
-                </a:solidFill>
-              </a:rPr>
-              <a:t>[Word document]</a:t>
-            </a:r>
-          </a:p>
-        </p:txBody>
-      </p:sp>
-      <p:sp>
-        <p:nvSpPr>
-          <p:cNvPr id="1018" name="card-rail" descr=""/>
-          <p:cNvSpPr/>
-          <p:nvPr/>
-        </p:nvSpPr>
-        <p:spPr>
-          <a:xfrm>
-            <a:off x="1097280" y="3669792"/>
-            <a:ext cx="54864" cy="944880"/>
-          </a:xfrm>
-          <a:prstGeom prst="roundRect">
-            <a:avLst>
-              <a:gd name="adj" fmla="val 20000"/>
-            </a:avLst>
-          </a:prstGeom>
-          <a:solidFill>
-            <a:srgbClr val="005D84"/>
-          </a:solidFill>
-          <a:ln>
-            <a:noFill/>
-          </a:ln>
-        </p:spPr>
-        <p:txBody>
-          <a:bodyPr lIns="91440" tIns="68580" rIns="91440" bIns="68580" anchor="t" wrap="square">
-            <a:normAutofit/>
-          </a:bodyPr>
-          <a:lstStyle/>
-          <a:p/>
-        </p:txBody>
-      </p:sp>
-      <p:sp>
-        <p:nvSpPr>
-          <p:cNvPr id="1019" name="card-blue" descr="card: [book icon]. Literature review &amp; proposal HINTS sheet [Word document]"/>
-          <p:cNvSpPr/>
-          <p:nvPr/>
-        </p:nvSpPr>
-        <p:spPr>
-          <a:xfrm>
-            <a:off x="4459224" y="3669792"/>
-            <a:ext cx="3270504" cy="944880"/>
-          </a:xfrm>
-          <a:prstGeom prst="roundRect">
-            <a:avLst>
-              <a:gd name="adj" fmla="val 6000"/>
-            </a:avLst>
-          </a:prstGeom>
-          <a:solidFill>
-            <a:srgbClr val="FEFDFA"/>
-          </a:solidFill>
-          <a:ln w="19050">
-            <a:solidFill>
-              <a:srgbClr val="CCCCCC"/>
-            </a:solidFill>
-          </a:ln>
-        </p:spPr>
-        <p:txBody>
-          <a:bodyPr lIns="91440" tIns="68580" rIns="91440" bIns="68580" anchor="t" wrap="square">
-            <a:normAutofit/>
-          </a:bodyPr>
-          <a:lstStyle/>
-          <a:p>
-            <a:pPr algn="l"/>
-            <a:r>
-              <a:rPr lang="en-US" sz="1400" b="1" dirty="0">
-                <a:solidFill>
-                  <a:srgbClr val="005D84"/>
-                </a:solidFill>
-              </a:rPr>
-              <a:t>[book icon]</a:t>
-            </a:r>
-          </a:p>
-          <a:p>
-            <a:pPr algn="l"/>
-            <a:r>
-              <a:rPr lang="en-US" sz="1200" b="0" dirty="0">
-                <a:solidFill>
-                  <a:srgbClr val="010B13"/>
-                </a:solidFill>
-              </a:rPr>
-              <a:t>Literature review &amp; proposal HINTS sheet</a:t>
-            </a:r>
-          </a:p>
-          <a:p>
-            <a:pPr algn="l"/>
-            <a:r>
-              <a:rPr lang="en-US" sz="1200" b="0" dirty="0">
-                <a:solidFill>
-                  <a:srgbClr val="010B13"/>
-                </a:solidFill>
-              </a:rPr>
-              <a:t>[Word document]</a:t>
-            </a:r>
-          </a:p>
-        </p:txBody>
-      </p:sp>
-      <p:sp>
-        <p:nvSpPr>
-          <p:cNvPr id="1020" name="card-rail" descr=""/>
-          <p:cNvSpPr/>
-          <p:nvPr/>
-        </p:nvSpPr>
-        <p:spPr>
-          <a:xfrm>
-            <a:off x="4459224" y="3669792"/>
-            <a:ext cx="54864" cy="944880"/>
-          </a:xfrm>
-          <a:prstGeom prst="roundRect">
-            <a:avLst>
-              <a:gd name="adj" fmla="val 20000"/>
-            </a:avLst>
-          </a:prstGeom>
-          <a:solidFill>
-            <a:srgbClr val="005D84"/>
-          </a:solidFill>
-          <a:ln>
-            <a:noFill/>
-          </a:ln>
-        </p:spPr>
-        <p:txBody>
-          <a:bodyPr lIns="91440" tIns="68580" rIns="91440" bIns="68580" anchor="t" wrap="square">
-            <a:normAutofit/>
-          </a:bodyPr>
-          <a:lstStyle/>
-          <a:p/>
+              <a:t>4 Ask five questions as you read</a:t>
+            </a:r>
+          </a:p>
+        </p:txBody>
+      </p:sp>
+      <p:sp>
+        <p:nvSpPr>
+          <p:cNvPr id="3" name="Content Placeholder 2"/>
+          <p:cNvSpPr>
+            <a:spLocks noGrp="1"/>
+          </p:cNvSpPr>
+          <p:nvPr>
+            <p:ph idx="1"/>
+          </p:nvPr>
+        </p:nvSpPr>
+        <p:spPr/>
+        <p:txBody>
+          <a:bodyPr/>
+          <a:lstStyle/>
+          <a:p>
+            <a:pPr lvl="0" indent="-457200" marL="457200">
+              <a:buAutoNum type="arabicPeriod"/>
+            </a:pPr>
+            <a:r>
+              <a:rPr/>
+              <a:t>Why was the study needed?</a:t>
+            </a:r>
+          </a:p>
+          <a:p>
+            <a:pPr lvl="0" indent="-457200" marL="457200">
+              <a:buAutoNum type="arabicPeriod"/>
+            </a:pPr>
+            <a:r>
+              <a:rPr/>
+              <a:t>What did the researchers predict?</a:t>
+            </a:r>
+          </a:p>
+          <a:p>
+            <a:pPr lvl="0" indent="-457200" marL="457200">
+              <a:buAutoNum type="arabicPeriod"/>
+            </a:pPr>
+            <a:r>
+              <a:rPr/>
+              <a:t>How did they test it?</a:t>
+            </a:r>
+          </a:p>
+          <a:p>
+            <a:pPr lvl="0" indent="-457200" marL="457200">
+              <a:buAutoNum type="arabicPeriod"/>
+            </a:pPr>
+            <a:r>
+              <a:rPr/>
+              <a:t>What did they find?</a:t>
+            </a:r>
+          </a:p>
+          <a:p>
+            <a:pPr lvl="0" indent="-457200" marL="457200">
+              <a:buAutoNum type="arabicPeriod"/>
+            </a:pPr>
+            <a:r>
+              <a:rPr/>
+              <a:t>What does the finding mean?</a:t>
+            </a:r>
+          </a:p>
         </p:txBody>
       </p:sp>
     </p:spTree>
@@ -6213,19 +8180,49 @@
             </a:pPr>
             <a:r>
               <a:rPr/>
-              <a:t>Writing Skills Matter</a:t>
-            </a:r>
-          </a:p>
-        </p:txBody>
-      </p:sp>
-      <p:sp>
-        <p:nvSpPr>
-          <p:cNvPr id="3" name="Content Placeholder 2"/>
-          <p:cNvSpPr>
-            <a:spLocks noGrp="1"/>
-          </p:cNvSpPr>
-          <p:nvPr>
-            <p:ph idx="1"/>
+              <a:t>5 Read Lynn and Mynier first</a:t>
+            </a:r>
+          </a:p>
+        </p:txBody>
+      </p:sp>
+      <p:pic>
+        <p:nvPicPr>
+          <p:cNvPr descr="First page of Lynn and Mynier's article Effect of Server Posture on Restaurant Tipping, showing its title, abstract, and opening paragraphs" id="0" name="Picture 1"/>
+          <p:cNvPicPr>
+            <a:picLocks noGrp="1" noChangeAspect="1"/>
+          </p:cNvPicPr>
+          <p:nvPr/>
+        </p:nvPicPr>
+        <p:blipFill>
+          <a:blip r:embed="rId3"/>
+          <a:stretch>
+            <a:fillRect/>
+          </a:stretch>
+        </p:blipFill>
+        <p:spPr bwMode="auto">
+          <a:xfrm>
+            <a:off x="2349500" y="2628900"/>
+            <a:ext cx="2400300" cy="3098800"/>
+          </a:xfrm>
+          <a:prstGeom prst="rect">
+            <a:avLst/>
+          </a:prstGeom>
+          <a:noFill/>
+          <a:ln w="9525">
+            <a:noFill/>
+            <a:headEnd/>
+            <a:tailEnd/>
+          </a:ln>
+        </p:spPr>
+      </p:pic>
+      <p:sp>
+        <p:nvSpPr>
+          <p:cNvPr id="4" name="Content Placeholder 3"/>
+          <p:cNvSpPr>
+            <a:spLocks noGrp="1"/>
+          </p:cNvSpPr>
+          <p:nvPr>
+            <p:ph idx="2" sz="half"/>
           </p:nvPr>
         </p:nvSpPr>
         <p:spPr/>
@@ -6235,57 +8232,43 @@
           <a:p>
             <a:pPr lvl="0"/>
             <a:r>
-              <a:rPr/>
-              <a:t>College performance impacted by the quality of your writing.</a:t>
+              <a:rPr b="1"/>
+              <a:t>Two studies</a:t>
+            </a:r>
+            <a:r>
+              <a:rPr/>
+              <a:t> in restaurants</a:t>
             </a:r>
           </a:p>
           <a:p>
             <a:pPr lvl="0"/>
             <a:r>
-              <a:rPr/>
-              <a:t>But you can improve your writing by properly organizing and structuring your ideas.</a:t>
+              <a:rPr b="1"/>
+              <a:t>Comparison:</a:t>
+            </a:r>
+            <a:r>
+              <a:rPr/>
+              <a:t> standing or squatting</a:t>
             </a:r>
           </a:p>
           <a:p>
             <a:pPr lvl="0"/>
             <a:r>
-              <a:rPr/>
-              <a:t>There are a few myths about writing that should be dispelled before we begin:</a:t>
-            </a:r>
-          </a:p>
-          <a:p>
-            <a:pPr lvl="1"/>
-            <a:r>
-              <a:rPr/>
-              <a:t>Great writers are born, not made by practicing.</a:t>
-            </a:r>
-          </a:p>
-          <a:p>
-            <a:pPr lvl="1"/>
-            <a:r>
-              <a:rPr/>
-              <a:t>I need an IQ in the 130’s in order to write well.</a:t>
-            </a:r>
-          </a:p>
-          <a:p>
-            <a:pPr lvl="1"/>
-            <a:r>
-              <a:rPr/>
-              <a:t>I need to have the vocabulary of a rocket scientist in order to write good papers.</a:t>
-            </a:r>
-          </a:p>
-          <a:p>
-            <a:pPr lvl="1"/>
-            <a:r>
-              <a:rPr/>
-              <a:t>My papers need to be over 30 pages in length in order to be acceptable.</a:t>
-            </a:r>
-          </a:p>
-          <a:p>
-            <a:pPr lvl="1"/>
-            <a:r>
-              <a:rPr/>
-              <a:t>I will never be good at writing papers.</a:t>
+              <a:rPr b="1"/>
+              <a:t>Outcome:</a:t>
+            </a:r>
+            <a:r>
+              <a:rPr/>
+              <a:t> customer tips</a:t>
+            </a:r>
+          </a:p>
+          <a:p>
+            <a:pPr lvl="0" indent="0" marL="0">
+              <a:buNone/>
+            </a:pPr>
+            <a:r>
+              <a:rPr/>
+              <a:t>Course article: Lynn and Mynier (1993)</a:t>
             </a:r>
           </a:p>
         </p:txBody>
@@ -6337,7 +8320,7 @@
             </a:pPr>
             <a:r>
               <a:rPr/>
-              <a:t>Organization</a:t>
+              <a:t>6 Study 1 assigns posture</a:t>
             </a:r>
           </a:p>
         </p:txBody>
@@ -6357,51 +8340,47 @@
           <a:bodyPr/>
           <a:lstStyle/>
           <a:p>
-            <a:pPr lvl="0"/>
-            <a:r>
-              <a:rPr/>
-              <a:t>The most important (and often the most easily improved) aspects of writing are clarity and organization.</a:t>
-            </a:r>
-          </a:p>
-          <a:p>
-            <a:pPr lvl="0"/>
-            <a:r>
-              <a:rPr/>
-              <a:t>The basic element of clarity and organization is a good paragraph.</a:t>
-            </a:r>
-          </a:p>
-          <a:p>
-            <a:pPr lvl="0"/>
-            <a:r>
-              <a:rPr/>
-              <a:t>A good paragraph has 3 parts:</a:t>
-            </a:r>
-          </a:p>
-          <a:p>
-            <a:pPr lvl="1" indent="-457200" marL="914400">
+            <a:pPr lvl="0" indent="-457200" marL="457200">
               <a:buAutoNum type="arabicPeriod"/>
             </a:pPr>
             <a:r>
               <a:rPr/>
-              <a:t>A TOPIC SENTENCE (to introduce the paragraph)</a:t>
-            </a:r>
-          </a:p>
-          <a:p>
-            <a:pPr lvl="1" indent="-457200" marL="914400">
+              <a:t>A waiter served </a:t>
+            </a:r>
+            <a:r>
+              <a:rPr b="1"/>
+              <a:t>270 tables</a:t>
+            </a:r>
+            <a:r>
+              <a:rPr/>
+              <a:t>.</a:t>
+            </a:r>
+          </a:p>
+          <a:p>
+            <a:pPr lvl="0" indent="-457200" marL="457200">
               <a:buAutoNum type="arabicPeriod"/>
             </a:pPr>
             <a:r>
               <a:rPr/>
-              <a:t>3-10 CONTENT SENTENCES</a:t>
-            </a:r>
-          </a:p>
-          <a:p>
-            <a:pPr lvl="1" indent="-457200" marL="914400">
+              <a:t>A coin toss assigned standing or squatting.</a:t>
+            </a:r>
+          </a:p>
+          <a:p>
+            <a:pPr lvl="0" indent="-457200" marL="457200">
               <a:buAutoNum type="arabicPeriod"/>
             </a:pPr>
             <a:r>
               <a:rPr/>
-              <a:t>A TRANSITION SENTENCE (to introduce the next paragraph)</a:t>
+              <a:t>The posture occurred during the first visit.</a:t>
+            </a:r>
+          </a:p>
+          <a:p>
+            <a:pPr lvl="0" indent="-457200" marL="457200">
+              <a:buAutoNum type="arabicPeriod"/>
+            </a:pPr>
+            <a:r>
+              <a:rPr/>
+              <a:t>The waiter recorded the bill and tip.</a:t>
             </a:r>
           </a:p>
         </p:txBody>
@@ -6453,7 +8432,7 @@
             </a:pPr>
             <a:r>
               <a:rPr/>
-              <a:t>Topic Sentences</a:t>
+              <a:t>7 Record the result and limitation</a:t>
             </a:r>
           </a:p>
         </p:txBody>
@@ -6475,36 +8454,50 @@
           <a:p>
             <a:pPr lvl="0"/>
             <a:r>
-              <a:rPr/>
-              <a:t>The paragraph starts with what is called a “TOPIC SENTENCE”.</a:t>
+              <a:rPr b="1"/>
+              <a:t>Result:</a:t>
+            </a:r>
+            <a:r>
+              <a:rPr/>
+              <a:t> Average tips were </a:t>
+            </a:r>
+            <a:r>
+              <a:rPr b="1"/>
+              <a:t>$5.18 standing</a:t>
+            </a:r>
+            <a:r>
+              <a:rPr/>
+              <a:t> and </a:t>
+            </a:r>
+            <a:r>
+              <a:rPr b="1"/>
+              <a:t>$6.40 squatting</a:t>
+            </a:r>
+            <a:r>
+              <a:rPr/>
+              <a:t>.</a:t>
             </a:r>
           </a:p>
           <a:p>
             <a:pPr lvl="0"/>
             <a:r>
-              <a:rPr/>
-              <a:t>Introduces topic of paragraph the idea you will be discussing in that paragraph.</a:t>
+              <a:rPr b="1"/>
+              <a:t>Interpretation:</a:t>
+            </a:r>
+            <a:r>
+              <a:rPr/>
+              <a:t> Random assignment supports a causal conclusion.</a:t>
             </a:r>
           </a:p>
           <a:p>
             <a:pPr lvl="0"/>
             <a:r>
-              <a:rPr/>
-              <a:t>ALL SENTENCES IN THE PARAGRAPH AFTER THE TOPIC SENTENCE MUST PERTAIN TO AND SUPPORT THE TOPIC SENTENCE!</a:t>
-            </a:r>
-          </a:p>
-          <a:p>
-            <a:pPr lvl="1"/>
-            <a:r>
-              <a:rPr/>
-              <a:t>If there are sentences that do not pertain to the topic sentence, they are out of place (they probably belong in a different paragraph) and will only confuse the reader.</a:t>
-            </a:r>
-          </a:p>
-          <a:p>
-            <a:pPr lvl="1"/>
-            <a:r>
-              <a:rPr/>
-              <a:t>There may be three to ten content sentences that support the topic sentence.</a:t>
+              <a:rPr b="1"/>
+              <a:t>Limitation:</a:t>
+            </a:r>
+            <a:r>
+              <a:rPr/>
+              <a:t> One waiter collected the data and expected squatting to help.</a:t>
             </a:r>
           </a:p>
         </p:txBody>
@@ -6556,200 +8549,68 @@
             </a:pPr>
             <a:r>
               <a:rPr/>
-              <a:t>Transitions</a:t>
-            </a:r>
-          </a:p>
-        </p:txBody>
-      </p:sp>
-      <p:sp>
-        <p:nvSpPr>
-          <p:cNvPr id="1021" name="prose" descr=""/>
-          <p:cNvSpPr/>
-          <p:nvPr/>
-        </p:nvSpPr>
-        <p:spPr>
-          <a:xfrm>
-            <a:off x="1097280" y="2633472"/>
-            <a:ext cx="9994392" cy="365760"/>
-          </a:xfrm>
-          <a:prstGeom prst="roundRect">
-            <a:avLst>
-              <a:gd name="adj" fmla="val 6000"/>
-            </a:avLst>
-          </a:prstGeom>
-          <a:noFill/>
-          <a:ln>
-            <a:noFill/>
-          </a:ln>
-        </p:spPr>
-        <p:txBody>
-          <a:bodyPr lIns="91440" tIns="68580" rIns="91440" bIns="68580" anchor="t" wrap="square">
-            <a:normAutofit/>
-          </a:bodyPr>
-          <a:lstStyle/>
-          <a:p>
-            <a:pPr algn="l"/>
-            <a:r>
-              <a:rPr lang="en-US" sz="1200" b="0" dirty="0">
-                <a:solidFill>
-                  <a:srgbClr val="010B13"/>
-                </a:solidFill>
-              </a:rPr>
-              <a:t>After you have fully explained the topic sentence, you need a sentence to lead the reader into the next paragraph.</a:t>
-            </a:r>
-          </a:p>
-        </p:txBody>
-      </p:sp>
-      <p:sp>
-        <p:nvSpPr>
-          <p:cNvPr id="1022" name="prose" descr=""/>
-          <p:cNvSpPr/>
-          <p:nvPr/>
-        </p:nvSpPr>
-        <p:spPr>
-          <a:xfrm>
-            <a:off x="1097280" y="3090672"/>
-            <a:ext cx="9994392" cy="548640"/>
-          </a:xfrm>
-          <a:prstGeom prst="roundRect">
-            <a:avLst>
-              <a:gd name="adj" fmla="val 6000"/>
-            </a:avLst>
-          </a:prstGeom>
-          <a:noFill/>
-          <a:ln>
-            <a:noFill/>
-          </a:ln>
-        </p:spPr>
-        <p:txBody>
-          <a:bodyPr lIns="91440" tIns="68580" rIns="91440" bIns="68580" anchor="t" wrap="square">
-            <a:normAutofit/>
-          </a:bodyPr>
-          <a:lstStyle/>
-          <a:p>
-            <a:pPr algn="l"/>
-            <a:r>
-              <a:rPr lang="en-US" sz="1200" b="0" dirty="0">
-                <a:solidFill>
-                  <a:srgbClr val="010B13"/>
-                </a:solidFill>
-              </a:rPr>
-              <a:t>This type of sentence is called a TRANSITION SENTENCE.Learning to write good transitions takes practice.The transition often relates the idea from the current paragraph with what will be talked about next.The transition is ALWAYS the last sentence of a paragraph.</a:t>
-            </a:r>
-          </a:p>
-        </p:txBody>
-      </p:sp>
-      <p:sp>
-        <p:nvSpPr>
-          <p:cNvPr id="1023" name="callout-tip" descr="tip callout: Tip. It is much like a “clue” about what you will talk about next."/>
-          <p:cNvSpPr/>
-          <p:nvPr/>
-        </p:nvSpPr>
-        <p:spPr>
-          <a:xfrm>
-            <a:off x="1097280" y="3730752"/>
-            <a:ext cx="9994392" cy="899160"/>
-          </a:xfrm>
-          <a:prstGeom prst="roundRect">
-            <a:avLst>
-              <a:gd name="adj" fmla="val 6000"/>
-            </a:avLst>
-          </a:prstGeom>
-          <a:solidFill>
-            <a:srgbClr val="FEFDFA"/>
-          </a:solidFill>
-          <a:ln w="19050">
-            <a:solidFill>
-              <a:srgbClr val="009955"/>
-            </a:solidFill>
-          </a:ln>
-        </p:spPr>
-        <p:txBody>
-          <a:bodyPr lIns="91440" tIns="68580" rIns="91440" bIns="68580" anchor="t" wrap="square">
-            <a:normAutofit/>
-          </a:bodyPr>
-          <a:lstStyle/>
-          <a:p/>
-        </p:txBody>
-      </p:sp>
-      <p:sp>
-        <p:nvSpPr>
-          <p:cNvPr id="1024" name="callout-title" descr=""/>
-          <p:cNvSpPr/>
-          <p:nvPr/>
-        </p:nvSpPr>
-        <p:spPr>
-          <a:xfrm>
-            <a:off x="1097280" y="3730752"/>
-            <a:ext cx="9994392" cy="320040"/>
-          </a:xfrm>
-          <a:prstGeom prst="roundRect">
-            <a:avLst>
-              <a:gd name="adj" fmla="val 6000"/>
-            </a:avLst>
-          </a:prstGeom>
-          <a:solidFill>
-            <a:srgbClr val="009955"/>
-          </a:solidFill>
-          <a:ln>
-            <a:noFill/>
-          </a:ln>
-        </p:spPr>
-        <p:txBody>
-          <a:bodyPr lIns="91440" tIns="68580" rIns="91440" bIns="68580" anchor="t" wrap="square">
-            <a:normAutofit/>
-          </a:bodyPr>
-          <a:lstStyle/>
-          <a:p>
-            <a:pPr algn="l"/>
-            <a:r>
-              <a:rPr lang="en-US" sz="1400" b="1" dirty="0">
-                <a:solidFill>
-                  <a:srgbClr val="FEFDFA"/>
-                </a:solidFill>
-              </a:rPr>
-              <a:t>Tip</a:t>
-            </a:r>
-          </a:p>
-        </p:txBody>
-      </p:sp>
-      <p:sp>
-        <p:nvSpPr>
-          <p:cNvPr id="1025" name="callout-body" descr=""/>
-          <p:cNvSpPr/>
-          <p:nvPr/>
-        </p:nvSpPr>
-        <p:spPr>
-          <a:xfrm>
-            <a:off x="1097280" y="4050792"/>
-            <a:ext cx="9994392" cy="579120"/>
-          </a:xfrm>
-          <a:prstGeom prst="roundRect">
-            <a:avLst>
-              <a:gd name="adj" fmla="val 6000"/>
-            </a:avLst>
-          </a:prstGeom>
-          <a:solidFill>
-            <a:srgbClr val="FEFDFA"/>
-          </a:solidFill>
-          <a:ln>
-            <a:noFill/>
-          </a:ln>
-        </p:spPr>
-        <p:txBody>
-          <a:bodyPr lIns="91440" tIns="68580" rIns="91440" bIns="68580" anchor="t" wrap="square">
-            <a:normAutofit/>
-          </a:bodyPr>
-          <a:lstStyle/>
-          <a:p>
-            <a:pPr algn="l"/>
-            <a:r>
-              <a:rPr lang="en-US" sz="1200" b="0" dirty="0">
-                <a:solidFill>
-                  <a:srgbClr val="010B13"/>
-                </a:solidFill>
-              </a:rPr>
-              <a:t>It is much like a “clue” about what you will talk about next.</a:t>
+              <a:t>8 Study 2 tests replication</a:t>
+            </a:r>
+          </a:p>
+        </p:txBody>
+      </p:sp>
+      <p:sp>
+        <p:nvSpPr>
+          <p:cNvPr id="3" name="Content Placeholder 2"/>
+          <p:cNvSpPr>
+            <a:spLocks noGrp="1"/>
+          </p:cNvSpPr>
+          <p:nvPr>
+            <p:ph idx="1"/>
+          </p:nvPr>
+        </p:nvSpPr>
+        <p:spPr/>
+        <p:txBody>
+          <a:bodyPr/>
+          <a:lstStyle/>
+          <a:p>
+            <a:pPr lvl="0"/>
+            <a:r>
+              <a:rPr b="1"/>
+              <a:t>New context:</a:t>
+            </a:r>
+            <a:r>
+              <a:rPr/>
+              <a:t> 148 tables, a different server, and a different restaurant</a:t>
+            </a:r>
+          </a:p>
+          <a:p>
+            <a:pPr lvl="0"/>
+            <a:r>
+              <a:rPr b="1"/>
+              <a:t>Same design:</a:t>
+            </a:r>
+            <a:r>
+              <a:rPr/>
+              <a:t> Coin-toss assignment to standing or squatting</a:t>
+            </a:r>
+          </a:p>
+          <a:p>
+            <a:pPr lvl="0"/>
+            <a:r>
+              <a:rPr b="1"/>
+              <a:t>Same direction:</a:t>
+            </a:r>
+            <a:r>
+              <a:rPr/>
+              <a:t> </a:t>
+            </a:r>
+            <a:r>
+              <a:rPr b="1"/>
+              <a:t>$2.56 standing</a:t>
+            </a:r>
+            <a:r>
+              <a:rPr/>
+              <a:t> and </a:t>
+            </a:r>
+            <a:r>
+              <a:rPr b="1"/>
+              <a:t>$3.28 squatting</a:t>
             </a:r>
           </a:p>
         </p:txBody>
@@ -6776,7 +8637,7 @@
         <a:srgbClr val="E8E3CE"/>
       </a:lt2>
       <a:accent1>
-        <a:srgbClr val="F6A21D"/>
+        <a:srgbClr val="B65B00"/>
       </a:accent1>
       <a:accent2>
         <a:srgbClr val="5E5E5E"/>

--- a/labs/lab04/slides/slides.pptx
+++ b/labs/lab04/slides/slides.pptx
@@ -536,7 +536,7 @@
             </a:pPr>
             <a:r>
               <a:rPr/>
-              <a:t>Ask students to open all three sets of files before beginning. Emphasize that the worksheet is the working document; the paper comes later.</a:t>
+              <a:t>Open the worksheet, description, and hints. The hints sheet is a reference, not a submission. The two assigned articles are linked on the reading slides.</a:t>
             </a:r>
           </a:p>
         </p:txBody>
@@ -618,7 +618,7 @@
             </a:pPr>
             <a:r>
               <a:rPr/>
-              <a:t>Ask students what changed before discussing the results: this article studies a different outcome and uses an observational rather than experimental design.</a:t>
+              <a:t>Ask students to identify how the research question and outcomes differ from Lynn and Mynier’s. Keep the patrons and tables separate from the servers whose behavior was observed.</a:t>
             </a:r>
           </a:p>
         </p:txBody>
@@ -700,7 +700,7 @@
             </a:pPr>
             <a:r>
               <a:rPr/>
-              <a:t>The servers followed their usual behavior. Because each server brought their own personality and service style to the posture category, posture was confounded with server characteristics.</a:t>
+              <a:t>Ask students to use the Method to distinguish observation from assigned posture. Have them identify a possible confound and explain how it could affect the outcomes.</a:t>
             </a:r>
           </a:p>
         </p:txBody>
@@ -782,7 +782,7 @@
             </a:pPr>
             <a:r>
               <a:rPr/>
-              <a:t>After removing one extreme score from each condition, add-on sales averaged $5.60 for squatting and $2.80 for standing. Initial visits averaged 64 versus 34 seconds. Keep the distinction between the pattern and the causal claim explicit.</a:t>
+              <a:t>Keep the sales comparison, visit duration, and correlations separate. Students need the results before and after the outlier exclusion, then the assignment details to judge the claim. Have them explain each finding in words.</a:t>
             </a:r>
           </a:p>
         </p:txBody>
@@ -864,7 +864,7 @@
             </a:pPr>
             <a:r>
               <a:rPr/>
-              <a:t>Use the design comparison to structure the synthesis. Students should not treat the two articles as equally strong causal evidence.</a:t>
+              <a:t>Have students justify the claims before writing the cross-article integration. They should explain how the design affects what they can conclude.</a:t>
             </a:r>
           </a:p>
         </p:txBody>
@@ -886,7 +886,7 @@
           <a:p>
             <a:fld id="{18BDFEC3-8487-43E8-A154-7C12CBC1FFF2}" type="slidenum">
               <a:rPr lang="en-US"/>
-              <a:t>14</a:t>
+              <a:t>15</a:t>
             </a:fld>
             <a:endParaRPr lang="en-US"/>
           </a:p>
@@ -946,7 +946,7 @@
             </a:pPr>
             <a:r>
               <a:rPr/>
-              <a:t>The paragraph should move between articles rather than summarize one and then the other. Encourage students to mention the design difference because it changes confidence in the conclusions.</a:t>
+              <a:t>Use the completed comparison to build a paragraph that moves between articles. Students should explain the relationships among findings, rather than repeat the two summaries.</a:t>
             </a:r>
           </a:p>
         </p:txBody>
@@ -968,7 +968,7 @@
           <a:p>
             <a:fld id="{18BDFEC3-8487-43E8-A154-7C12CBC1FFF2}" type="slidenum">
               <a:rPr lang="en-US"/>
-              <a:t>15</a:t>
+              <a:t>16</a:t>
             </a:fld>
             <a:endParaRPr lang="en-US"/>
           </a:p>
@@ -1028,7 +1028,7 @@
             </a:pPr>
             <a:r>
               <a:rPr/>
-              <a:t>This mechanism question is an example, not a required proposal topic. Students may pursue another justified question as long as the reviewed evidence leads clearly to it.</a:t>
+              <a:t>The question is an example, not an assigned topic. The rubric gives less credit for changing only the population or setting and more for an idea that adds to what the studies tell us. Ask students what their proposed study would establish that the reviewed studies did not.</a:t>
             </a:r>
           </a:p>
         </p:txBody>
@@ -1050,7 +1050,7 @@
           <a:p>
             <a:fld id="{18BDFEC3-8487-43E8-A154-7C12CBC1FFF2}" type="slidenum">
               <a:rPr lang="en-US"/>
-              <a:t>16</a:t>
+              <a:t>17</a:t>
             </a:fld>
             <a:endParaRPr lang="en-US"/>
           </a:p>
@@ -1110,7 +1110,7 @@
             </a:pPr>
             <a:r>
               <a:rPr/>
-              <a:t>Have students read their sentence aloud. A reader should be able to identify exactly who is studied, what changes, what is measured, and what direction is expected.</a:t>
+              <a:t>Have students state a formal hypothesis using their own study’s variables and expected direction. They should be able to explain how it follows from the review. Use causal wording only when the proposed design supports it.</a:t>
             </a:r>
           </a:p>
         </p:txBody>
@@ -1132,7 +1132,7 @@
           <a:p>
             <a:fld id="{18BDFEC3-8487-43E8-A154-7C12CBC1FFF2}" type="slidenum">
               <a:rPr lang="en-US"/>
-              <a:t>17</a:t>
+              <a:t>18</a:t>
             </a:fld>
             <a:endParaRPr lang="en-US"/>
           </a:p>
@@ -1192,7 +1192,7 @@
             </a:pPr>
             <a:r>
               <a:rPr/>
-              <a:t>The method must be detailed enough for replication, but the first draft can begin with these five decisions. Ask students to check that each choice directly tests the hypothesis.</a:t>
+              <a:t>Follow the proposal boxes for sample, materials, and procedures. Explain the sequence clearly enough that someone else could carry out the study. Include anyone needed to conduct it and what they would do.</a:t>
             </a:r>
           </a:p>
         </p:txBody>
@@ -1214,7 +1214,7 @@
           <a:p>
             <a:fld id="{18BDFEC3-8487-43E8-A154-7C12CBC1FFF2}" type="slidenum">
               <a:rPr lang="en-US"/>
-              <a:t>18</a:t>
+              <a:t>19</a:t>
             </a:fld>
             <a:endParaRPr lang="en-US"/>
           </a:p>
@@ -1274,7 +1274,7 @@
             </a:pPr>
             <a:r>
               <a:rPr/>
-              <a:t>For internal validity, ask what else could differ between conditions. For external validity, ask exactly which people, places, tasks, and times the sample can represent.</a:t>
+              <a:t>Ask students to identify a possible confound and how they would address it. Then check that their conclusions stay within the people and situations their study represents.</a:t>
             </a:r>
           </a:p>
         </p:txBody>
@@ -1296,7 +1296,7 @@
           <a:p>
             <a:fld id="{18BDFEC3-8487-43E8-A154-7C12CBC1FFF2}" type="slidenum">
               <a:rPr lang="en-US"/>
-              <a:t>19</a:t>
+              <a:t>20</a:t>
             </a:fld>
             <a:endParaRPr lang="en-US"/>
           </a:p>
@@ -1356,7 +1356,7 @@
             </a:pPr>
             <a:r>
               <a:rPr/>
-              <a:t>Students should compose these completed worksheet sections into a paper rather than drafting the paper from a blank page. Preserve the worksheet’s order.</a:t>
+              <a:t>Read a completed worksheet section without its prompt. It should make sense on its own and connect to the surrounding sections. Move or revise sentences that do not support the paragraph’s point.</a:t>
             </a:r>
           </a:p>
         </p:txBody>
@@ -1378,7 +1378,7 @@
           <a:p>
             <a:fld id="{18BDFEC3-8487-43E8-A154-7C12CBC1FFF2}" type="slidenum">
               <a:rPr lang="en-US"/>
-              <a:t>20</a:t>
+              <a:t>21</a:t>
             </a:fld>
             <a:endParaRPr lang="en-US"/>
           </a:p>
@@ -1438,7 +1438,7 @@
             </a:pPr>
             <a:r>
               <a:rPr/>
-              <a:t>Show students where the article summaries, synthesis, and proposal appear in the worksheet. The gray rows contain grading information and should not be completed.</a:t>
+              <a:t>Identify the article summaries, the two integration sections, and the proposal. The Word worksheet’s gray rows contain grading information. Students write in the response spaces, then compose the paper below.</a:t>
             </a:r>
           </a:p>
         </p:txBody>
@@ -1520,7 +1520,7 @@
             </a:pPr>
             <a:r>
               <a:rPr/>
-              <a:t>Ask students to move or revise any sentence that does not support the topic sentence. This keeps article details from becoming an unstructured list.</a:t>
+              <a:t>This example combines related facts into one sentence. Integration also explains how evidence from different studies fits together.</a:t>
             </a:r>
           </a:p>
         </p:txBody>
@@ -1542,7 +1542,7 @@
           <a:p>
             <a:fld id="{18BDFEC3-8487-43E8-A154-7C12CBC1FFF2}" type="slidenum">
               <a:rPr lang="en-US"/>
-              <a:t>21</a:t>
+              <a:t>22</a:t>
             </a:fld>
             <a:endParaRPr lang="en-US"/>
           </a:p>
@@ -1602,7 +1602,7 @@
             </a:pPr>
             <a:r>
               <a:rPr/>
-              <a:t>Use this example to distinguish synthesis from sentence combining. Both skills reduce repetition, but synthesis also explains how pieces of evidence relate.</a:t>
+              <a:t>Repeat the paper title at the top of the first body page. Check citations and both reference entries rather than assuming the reference manager has formatted them correctly. Use the linked APA guidance and assignment materials.</a:t>
             </a:r>
           </a:p>
         </p:txBody>
@@ -1624,7 +1624,7 @@
           <a:p>
             <a:fld id="{18BDFEC3-8487-43E8-A154-7C12CBC1FFF2}" type="slidenum">
               <a:rPr lang="en-US"/>
-              <a:t>22</a:t>
+              <a:t>23</a:t>
             </a:fld>
             <a:endParaRPr lang="en-US"/>
           </a:p>
@@ -1684,89 +1684,7 @@
             </a:pPr>
             <a:r>
               <a:rPr/>
-              <a:t>Direct quotations are not needed for this assignment. Remind students to repeat the paper title at the top of the first body page and to include both course articles in the reference list.</a:t>
-            </a:r>
-          </a:p>
-        </p:txBody>
-      </p:sp>
-      <p:sp>
-        <p:nvSpPr>
-          <p:cNvPr id="4" name="Slide Number Placeholder 3"/>
-          <p:cNvSpPr>
-            <a:spLocks noGrp="1"/>
-          </p:cNvSpPr>
-          <p:nvPr>
-            <p:ph type="sldNum" sz="quarter" idx="10"/>
-          </p:nvPr>
-        </p:nvSpPr>
-        <p:spPr/>
-        <p:txBody>
-          <a:bodyPr/>
-          <a:lstStyle/>
-          <a:p>
-            <a:fld id="{18BDFEC3-8487-43E8-A154-7C12CBC1FFF2}" type="slidenum">
-              <a:rPr lang="en-US"/>
-              <a:t>23</a:t>
-            </a:fld>
-            <a:endParaRPr lang="en-US"/>
-          </a:p>
-        </p:txBody>
-      </p:sp>
-    </p:spTree>
-  </p:cSld>
-</p:notes>
-</file>
-
-<file path=ppt/notesSlides/notesSlide23.xml><?xml version="1.0" encoding="utf-8"?>
-<p:notes xmlns:a="http://schemas.openxmlformats.org/drawingml/2006/main" xmlns:r="http://schemas.openxmlformats.org/officeDocument/2006/relationships" xmlns:p="http://schemas.openxmlformats.org/presentationml/2006/main">
-  <p:cSld>
-    <p:spTree>
-      <p:nvGrpSpPr>
-        <p:cNvPr id="1" name=""/>
-        <p:cNvGrpSpPr/>
-        <p:nvPr/>
-      </p:nvGrpSpPr>
-      <p:grpSpPr>
-        <a:xfrm>
-          <a:off x="0" y="0"/>
-          <a:ext cx="0" cy="0"/>
-          <a:chOff x="0" y="0"/>
-          <a:chExt cx="0" cy="0"/>
-        </a:xfrm>
-      </p:grpSpPr>
-      <p:sp>
-        <p:nvSpPr>
-          <p:cNvPr id="2" name="Slide Image Placeholder 1"/>
-          <p:cNvSpPr>
-            <a:spLocks noGrp="1" noRot="1" noChangeAspect="1"/>
-          </p:cNvSpPr>
-          <p:nvPr>
-            <p:ph type="sldImg"/>
-          </p:nvPr>
-        </p:nvSpPr>
-        <p:spPr/>
-      </p:sp>
-      <p:sp>
-        <p:nvSpPr>
-          <p:cNvPr id="3" name="Notes Placeholder 2"/>
-          <p:cNvSpPr>
-            <a:spLocks noGrp="1"/>
-          </p:cNvSpPr>
-          <p:nvPr>
-            <p:ph type="body" idx="1"/>
-          </p:nvPr>
-        </p:nvSpPr>
-        <p:spPr/>
-        <p:txBody>
-          <a:bodyPr/>
-          <a:lstStyle/>
-          <a:p>
-            <a:pPr lvl="0" indent="0" marL="0">
-              <a:buNone/>
-            </a:pPr>
-            <a:r>
-              <a:rPr/>
-              <a:t>Leave this slide visible during work time. Encourage students to request feedback at the end of each stage rather than waiting until the full paper is drafted.</a:t>
+              <a:t>Leave this sequence visible during work time. Students finish the worksheet sections before composing the paper, including its title and reference pages. The course schedule places submission before Week 5. The hints sheet is not submitted.</a:t>
             </a:r>
           </a:p>
         </p:txBody>
@@ -1848,7 +1766,7 @@
             </a:pPr>
             <a:r>
               <a:rPr/>
-              <a:t>Use the diagram as a transition: the proposal is not a separate task. It should grow from what the two articles establish and what they leave unanswered.</a:t>
+              <a:t>Connect the literature review to the proposal: students use what the articles found and left unanswered to decide what to study next.</a:t>
             </a:r>
           </a:p>
         </p:txBody>
@@ -1930,7 +1848,7 @@
             </a:pPr>
             <a:r>
               <a:rPr/>
-              <a:t>These questions compress the worksheet prompts into a repeatable reading routine. Model the routine with Study 1, then have students repeat it for the remaining studies.</a:t>
+              <a:t>Use Study 1 to model this reading sequence. The worksheet also asks for participants, formal design terms, materials, and procedures. Students need all reported findings, including nonsignificant results and interactions, without copying the statistical values.</a:t>
             </a:r>
           </a:p>
         </p:txBody>
@@ -2012,7 +1930,7 @@
             </a:pPr>
             <a:r>
               <a:rPr/>
-              <a:t>Begin with the title and abstract. Ask students to identify the independent variable, dependent variable, and predicted direction before reading the method.</a:t>
+              <a:t>Start with the title and abstract. Have students identify the IV, DV, and predicted direction, then check the Method. Use the assigned course version of the article.</a:t>
             </a:r>
           </a:p>
         </p:txBody>
@@ -2094,7 +2012,7 @@
             </a:pPr>
             <a:r>
               <a:rPr/>
-              <a:t>The coin toss is the critical design detail. Because posture was assigned by table, Study 1 is an experiment even though it occurred in a natural restaurant setting.</a:t>
+              <a:t>Use the coin toss to explain why this is a between-groups experiment. The hints treat each table’s tip as one DV score; the waiter collects the data. Have students identify the other sampling and procedure details in the article.</a:t>
             </a:r>
           </a:p>
         </p:txBody>
@@ -2176,7 +2094,7 @@
             </a:pPr>
             <a:r>
               <a:rPr/>
-              <a:t>Tip percentage and bill-adjusted tips showed the same pattern. Ask students why the server’s expectation and the single-server sample still matter despite random assignment.</a:t>
+              <a:t>This sentence models one result, not the complete worksheet answer. Have students read both Results subsections and the Discussion. They need to explain the other findings and why a limitation matters.</a:t>
             </a:r>
           </a:p>
         </p:txBody>
@@ -2258,7 +2176,7 @@
             </a:pPr>
             <a:r>
               <a:rPr/>
-              <a:t>The second server did not expect posture to affect tips. The effect also appeared for tip percentage and bill-adjusted tips. The weekday interaction is a secondary qualification, not the main takeaway for the slide.</a:t>
+              <a:t>Students should complete each Study 2 box using the article. Check both Results subsections, including the weekday/weekend comparison, other interactions, and nonsignificant findings. Do not stop at the average-tip comparison.</a:t>
             </a:r>
           </a:p>
         </p:txBody>
@@ -2340,7 +2258,7 @@
             </a:pPr>
             <a:r>
               <a:rPr/>
-              <a:t>Model integration as a relationship among studies, not two separate summaries. The second study broadens the context and weakens the expectancy explanation from Study 1.</a:t>
+              <a:t>Follow the worksheet’s three integration questions. Ask students to connect specific similarities and differences to replication and generalizability.</a:t>
             </a:r>
           </a:p>
         </p:txBody>
@@ -3631,8 +3549,8 @@
         </p:nvSpPr>
         <p:spPr>
           <a:xfrm>
-            <a:off x="1583436" y="2313433"/>
-            <a:ext cx="4270248" cy="704087"/>
+            <a:off x="1097280" y="2313433"/>
+            <a:ext cx="4907280" cy="548640"/>
           </a:xfrm>
         </p:spPr>
         <p:txBody>
@@ -3704,8 +3622,8 @@
         </p:nvSpPr>
         <p:spPr>
           <a:xfrm>
-            <a:off x="1583436" y="3143250"/>
-            <a:ext cx="4270248" cy="2596776"/>
+            <a:off x="1097280" y="2926080"/>
+            <a:ext cx="4907280" cy="3177540"/>
           </a:xfrm>
         </p:spPr>
         <p:txBody>
@@ -3761,8 +3679,8 @@
         </p:nvSpPr>
         <p:spPr>
           <a:xfrm>
-            <a:off x="6338316" y="3143250"/>
-            <a:ext cx="4253484" cy="2596776"/>
+            <a:off x="6187440" y="2926080"/>
+            <a:ext cx="4907280" cy="3177540"/>
           </a:xfrm>
         </p:spPr>
         <p:txBody>
@@ -3822,8 +3740,8 @@
         </p:nvSpPr>
         <p:spPr>
           <a:xfrm>
-            <a:off x="6338316" y="2313433"/>
-            <a:ext cx="4270248" cy="704087"/>
+            <a:off x="6187440" y="2313433"/>
+            <a:ext cx="4907280" cy="548640"/>
           </a:xfrm>
         </p:spPr>
         <p:txBody>
@@ -3958,7 +3876,12 @@
             <p:ph type="title"/>
           </p:nvPr>
         </p:nvSpPr>
-        <p:spPr/>
+        <p:spPr>
+          <a:xfrm>
+            <a:off x="1097280" y="964692"/>
+            <a:ext cx="9997440" cy="1188720"/>
+          </a:xfrm>
+        </p:spPr>
         <p:txBody>
           <a:bodyPr/>
           <a:lstStyle/>
@@ -5643,7 +5566,7 @@
             </a:pPr>
             <a:r>
               <a:rPr/>
-              <a:t>9 Integrate before moving on</a:t>
+              <a:t>9 Compare the two studies</a:t>
             </a:r>
           </a:p>
         </p:txBody>
@@ -5668,11 +5591,11 @@
             </a:pPr>
             <a:r>
               <a:rPr b="1"/>
-              <a:t>Same:</a:t>
-            </a:r>
-            <a:r>
-              <a:rPr/>
-              <a:t> Assigned posture during the first table visit</a:t>
+              <a:t>Similarities:</a:t>
+            </a:r>
+            <a:r>
+              <a:rPr/>
+              <a:t> Which procedures and findings were alike?</a:t>
             </a:r>
           </a:p>
           <a:p>
@@ -5681,11 +5604,11 @@
             </a:pPr>
             <a:r>
               <a:rPr b="1"/>
-              <a:t>Different:</a:t>
-            </a:r>
-            <a:r>
-              <a:rPr/>
-              <a:t> Server, restaurant, and customer sample</a:t>
+              <a:t>Differences:</a:t>
+            </a:r>
+            <a:r>
+              <a:rPr/>
+              <a:t> What changed, and could it explain a difference in results?</a:t>
             </a:r>
           </a:p>
           <a:p>
@@ -5698,7 +5621,7 @@
             </a:r>
             <a:r>
               <a:rPr/>
-              <a:t> Replication strengthens the evidence that squatting increased tips</a:t>
+              <a:t> What do you learn from both studies that either one alone would not show?</a:t>
             </a:r>
           </a:p>
         </p:txBody>
@@ -5757,7 +5680,7 @@
       </p:sp>
       <p:pic>
         <p:nvPicPr>
-          <p:cNvPr descr="First page of VanVolkinburg's article Restaurant Server Posture Related to Add-On Sales, showing its title, abstract, and opening paragraphs" id="0" name="Picture 1"/>
+          <p:cNvPr descr="First page of VanVolkinburg's course article Restaurant Server Posture Related to Add-On Sales, showing its title, abstract, and opening paragraphs" id="0" name="Picture 1"/>
           <p:cNvPicPr>
             <a:picLocks noGrp="1" noChangeAspect="1"/>
           </p:cNvPicPr>
@@ -5810,11 +5733,11 @@
             <a:pPr lvl="0"/>
             <a:r>
               <a:rPr b="1"/>
-              <a:t>Four servers</a:t>
-            </a:r>
-            <a:r>
-              <a:rPr/>
-              <a:t> and 54 patrons</a:t>
+              <a:t>Participants:</a:t>
+            </a:r>
+            <a:r>
+              <a:rPr/>
+              <a:t> 54 patrons at 21 tables</a:t>
             </a:r>
           </a:p>
           <a:p>
@@ -5833,8 +5756,10 @@
               <a:buNone/>
             </a:pPr>
             <a:r>
-              <a:rPr/>
-              <a:t>Course article: VanVolkinburg (1998)</a:t>
+              <a:rPr>
+                <a:hlinkClick r:id="rId4"/>
+              </a:rPr>
+              <a:t>VanVolkinburg (1998) · PDF</a:t>
             </a:r>
           </a:p>
         </p:txBody>
@@ -5911,7 +5836,7 @@
             </a:pPr>
             <a:r>
               <a:rPr/>
-              <a:t>Two servers usually squatted.</a:t>
+              <a:t>Two servers usually squatted, and two usually stood</a:t>
             </a:r>
           </a:p>
           <a:p>
@@ -5920,7 +5845,7 @@
             </a:pPr>
             <a:r>
               <a:rPr/>
-              <a:t>Two servers usually stood.</a:t>
+              <a:t>The observer recorded their usual posture</a:t>
             </a:r>
           </a:p>
           <a:p>
@@ -5929,7 +5854,7 @@
             </a:pPr>
             <a:r>
               <a:rPr/>
-              <a:t>Researchers recorded visit time and sales.</a:t>
+              <a:t>She also recorded visit time and add-on sales</a:t>
             </a:r>
           </a:p>
           <a:p>
@@ -5937,8 +5862,8 @@
               <a:buNone/>
             </a:pPr>
             <a:r>
-              <a:rPr b="1"/>
-              <a:t>No posture condition was assigned.</a:t>
+              <a:rPr/>
+              <a:t>What else might differ between these servers?</a:t>
             </a:r>
           </a:p>
         </p:txBody>
@@ -6012,42 +5937,29 @@
           <a:p>
             <a:pPr lvl="0"/>
             <a:r>
-              <a:rPr b="1"/>
-              <a:t>Pattern:</a:t>
-            </a:r>
-            <a:r>
-              <a:rPr/>
-              <a:t> Squatting servers spent more time at tables and had higher add-on sales after extreme scores were removed.</a:t>
+              <a:rPr/>
+              <a:t>How did the sales comparison change when the outliers were removed?</a:t>
             </a:r>
           </a:p>
           <a:p>
             <a:pPr lvl="0"/>
             <a:r>
-              <a:rPr b="1"/>
-              <a:t>Limit:</a:t>
-            </a:r>
-            <a:r>
-              <a:rPr/>
-              <a:t> Posture and server characteristics varied together.</a:t>
+              <a:rPr/>
+              <a:t>What did the authors find about time spent at the table?</a:t>
             </a:r>
           </a:p>
           <a:p>
             <a:pPr lvl="0"/>
             <a:r>
-              <a:rPr b="1"/>
-              <a:t>Claim:</a:t>
-            </a:r>
-            <a:r>
-              <a:rPr/>
-              <a:t> Posture was </a:t>
-            </a:r>
-            <a:r>
-              <a:rPr b="1"/>
-              <a:t>related to</a:t>
-            </a:r>
-            <a:r>
-              <a:rPr/>
-              <a:t> the outcomes; it was not shown to cause them.</a:t>
+              <a:rPr/>
+              <a:t>How did the time–sales relationship differ by posture?</a:t>
+            </a:r>
+          </a:p>
+          <a:p>
+            <a:pPr lvl="0"/>
+            <a:r>
+              <a:rPr/>
+              <a:t>Does this design support a causal claim? Explain why</a:t>
             </a:r>
           </a:p>
         </p:txBody>
@@ -6099,7 +6011,7 @@
             </a:pPr>
             <a:r>
               <a:rPr/>
-              <a:t>13 The designs support different claims</a:t>
+              <a:t>13 Compare the two designs</a:t>
             </a:r>
           </a:p>
         </p:txBody>
@@ -6173,7 +6085,7 @@
                       </a:pPr>
                       <a:r>
                         <a:rPr/>
-                        <a:t>Main outcome</a:t>
+                        <a:t>Outcomes</a:t>
                       </a:r>
                     </a:p>
                   </a:txBody>
@@ -6189,7 +6101,7 @@
                       </a:pPr>
                       <a:r>
                         <a:rPr/>
-                        <a:t>Strongest claim</a:t>
+                        <a:t>Claim to justify</a:t>
                       </a:r>
                     </a:p>
                   </a:txBody>
@@ -6252,7 +6164,7 @@
                       </a:pPr>
                       <a:r>
                         <a:rPr/>
-                        <a:t>Causal effect</a:t>
+                        <a:t>Causal or associative?</a:t>
                       </a:r>
                     </a:p>
                   </a:txBody>
@@ -6314,7 +6226,7 @@
                       </a:pPr>
                       <a:r>
                         <a:rPr/>
-                        <a:t>Association</a:t>
+                        <a:t>Causal or associative?</a:t>
                       </a:r>
                     </a:p>
                   </a:txBody>
@@ -6371,7 +6283,7 @@
             </a:pPr>
             <a:r>
               <a:rPr/>
-              <a:t>14 Write synthesis in three moves</a:t>
+              <a:t>13 Compare the two designs (continued)</a:t>
             </a:r>
           </a:p>
         </p:txBody>
@@ -6391,42 +6303,12 @@
           <a:bodyPr/>
           <a:lstStyle/>
           <a:p>
-            <a:pPr lvl="0" indent="-457200" marL="457200">
-              <a:buAutoNum type="arabicPeriod"/>
+            <a:pPr lvl="0" indent="0" marL="0">
+              <a:buNone/>
             </a:pPr>
             <a:r>
-              <a:rPr b="1"/>
-              <a:t>Pattern:</a:t>
-            </a:r>
-            <a:r>
-              <a:rPr/>
-              <a:t> Posture relates to several customer outcomes.</a:t>
-            </a:r>
-          </a:p>
-          <a:p>
-            <a:pPr lvl="0" indent="-457200" marL="457200">
-              <a:buAutoNum type="arabicPeriod"/>
-            </a:pPr>
-            <a:r>
-              <a:rPr b="1"/>
-              <a:t>Evidence:</a:t>
-            </a:r>
-            <a:r>
-              <a:rPr/>
-              <a:t> Assigned and observed designs support different claims.</a:t>
-            </a:r>
-          </a:p>
-          <a:p>
-            <a:pPr lvl="0" indent="-457200" marL="457200">
-              <a:buAutoNum type="arabicPeriod"/>
-            </a:pPr>
-            <a:r>
-              <a:rPr b="1"/>
-              <a:t>Question:</a:t>
-            </a:r>
-            <a:r>
-              <a:rPr/>
-              <a:t> The mechanism remains uncertain.</a:t>
+              <a:rPr/>
+              <a:t>What design evidence supports each choice?</a:t>
             </a:r>
           </a:p>
         </p:txBody>
@@ -6478,7 +6360,7 @@
             </a:pPr>
             <a:r>
               <a:rPr/>
-              <a:t>15 Let the gap drive the proposal</a:t>
+              <a:t>14 Connect the articles in your writing</a:t>
             </a:r>
           </a:p>
         </p:txBody>
@@ -6498,29 +6380,42 @@
           <a:bodyPr/>
           <a:lstStyle/>
           <a:p>
-            <a:pPr lvl="0" indent="0" marL="1270000">
-              <a:buNone/>
+            <a:pPr lvl="0" indent="-457200" marL="457200">
+              <a:buAutoNum type="arabicPeriod"/>
             </a:pPr>
             <a:r>
-              <a:rPr sz="2000"/>
-              <a:t>Does posture change customer outcomes because it increases interaction time?</a:t>
-            </a:r>
-          </a:p>
-          <a:p>
-            <a:pPr lvl="0" indent="0" marL="0">
-              <a:buNone/>
+              <a:rPr b="1"/>
+              <a:t>Similarities:</a:t>
+            </a:r>
+            <a:r>
+              <a:rPr/>
+              <a:t> Connect findings and procedures from both articles</a:t>
+            </a:r>
+          </a:p>
+          <a:p>
+            <a:pPr lvl="0" indent="-457200" marL="457200">
+              <a:buAutoNum type="arabicPeriod"/>
             </a:pPr>
             <a:r>
-              <a:rPr/>
-              <a:t>A useful proposal tests a </a:t>
-            </a:r>
-            <a:r>
               <a:rPr b="1"/>
-              <a:t>mechanism, boundary, or unresolved question</a:t>
-            </a:r>
-            <a:r>
-              <a:rPr/>
-              <a:t>—not merely a new sample.</a:t>
+              <a:t>Differences:</a:t>
+            </a:r>
+            <a:r>
+              <a:rPr/>
+              <a:t> Explain how design differences might account for different findings</a:t>
+            </a:r>
+          </a:p>
+          <a:p>
+            <a:pPr lvl="0" indent="-457200" marL="457200">
+              <a:buAutoNum type="arabicPeriod"/>
+            </a:pPr>
+            <a:r>
+              <a:rPr b="1"/>
+              <a:t>Together:</a:t>
+            </a:r>
+            <a:r>
+              <a:rPr/>
+              <a:t> State what considering both articles adds</a:t>
             </a:r>
           </a:p>
         </p:txBody>
@@ -6572,7 +6467,7 @@
             </a:pPr>
             <a:r>
               <a:rPr/>
-              <a:t>16 State one testable prediction</a:t>
+              <a:t>15 Choose a question for your proposal</a:t>
             </a:r>
           </a:p>
         </p:txBody>
@@ -6592,44 +6487,12 @@
           <a:bodyPr/>
           <a:lstStyle/>
           <a:p>
-            <a:pPr lvl="0" indent="0" marL="1270000">
+            <a:pPr lvl="0" indent="0" marL="0">
               <a:buNone/>
             </a:pPr>
             <a:r>
-              <a:rPr sz="2000"/>
-              <a:t>Among </a:t>
-            </a:r>
-            <a:r>
-              <a:rPr sz="2000" b="1"/>
-              <a:t>[sample]</a:t>
-            </a:r>
-            <a:r>
-              <a:rPr sz="2000"/>
-              <a:t>, </a:t>
-            </a:r>
-            <a:r>
-              <a:rPr sz="2000" b="1"/>
-              <a:t>[posture condition]</a:t>
-            </a:r>
-            <a:r>
-              <a:rPr sz="2000"/>
-              <a:t> will produce </a:t>
-            </a:r>
-            <a:r>
-              <a:rPr sz="2000" b="1"/>
-              <a:t>[higher or lower outcome]</a:t>
-            </a:r>
-            <a:r>
-              <a:rPr sz="2000"/>
-              <a:t> than </a:t>
-            </a:r>
-            <a:r>
-              <a:rPr sz="2000" b="1"/>
-              <a:t>[comparison condition]</a:t>
-            </a:r>
-            <a:r>
-              <a:rPr sz="2000"/>
-              <a:t>.</a:t>
+              <a:rPr b="1"/>
+              <a:t>One possible question</a:t>
             </a:r>
           </a:p>
           <a:p>
@@ -6638,15 +6501,16 @@
             </a:pPr>
             <a:r>
               <a:rPr/>
-              <a:t>Name the </a:t>
-            </a:r>
-            <a:r>
-              <a:rPr b="1"/>
-              <a:t>sample · conditions · outcome · direction</a:t>
-            </a:r>
-            <a:r>
-              <a:rPr/>
-              <a:t>.</a:t>
+              <a:t>Does posture change customer outcomes because it increases interaction time?</a:t>
+            </a:r>
+          </a:p>
+          <a:p>
+            <a:pPr lvl="0" indent="0" marL="0">
+              <a:buNone/>
+            </a:pPr>
+            <a:r>
+              <a:rPr/>
+              <a:t>Your proposal can use different variables or a different setting. Explain how the question follows from both articles.</a:t>
             </a:r>
           </a:p>
         </p:txBody>
@@ -6698,7 +6562,7 @@
             </a:pPr>
             <a:r>
               <a:rPr/>
-              <a:t>17 Plan the simplest clear method</a:t>
+              <a:t>16 State one testable prediction</a:t>
             </a:r>
           </a:p>
         </p:txBody>
@@ -6718,68 +6582,24 @@
           <a:bodyPr/>
           <a:lstStyle/>
           <a:p>
-            <a:pPr lvl="0" indent="-457200" marL="457200">
-              <a:buAutoNum type="arabicPeriod"/>
-            </a:pPr>
-            <a:r>
-              <a:rPr b="1"/>
-              <a:t>Sample:</a:t>
-            </a:r>
-            <a:r>
-              <a:rPr/>
-              <a:t> Who and how many?</a:t>
-            </a:r>
-          </a:p>
-          <a:p>
-            <a:pPr lvl="0" indent="-457200" marL="457200">
-              <a:buAutoNum type="arabicPeriod"/>
-            </a:pPr>
-            <a:r>
-              <a:rPr b="1"/>
-              <a:t>Assignment:</a:t>
-            </a:r>
-            <a:r>
-              <a:rPr/>
-              <a:t> How are conditions created?</a:t>
-            </a:r>
-          </a:p>
-          <a:p>
-            <a:pPr lvl="0" indent="-457200" marL="457200">
-              <a:buAutoNum type="arabicPeriod"/>
-            </a:pPr>
-            <a:r>
-              <a:rPr b="1"/>
-              <a:t>Procedure:</a:t>
-            </a:r>
-            <a:r>
-              <a:rPr/>
-              <a:t> What happens, in order?</a:t>
-            </a:r>
-          </a:p>
-          <a:p>
-            <a:pPr lvl="0" indent="-457200" marL="457200">
-              <a:buAutoNum type="arabicPeriod"/>
-            </a:pPr>
-            <a:r>
-              <a:rPr b="1"/>
-              <a:t>Measure:</a:t>
-            </a:r>
-            <a:r>
-              <a:rPr/>
-              <a:t> What is recorded?</a:t>
-            </a:r>
-          </a:p>
-          <a:p>
-            <a:pPr lvl="0" indent="-457200" marL="457200">
-              <a:buAutoNum type="arabicPeriod"/>
-            </a:pPr>
-            <a:r>
-              <a:rPr b="1"/>
-              <a:t>Controls:</a:t>
-            </a:r>
-            <a:r>
-              <a:rPr/>
-              <a:t> What stays constant?</a:t>
+            <a:pPr lvl="0"/>
+            <a:r>
+              <a:rPr/>
+              <a:t>Name the IV and DV in your proposed study</a:t>
+            </a:r>
+          </a:p>
+          <a:p>
+            <a:pPr lvl="0"/>
+            <a:r>
+              <a:rPr/>
+              <a:t>State the relationship or difference you expect</a:t>
+            </a:r>
+          </a:p>
+          <a:p>
+            <a:pPr lvl="0"/>
+            <a:r>
+              <a:rPr/>
+              <a:t>Use wording that matches your design</a:t>
             </a:r>
           </a:p>
         </p:txBody>
@@ -6831,20 +6651,111 @@
             </a:pPr>
             <a:r>
               <a:rPr/>
-              <a:t>18 Check both kinds of validity</a:t>
-            </a:r>
-          </a:p>
-        </p:txBody>
-      </p:sp>
-      <p:sp>
-        <p:nvSpPr>
-          <p:cNvPr id="1001" name="card-steel" descr="card: Internal validity. • Assign conditions fairly. • Standardize the procedure."/>
+              <a:t>17 Plan the method for your question</a:t>
+            </a:r>
+          </a:p>
+        </p:txBody>
+      </p:sp>
+      <p:sp>
+        <p:nvSpPr>
+          <p:cNvPr id="1009" name="card-steel" descr="card: Sample. Who will participate, how many, and how will you obtain the sample?"/>
           <p:cNvSpPr/>
           <p:nvPr/>
         </p:nvSpPr>
         <p:spPr>
           <a:xfrm>
             <a:off x="1097280" y="2633472"/>
+            <a:ext cx="4924044" cy="1615440"/>
+          </a:xfrm>
+          <a:prstGeom prst="roundRect">
+            <a:avLst>
+              <a:gd name="adj" fmla="val 6000"/>
+            </a:avLst>
+          </a:prstGeom>
+          <a:solidFill>
+            <a:srgbClr val="FEFDFA"/>
+          </a:solidFill>
+          <a:ln w="19050">
+            <a:solidFill>
+              <a:srgbClr val="CCCCCC"/>
+            </a:solidFill>
+          </a:ln>
+        </p:spPr>
+        <p:txBody>
+          <a:bodyPr lIns="182880" tIns="182880" rIns="182880" bIns="182880" anchor="t" wrap="square">
+            <a:normAutofit/>
+          </a:bodyPr>
+          <a:lstStyle/>
+          <a:p>
+            <a:pPr algn="l"/>
+            <a:r>
+              <a:rPr lang="en-US" sz="2200" b="1" dirty="0">
+                <a:solidFill>
+                  <a:srgbClr val="010B13"/>
+                </a:solidFill>
+              </a:rPr>
+              <a:t>Sample</a:t>
+            </a:r>
+          </a:p>
+          <a:p>
+            <a:pPr algn="l"/>
+            <a:r>
+              <a:rPr lang="en-US" sz="2000" b="0" dirty="0">
+                <a:solidFill>
+                  <a:srgbClr val="010B13"/>
+                </a:solidFill>
+              </a:rPr>
+              <a:t>Who will participate, how many, and how will you obtain the sample?</a:t>
+            </a:r>
+          </a:p>
+        </p:txBody>
+      </p:sp>
+      <p:sp>
+        <p:nvSpPr>
+          <p:cNvPr id="1010" name="card-rail" descr="">
+            <a:extLst>
+              <a:ext uri="{C183D7F6-B498-43B3-948B-1728B52AA6E4}">
+                <adec:decorative xmlns:adec="http://schemas.microsoft.com/office/drawing/2017/decorative" val="1"/>
+              </a:ext>
+            </a:extLst>
+          </p:cNvPr>
+          <p:cNvSpPr/>
+          <p:nvPr/>
+        </p:nvSpPr>
+        <p:spPr>
+          <a:xfrm>
+            <a:off x="1097280" y="2633472"/>
+            <a:ext cx="54864" cy="1615440"/>
+          </a:xfrm>
+          <a:prstGeom prst="roundRect">
+            <a:avLst>
+              <a:gd name="adj" fmla="val 20000"/>
+            </a:avLst>
+          </a:prstGeom>
+          <a:solidFill>
+            <a:srgbClr val="010B13"/>
+          </a:solidFill>
+          <a:ln>
+            <a:noFill/>
+          </a:ln>
+        </p:spPr>
+        <p:txBody>
+          <a:bodyPr lIns="182880" tIns="182880" rIns="182880" bIns="182880" anchor="t" wrap="square">
+            <a:normAutofit/>
+          </a:bodyPr>
+          <a:lstStyle/>
+          <a:p/>
+        </p:txBody>
+      </p:sp>
+      <p:sp>
+        <p:nvSpPr>
+          <p:cNvPr id="1011" name="card-steel" descr="card: Materials. What equipment, stimuli, or measures will you need?"/>
+          <p:cNvSpPr/>
+          <p:nvPr/>
+        </p:nvSpPr>
+        <p:spPr>
+          <a:xfrm>
+            <a:off x="6167628" y="2633472"/>
             <a:ext cx="4924044" cy="1310640"/>
           </a:xfrm>
           <a:prstGeom prst="roundRect">
@@ -6874,7 +6785,7 @@
                   <a:srgbClr val="010B13"/>
                 </a:solidFill>
               </a:rPr>
-              <a:t>Internal validity</a:t>
+              <a:t>Materials</a:t>
             </a:r>
           </a:p>
           <a:p>
@@ -6885,31 +6796,26 @@
                   <a:srgbClr val="010B13"/>
                 </a:solidFill>
               </a:rPr>
-              <a:t>• Assign conditions fairly.</a:t>
-            </a:r>
-          </a:p>
-          <a:p>
-            <a:pPr algn="l"/>
-            <a:r>
-              <a:rPr lang="en-US" sz="2000" b="0" dirty="0">
-                <a:solidFill>
-                  <a:srgbClr val="010B13"/>
-                </a:solidFill>
-              </a:rPr>
-              <a:t>• Standardize the procedure.</a:t>
-            </a:r>
-          </a:p>
-        </p:txBody>
-      </p:sp>
-      <p:sp>
-        <p:nvSpPr>
-          <p:cNvPr id="1002" name="card-rail" descr=""/>
+              <a:t>What equipment, stimuli, or measures will you need?</a:t>
+            </a:r>
+          </a:p>
+        </p:txBody>
+      </p:sp>
+      <p:sp>
+        <p:nvSpPr>
+          <p:cNvPr id="1012" name="card-rail" descr="">
+            <a:extLst>
+              <a:ext uri="{C183D7F6-B498-43B3-948B-1728B52AA6E4}">
+                <adec:decorative xmlns:adec="http://schemas.microsoft.com/office/drawing/2017/decorative" val="1"/>
+              </a:ext>
+            </a:extLst>
+          </p:cNvPr>
           <p:cNvSpPr/>
           <p:nvPr/>
         </p:nvSpPr>
         <p:spPr>
           <a:xfrm>
-            <a:off x="1097280" y="2633472"/>
+            <a:off x="6167628" y="2633472"/>
             <a:ext cx="54864" cy="1310640"/>
           </a:xfrm>
           <a:prstGeom prst="roundRect">
@@ -6934,14 +6840,14 @@
       </p:sp>
       <p:sp>
         <p:nvSpPr>
-          <p:cNvPr id="1003" name="card-steel" descr="card: External validity. • Define the sample and setting. • Keep conclusions within that scope."/>
+          <p:cNvPr id="1013" name="card-steel" descr="card: Procedure. How will conditions be formed, and what will each participant do?"/>
           <p:cNvSpPr/>
           <p:nvPr/>
         </p:nvSpPr>
         <p:spPr>
           <a:xfrm>
-            <a:off x="6167628" y="2633472"/>
-            <a:ext cx="4924044" cy="1920240"/>
+            <a:off x="1097280" y="4395216"/>
+            <a:ext cx="4924044" cy="1615440"/>
           </a:xfrm>
           <a:prstGeom prst="roundRect">
             <a:avLst>
@@ -6970,7 +6876,7 @@
                   <a:srgbClr val="010B13"/>
                 </a:solidFill>
               </a:rPr>
-              <a:t>External validity</a:t>
+              <a:t>Procedure</a:t>
             </a:r>
           </a:p>
           <a:p>
@@ -6981,7 +6887,87 @@
                   <a:srgbClr val="010B13"/>
                 </a:solidFill>
               </a:rPr>
-              <a:t>• Define the sample and setting.</a:t>
+              <a:t>How will conditions be formed, and what will each participant do?</a:t>
+            </a:r>
+          </a:p>
+        </p:txBody>
+      </p:sp>
+      <p:sp>
+        <p:nvSpPr>
+          <p:cNvPr id="1014" name="card-rail" descr="">
+            <a:extLst>
+              <a:ext uri="{C183D7F6-B498-43B3-948B-1728B52AA6E4}">
+                <adec:decorative xmlns:adec="http://schemas.microsoft.com/office/drawing/2017/decorative" val="1"/>
+              </a:ext>
+            </a:extLst>
+          </p:cNvPr>
+          <p:cNvSpPr/>
+          <p:nvPr/>
+        </p:nvSpPr>
+        <p:spPr>
+          <a:xfrm>
+            <a:off x="1097280" y="4395216"/>
+            <a:ext cx="54864" cy="1615440"/>
+          </a:xfrm>
+          <a:prstGeom prst="roundRect">
+            <a:avLst>
+              <a:gd name="adj" fmla="val 20000"/>
+            </a:avLst>
+          </a:prstGeom>
+          <a:solidFill>
+            <a:srgbClr val="010B13"/>
+          </a:solidFill>
+          <a:ln>
+            <a:noFill/>
+          </a:ln>
+        </p:spPr>
+        <p:txBody>
+          <a:bodyPr lIns="182880" tIns="182880" rIns="182880" bIns="182880" anchor="t" wrap="square">
+            <a:normAutofit/>
+          </a:bodyPr>
+          <a:lstStyle/>
+          <a:p/>
+        </p:txBody>
+      </p:sp>
+      <p:sp>
+        <p:nvSpPr>
+          <p:cNvPr id="1015" name="card-steel" descr="card: Measures and controls. What will you record, and what will you keep consistent?"/>
+          <p:cNvSpPr/>
+          <p:nvPr/>
+        </p:nvSpPr>
+        <p:spPr>
+          <a:xfrm>
+            <a:off x="6167628" y="4395216"/>
+            <a:ext cx="4924044" cy="1310640"/>
+          </a:xfrm>
+          <a:prstGeom prst="roundRect">
+            <a:avLst>
+              <a:gd name="adj" fmla="val 6000"/>
+            </a:avLst>
+          </a:prstGeom>
+          <a:solidFill>
+            <a:srgbClr val="FEFDFA"/>
+          </a:solidFill>
+          <a:ln w="19050">
+            <a:solidFill>
+              <a:srgbClr val="CCCCCC"/>
+            </a:solidFill>
+          </a:ln>
+        </p:spPr>
+        <p:txBody>
+          <a:bodyPr lIns="182880" tIns="182880" rIns="182880" bIns="182880" anchor="t" wrap="square">
+            <a:normAutofit/>
+          </a:bodyPr>
+          <a:lstStyle/>
+          <a:p>
+            <a:pPr algn="l"/>
+            <a:r>
+              <a:rPr lang="en-US" sz="2200" b="1" dirty="0">
+                <a:solidFill>
+                  <a:srgbClr val="010B13"/>
+                </a:solidFill>
+              </a:rPr>
+              <a:t>Measures and controls</a:t>
             </a:r>
           </a:p>
           <a:p>
@@ -6992,21 +6978,27 @@
                   <a:srgbClr val="010B13"/>
                 </a:solidFill>
               </a:rPr>
-              <a:t>• Keep conclusions within that scope.</a:t>
-            </a:r>
-          </a:p>
-        </p:txBody>
-      </p:sp>
-      <p:sp>
-        <p:nvSpPr>
-          <p:cNvPr id="1004" name="card-rail" descr=""/>
+              <a:t>What will you record, and what will you keep consistent?</a:t>
+            </a:r>
+          </a:p>
+        </p:txBody>
+      </p:sp>
+      <p:sp>
+        <p:nvSpPr>
+          <p:cNvPr id="1016" name="card-rail" descr="">
+            <a:extLst>
+              <a:ext uri="{C183D7F6-B498-43B3-948B-1728B52AA6E4}">
+                <adec:decorative xmlns:adec="http://schemas.microsoft.com/office/drawing/2017/decorative" val="1"/>
+              </a:ext>
+            </a:extLst>
+          </p:cNvPr>
           <p:cNvSpPr/>
           <p:nvPr/>
         </p:nvSpPr>
         <p:spPr>
           <a:xfrm>
-            <a:off x="6167628" y="2633472"/>
-            <a:ext cx="54864" cy="1920240"/>
+            <a:off x="6167628" y="4395216"/>
+            <a:ext cx="54864" cy="1310640"/>
           </a:xfrm>
           <a:prstGeom prst="roundRect">
             <a:avLst>
@@ -7075,71 +7067,421 @@
             </a:pPr>
             <a:r>
               <a:rPr/>
-              <a:t>1 Get ready to build the paper</a:t>
-            </a:r>
-          </a:p>
-        </p:txBody>
-      </p:sp>
-      <p:sp>
-        <p:nvSpPr>
-          <p:cNvPr id="3" name="Content Placeholder 2"/>
-          <p:cNvSpPr>
-            <a:spLocks noGrp="1"/>
-          </p:cNvSpPr>
-          <p:nvPr>
-            <p:ph idx="1"/>
-          </p:nvPr>
-        </p:nvSpPr>
-        <p:spPr/>
-        <p:txBody>
-          <a:bodyPr/>
-          <a:lstStyle/>
-          <a:p>
-            <a:pPr lvl="0"/>
-            <a:r>
-              <a:rPr b="1"/>
-              <a:t>Worksheet:</a:t>
-            </a:r>
-            <a:r>
-              <a:rPr/>
-              <a:t> Lab 04 worksheet and hints sheet</a:t>
-            </a:r>
-          </a:p>
-          <a:p>
-            <a:pPr lvl="0"/>
-            <a:r>
-              <a:rPr b="1"/>
-              <a:t>Evidence:</a:t>
-            </a:r>
-            <a:r>
-              <a:rPr/>
-              <a:t> Lynn and Mynier and VanVolkinburg articles</a:t>
-            </a:r>
-          </a:p>
-          <a:p>
-            <a:pPr lvl="0"/>
-            <a:r>
-              <a:rPr b="1"/>
-              <a:t>Writing help:</a:t>
-            </a:r>
-            <a:r>
-              <a:rPr/>
-              <a:t> APA student-paper, citation, and plagiarism guides</a:t>
-            </a:r>
-          </a:p>
-          <a:p>
-            <a:pPr lvl="0" indent="0" marL="0">
-              <a:buNone/>
-            </a:pPr>
-            <a:r>
-              <a:rPr/>
-              <a:t>Today’s path: </a:t>
-            </a:r>
-            <a:r>
-              <a:rPr b="1"/>
-              <a:t>read → integrate → propose → compose</a:t>
-            </a:r>
-          </a:p>
+              <a:t>1 Open the Lab 04 files</a:t>
+            </a:r>
+          </a:p>
+        </p:txBody>
+      </p:sp>
+      <p:sp>
+        <p:nvSpPr>
+          <p:cNvPr id="1001" name="card-steel" descr="card: Worksheet. Write each section here before composing the paper Worksheet: lab schedule"/>
+          <p:cNvSpPr/>
+          <p:nvPr/>
+        </p:nvSpPr>
+        <p:spPr>
+          <a:xfrm>
+            <a:off x="1097280" y="2633472"/>
+            <a:ext cx="4924044" cy="1615440"/>
+          </a:xfrm>
+          <a:prstGeom prst="roundRect">
+            <a:avLst>
+              <a:gd name="adj" fmla="val 6000"/>
+            </a:avLst>
+          </a:prstGeom>
+          <a:solidFill>
+            <a:srgbClr val="FEFDFA"/>
+          </a:solidFill>
+          <a:ln w="19050">
+            <a:solidFill>
+              <a:srgbClr val="CCCCCC"/>
+            </a:solidFill>
+          </a:ln>
+        </p:spPr>
+        <p:txBody>
+          <a:bodyPr lIns="182880" tIns="182880" rIns="182880" bIns="182880" anchor="t" wrap="square">
+            <a:normAutofit/>
+          </a:bodyPr>
+          <a:lstStyle/>
+          <a:p>
+            <a:pPr algn="l"/>
+            <a:r>
+              <a:rPr lang="en-US" sz="2200" b="1" dirty="0">
+                <a:solidFill>
+                  <a:srgbClr val="010B13"/>
+                </a:solidFill>
+              </a:rPr>
+              <a:t>Worksheet</a:t>
+            </a:r>
+          </a:p>
+          <a:p>
+            <a:pPr algn="l"/>
+            <a:r>
+              <a:rPr lang="en-US" sz="2000" b="0" dirty="0">
+                <a:solidFill>
+                  <a:srgbClr val="010B13"/>
+                </a:solidFill>
+              </a:rPr>
+              <a:t>Write each section here before composing the paper</a:t>
+            </a:r>
+          </a:p>
+          <a:p>
+            <a:pPr algn="l"/>
+            <a:r>
+              <a:rPr lang="en-US" sz="2000" b="0" dirty="0">
+                <a:solidFill>
+                  <a:srgbClr val="010B13"/>
+                </a:solidFill>
+                <a:hlinkClick r:id="rId3"/>
+              </a:rPr>
+              <a:t>Worksheet: lab schedule</a:t>
+            </a:r>
+          </a:p>
+        </p:txBody>
+      </p:sp>
+      <p:sp>
+        <p:nvSpPr>
+          <p:cNvPr id="1002" name="card-rail" descr="">
+            <a:extLst>
+              <a:ext uri="{C183D7F6-B498-43B3-948B-1728B52AA6E4}">
+                <adec:decorative xmlns:adec="http://schemas.microsoft.com/office/drawing/2017/decorative" val="1"/>
+              </a:ext>
+            </a:extLst>
+          </p:cNvPr>
+          <p:cNvSpPr/>
+          <p:nvPr/>
+        </p:nvSpPr>
+        <p:spPr>
+          <a:xfrm>
+            <a:off x="1097280" y="2633472"/>
+            <a:ext cx="54864" cy="1615440"/>
+          </a:xfrm>
+          <a:prstGeom prst="roundRect">
+            <a:avLst>
+              <a:gd name="adj" fmla="val 20000"/>
+            </a:avLst>
+          </a:prstGeom>
+          <a:solidFill>
+            <a:srgbClr val="010B13"/>
+          </a:solidFill>
+          <a:ln>
+            <a:noFill/>
+          </a:ln>
+        </p:spPr>
+        <p:txBody>
+          <a:bodyPr lIns="182880" tIns="182880" rIns="182880" bIns="182880" anchor="t" wrap="square">
+            <a:normAutofit/>
+          </a:bodyPr>
+          <a:lstStyle/>
+          <a:p/>
+        </p:txBody>
+      </p:sp>
+      <p:sp>
+        <p:nvSpPr>
+          <p:cNvPr id="1003" name="card-steel" descr="card: Assignment description. Read what the review and proposal should include Description (Word)"/>
+          <p:cNvSpPr/>
+          <p:nvPr/>
+        </p:nvSpPr>
+        <p:spPr>
+          <a:xfrm>
+            <a:off x="6167628" y="2633472"/>
+            <a:ext cx="4924044" cy="1615440"/>
+          </a:xfrm>
+          <a:prstGeom prst="roundRect">
+            <a:avLst>
+              <a:gd name="adj" fmla="val 6000"/>
+            </a:avLst>
+          </a:prstGeom>
+          <a:solidFill>
+            <a:srgbClr val="FEFDFA"/>
+          </a:solidFill>
+          <a:ln w="19050">
+            <a:solidFill>
+              <a:srgbClr val="CCCCCC"/>
+            </a:solidFill>
+          </a:ln>
+        </p:spPr>
+        <p:txBody>
+          <a:bodyPr lIns="182880" tIns="182880" rIns="182880" bIns="182880" anchor="t" wrap="square">
+            <a:normAutofit/>
+          </a:bodyPr>
+          <a:lstStyle/>
+          <a:p>
+            <a:pPr algn="l"/>
+            <a:r>
+              <a:rPr lang="en-US" sz="2200" b="1" dirty="0">
+                <a:solidFill>
+                  <a:srgbClr val="010B13"/>
+                </a:solidFill>
+              </a:rPr>
+              <a:t>Assignment description</a:t>
+            </a:r>
+          </a:p>
+          <a:p>
+            <a:pPr algn="l"/>
+            <a:r>
+              <a:rPr lang="en-US" sz="2000" b="0" dirty="0">
+                <a:solidFill>
+                  <a:srgbClr val="010B13"/>
+                </a:solidFill>
+              </a:rPr>
+              <a:t>Read what the review and proposal should include</a:t>
+            </a:r>
+          </a:p>
+          <a:p>
+            <a:pPr algn="l"/>
+            <a:r>
+              <a:rPr lang="en-US" sz="2000" b="0" dirty="0">
+                <a:solidFill>
+                  <a:srgbClr val="010B13"/>
+                </a:solidFill>
+                <a:hlinkClick r:id="rId4"/>
+              </a:rPr>
+              <a:t>Description (Word)</a:t>
+            </a:r>
+          </a:p>
+        </p:txBody>
+      </p:sp>
+      <p:sp>
+        <p:nvSpPr>
+          <p:cNvPr id="1004" name="card-rail" descr="">
+            <a:extLst>
+              <a:ext uri="{C183D7F6-B498-43B3-948B-1728B52AA6E4}">
+                <adec:decorative xmlns:adec="http://schemas.microsoft.com/office/drawing/2017/decorative" val="1"/>
+              </a:ext>
+            </a:extLst>
+          </p:cNvPr>
+          <p:cNvSpPr/>
+          <p:nvPr/>
+        </p:nvSpPr>
+        <p:spPr>
+          <a:xfrm>
+            <a:off x="6167628" y="2633472"/>
+            <a:ext cx="54864" cy="1615440"/>
+          </a:xfrm>
+          <a:prstGeom prst="roundRect">
+            <a:avLst>
+              <a:gd name="adj" fmla="val 20000"/>
+            </a:avLst>
+          </a:prstGeom>
+          <a:solidFill>
+            <a:srgbClr val="010B13"/>
+          </a:solidFill>
+          <a:ln>
+            <a:noFill/>
+          </a:ln>
+        </p:spPr>
+        <p:txBody>
+          <a:bodyPr lIns="182880" tIns="182880" rIns="182880" bIns="182880" anchor="t" wrap="square">
+            <a:normAutofit/>
+          </a:bodyPr>
+          <a:lstStyle/>
+          <a:p/>
+        </p:txBody>
+      </p:sp>
+      <p:sp>
+        <p:nvSpPr>
+          <p:cNvPr id="1005" name="card-steel" descr="card: Hints sheet. Check the guidance for each worksheet section Hints (Word)"/>
+          <p:cNvSpPr/>
+          <p:nvPr/>
+        </p:nvSpPr>
+        <p:spPr>
+          <a:xfrm>
+            <a:off x="1097280" y="4395216"/>
+            <a:ext cx="4924044" cy="1615440"/>
+          </a:xfrm>
+          <a:prstGeom prst="roundRect">
+            <a:avLst>
+              <a:gd name="adj" fmla="val 6000"/>
+            </a:avLst>
+          </a:prstGeom>
+          <a:solidFill>
+            <a:srgbClr val="FEFDFA"/>
+          </a:solidFill>
+          <a:ln w="19050">
+            <a:solidFill>
+              <a:srgbClr val="CCCCCC"/>
+            </a:solidFill>
+          </a:ln>
+        </p:spPr>
+        <p:txBody>
+          <a:bodyPr lIns="182880" tIns="182880" rIns="182880" bIns="182880" anchor="t" wrap="square">
+            <a:normAutofit/>
+          </a:bodyPr>
+          <a:lstStyle/>
+          <a:p>
+            <a:pPr algn="l"/>
+            <a:r>
+              <a:rPr lang="en-US" sz="2200" b="1" dirty="0">
+                <a:solidFill>
+                  <a:srgbClr val="010B13"/>
+                </a:solidFill>
+              </a:rPr>
+              <a:t>Hints sheet</a:t>
+            </a:r>
+          </a:p>
+          <a:p>
+            <a:pPr algn="l"/>
+            <a:r>
+              <a:rPr lang="en-US" sz="2000" b="0" dirty="0">
+                <a:solidFill>
+                  <a:srgbClr val="010B13"/>
+                </a:solidFill>
+              </a:rPr>
+              <a:t>Check the guidance for each worksheet section</a:t>
+            </a:r>
+          </a:p>
+          <a:p>
+            <a:pPr algn="l"/>
+            <a:r>
+              <a:rPr lang="en-US" sz="2000" b="0" dirty="0">
+                <a:solidFill>
+                  <a:srgbClr val="010B13"/>
+                </a:solidFill>
+                <a:hlinkClick r:id="rId5"/>
+              </a:rPr>
+              <a:t>Hints (Word)</a:t>
+            </a:r>
+          </a:p>
+        </p:txBody>
+      </p:sp>
+      <p:sp>
+        <p:nvSpPr>
+          <p:cNvPr id="1006" name="card-rail" descr="">
+            <a:extLst>
+              <a:ext uri="{C183D7F6-B498-43B3-948B-1728B52AA6E4}">
+                <adec:decorative xmlns:adec="http://schemas.microsoft.com/office/drawing/2017/decorative" val="1"/>
+              </a:ext>
+            </a:extLst>
+          </p:cNvPr>
+          <p:cNvSpPr/>
+          <p:nvPr/>
+        </p:nvSpPr>
+        <p:spPr>
+          <a:xfrm>
+            <a:off x="1097280" y="4395216"/>
+            <a:ext cx="54864" cy="1615440"/>
+          </a:xfrm>
+          <a:prstGeom prst="roundRect">
+            <a:avLst>
+              <a:gd name="adj" fmla="val 20000"/>
+            </a:avLst>
+          </a:prstGeom>
+          <a:solidFill>
+            <a:srgbClr val="010B13"/>
+          </a:solidFill>
+          <a:ln>
+            <a:noFill/>
+          </a:ln>
+        </p:spPr>
+        <p:txBody>
+          <a:bodyPr lIns="182880" tIns="182880" rIns="182880" bIns="182880" anchor="t" wrap="square">
+            <a:normAutofit/>
+          </a:bodyPr>
+          <a:lstStyle/>
+          <a:p/>
+        </p:txBody>
+      </p:sp>
+      <p:sp>
+        <p:nvSpPr>
+          <p:cNvPr id="1007" name="card-steel" descr="card: APA writing help. Check paper format, citations, and paraphrasing APA guidelines"/>
+          <p:cNvSpPr/>
+          <p:nvPr/>
+        </p:nvSpPr>
+        <p:spPr>
+          <a:xfrm>
+            <a:off x="6167628" y="4395216"/>
+            <a:ext cx="4924044" cy="1615440"/>
+          </a:xfrm>
+          <a:prstGeom prst="roundRect">
+            <a:avLst>
+              <a:gd name="adj" fmla="val 6000"/>
+            </a:avLst>
+          </a:prstGeom>
+          <a:solidFill>
+            <a:srgbClr val="FEFDFA"/>
+          </a:solidFill>
+          <a:ln w="19050">
+            <a:solidFill>
+              <a:srgbClr val="CCCCCC"/>
+            </a:solidFill>
+          </a:ln>
+        </p:spPr>
+        <p:txBody>
+          <a:bodyPr lIns="182880" tIns="182880" rIns="182880" bIns="182880" anchor="t" wrap="square">
+            <a:normAutofit/>
+          </a:bodyPr>
+          <a:lstStyle/>
+          <a:p>
+            <a:pPr algn="l"/>
+            <a:r>
+              <a:rPr lang="en-US" sz="2200" b="1" dirty="0">
+                <a:solidFill>
+                  <a:srgbClr val="010B13"/>
+                </a:solidFill>
+              </a:rPr>
+              <a:t>APA writing help</a:t>
+            </a:r>
+          </a:p>
+          <a:p>
+            <a:pPr algn="l"/>
+            <a:r>
+              <a:rPr lang="en-US" sz="2000" b="0" dirty="0">
+                <a:solidFill>
+                  <a:srgbClr val="010B13"/>
+                </a:solidFill>
+              </a:rPr>
+              <a:t>Check paper format, citations, and paraphrasing</a:t>
+            </a:r>
+          </a:p>
+          <a:p>
+            <a:pPr algn="l"/>
+            <a:r>
+              <a:rPr lang="en-US" sz="2000" b="0" dirty="0">
+                <a:solidFill>
+                  <a:srgbClr val="010B13"/>
+                </a:solidFill>
+                <a:hlinkClick r:id="rId6"/>
+              </a:rPr>
+              <a:t>APA guidelines</a:t>
+            </a:r>
+          </a:p>
+        </p:txBody>
+      </p:sp>
+      <p:sp>
+        <p:nvSpPr>
+          <p:cNvPr id="1008" name="card-rail" descr="">
+            <a:extLst>
+              <a:ext uri="{C183D7F6-B498-43B3-948B-1728B52AA6E4}">
+                <adec:decorative xmlns:adec="http://schemas.microsoft.com/office/drawing/2017/decorative" val="1"/>
+              </a:ext>
+            </a:extLst>
+          </p:cNvPr>
+          <p:cNvSpPr/>
+          <p:nvPr/>
+        </p:nvSpPr>
+        <p:spPr>
+          <a:xfrm>
+            <a:off x="6167628" y="4395216"/>
+            <a:ext cx="54864" cy="1615440"/>
+          </a:xfrm>
+          <a:prstGeom prst="roundRect">
+            <a:avLst>
+              <a:gd name="adj" fmla="val 20000"/>
+            </a:avLst>
+          </a:prstGeom>
+          <a:solidFill>
+            <a:srgbClr val="010B13"/>
+          </a:solidFill>
+          <a:ln>
+            <a:noFill/>
+          </a:ln>
+        </p:spPr>
+        <p:txBody>
+          <a:bodyPr lIns="182880" tIns="182880" rIns="182880" bIns="182880" anchor="t" wrap="square">
+            <a:normAutofit/>
+          </a:bodyPr>
+          <a:lstStyle/>
+          <a:p/>
         </p:txBody>
       </p:sp>
     </p:spTree>
@@ -7189,70 +7531,224 @@
             </a:pPr>
             <a:r>
               <a:rPr/>
-              <a:t>19 Compose from the worksheet</a:t>
-            </a:r>
-          </a:p>
-        </p:txBody>
-      </p:sp>
-      <p:sp>
-        <p:nvSpPr>
-          <p:cNvPr id="3" name="Content Placeholder 2"/>
-          <p:cNvSpPr>
-            <a:spLocks noGrp="1"/>
-          </p:cNvSpPr>
-          <p:nvPr>
-            <p:ph idx="1"/>
-          </p:nvPr>
-        </p:nvSpPr>
-        <p:spPr/>
-        <p:txBody>
-          <a:bodyPr/>
-          <a:lstStyle/>
-          <a:p>
-            <a:pPr lvl="0" indent="-457200" marL="457200">
-              <a:buAutoNum type="arabicPeriod"/>
-            </a:pPr>
-            <a:r>
-              <a:rPr/>
-              <a:t>Introduce the topic and scope.</a:t>
-            </a:r>
-          </a:p>
-          <a:p>
-            <a:pPr lvl="0" indent="-457200" marL="457200">
-              <a:buAutoNum type="arabicPeriod"/>
-            </a:pPr>
-            <a:r>
-              <a:rPr/>
-              <a:t>Integrate Lynn and Mynier’s studies.</a:t>
-            </a:r>
-          </a:p>
-          <a:p>
-            <a:pPr lvl="0" indent="-457200" marL="457200">
-              <a:buAutoNum type="arabicPeriod"/>
-            </a:pPr>
-            <a:r>
-              <a:rPr/>
-              <a:t>Summarize VanVolkinburg.</a:t>
-            </a:r>
-          </a:p>
-          <a:p>
-            <a:pPr lvl="0" indent="-457200" marL="457200">
-              <a:buAutoNum type="arabicPeriod"/>
-            </a:pPr>
-            <a:r>
-              <a:rPr/>
-              <a:t>Synthesize both articles.</a:t>
-            </a:r>
-          </a:p>
-          <a:p>
-            <a:pPr lvl="0" indent="-457200" marL="457200">
-              <a:buAutoNum type="arabicPeriod"/>
-            </a:pPr>
-            <a:r>
-              <a:rPr/>
-              <a:t>Present the proposed study.</a:t>
-            </a:r>
-          </a:p>
+              <a:t>18 Check both kinds of validity</a:t>
+            </a:r>
+          </a:p>
+        </p:txBody>
+      </p:sp>
+      <p:sp>
+        <p:nvSpPr>
+          <p:cNvPr id="1017" name="card-steel" descr="card: Internal validity. • How will conditions be formed? • What else could differ between them? • Which procedures will stay consistent?"/>
+          <p:cNvSpPr/>
+          <p:nvPr/>
+        </p:nvSpPr>
+        <p:spPr>
+          <a:xfrm>
+            <a:off x="1097280" y="2633472"/>
+            <a:ext cx="4924044" cy="2529840"/>
+          </a:xfrm>
+          <a:prstGeom prst="roundRect">
+            <a:avLst>
+              <a:gd name="adj" fmla="val 6000"/>
+            </a:avLst>
+          </a:prstGeom>
+          <a:solidFill>
+            <a:srgbClr val="FEFDFA"/>
+          </a:solidFill>
+          <a:ln w="19050">
+            <a:solidFill>
+              <a:srgbClr val="CCCCCC"/>
+            </a:solidFill>
+          </a:ln>
+        </p:spPr>
+        <p:txBody>
+          <a:bodyPr lIns="182880" tIns="182880" rIns="182880" bIns="182880" anchor="t" wrap="square">
+            <a:normAutofit/>
+          </a:bodyPr>
+          <a:lstStyle/>
+          <a:p>
+            <a:pPr algn="l"/>
+            <a:r>
+              <a:rPr lang="en-US" sz="2200" b="1" dirty="0">
+                <a:solidFill>
+                  <a:srgbClr val="010B13"/>
+                </a:solidFill>
+              </a:rPr>
+              <a:t>Internal validity</a:t>
+            </a:r>
+          </a:p>
+          <a:p>
+            <a:pPr algn="l"/>
+            <a:r>
+              <a:rPr lang="en-US" sz="2000" b="0" dirty="0">
+                <a:solidFill>
+                  <a:srgbClr val="010B13"/>
+                </a:solidFill>
+              </a:rPr>
+              <a:t>• How will conditions be formed?</a:t>
+            </a:r>
+          </a:p>
+          <a:p>
+            <a:pPr algn="l"/>
+            <a:r>
+              <a:rPr lang="en-US" sz="2000" b="0" dirty="0">
+                <a:solidFill>
+                  <a:srgbClr val="010B13"/>
+                </a:solidFill>
+              </a:rPr>
+              <a:t>• What else could differ between them?</a:t>
+            </a:r>
+          </a:p>
+          <a:p>
+            <a:pPr algn="l"/>
+            <a:r>
+              <a:rPr lang="en-US" sz="2000" b="0" dirty="0">
+                <a:solidFill>
+                  <a:srgbClr val="010B13"/>
+                </a:solidFill>
+              </a:rPr>
+              <a:t>• Which procedures will stay consistent?</a:t>
+            </a:r>
+          </a:p>
+        </p:txBody>
+      </p:sp>
+      <p:sp>
+        <p:nvSpPr>
+          <p:cNvPr id="1018" name="card-rail" descr="">
+            <a:extLst>
+              <a:ext uri="{C183D7F6-B498-43B3-948B-1728B52AA6E4}">
+                <adec:decorative xmlns:adec="http://schemas.microsoft.com/office/drawing/2017/decorative" val="1"/>
+              </a:ext>
+            </a:extLst>
+          </p:cNvPr>
+          <p:cNvSpPr/>
+          <p:nvPr/>
+        </p:nvSpPr>
+        <p:spPr>
+          <a:xfrm>
+            <a:off x="1097280" y="2633472"/>
+            <a:ext cx="54864" cy="2529840"/>
+          </a:xfrm>
+          <a:prstGeom prst="roundRect">
+            <a:avLst>
+              <a:gd name="adj" fmla="val 20000"/>
+            </a:avLst>
+          </a:prstGeom>
+          <a:solidFill>
+            <a:srgbClr val="010B13"/>
+          </a:solidFill>
+          <a:ln>
+            <a:noFill/>
+          </a:ln>
+        </p:spPr>
+        <p:txBody>
+          <a:bodyPr lIns="182880" tIns="182880" rIns="182880" bIns="182880" anchor="t" wrap="square">
+            <a:normAutofit/>
+          </a:bodyPr>
+          <a:lstStyle/>
+          <a:p/>
+        </p:txBody>
+      </p:sp>
+      <p:sp>
+        <p:nvSpPr>
+          <p:cNvPr id="1019" name="card-steel" descr="card: External validity. • Who does your sample represent? • To which settings, tasks, and times could the findings apply?"/>
+          <p:cNvSpPr/>
+          <p:nvPr/>
+        </p:nvSpPr>
+        <p:spPr>
+          <a:xfrm>
+            <a:off x="6167628" y="2633472"/>
+            <a:ext cx="4924044" cy="2225040"/>
+          </a:xfrm>
+          <a:prstGeom prst="roundRect">
+            <a:avLst>
+              <a:gd name="adj" fmla="val 6000"/>
+            </a:avLst>
+          </a:prstGeom>
+          <a:solidFill>
+            <a:srgbClr val="FEFDFA"/>
+          </a:solidFill>
+          <a:ln w="19050">
+            <a:solidFill>
+              <a:srgbClr val="CCCCCC"/>
+            </a:solidFill>
+          </a:ln>
+        </p:spPr>
+        <p:txBody>
+          <a:bodyPr lIns="182880" tIns="182880" rIns="182880" bIns="182880" anchor="t" wrap="square">
+            <a:normAutofit/>
+          </a:bodyPr>
+          <a:lstStyle/>
+          <a:p>
+            <a:pPr algn="l"/>
+            <a:r>
+              <a:rPr lang="en-US" sz="2200" b="1" dirty="0">
+                <a:solidFill>
+                  <a:srgbClr val="010B13"/>
+                </a:solidFill>
+              </a:rPr>
+              <a:t>External validity</a:t>
+            </a:r>
+          </a:p>
+          <a:p>
+            <a:pPr algn="l"/>
+            <a:r>
+              <a:rPr lang="en-US" sz="2000" b="0" dirty="0">
+                <a:solidFill>
+                  <a:srgbClr val="010B13"/>
+                </a:solidFill>
+              </a:rPr>
+              <a:t>• Who does your sample represent?</a:t>
+            </a:r>
+          </a:p>
+          <a:p>
+            <a:pPr algn="l"/>
+            <a:r>
+              <a:rPr lang="en-US" sz="2000" b="0" dirty="0">
+                <a:solidFill>
+                  <a:srgbClr val="010B13"/>
+                </a:solidFill>
+              </a:rPr>
+              <a:t>• To which settings, tasks, and times could the findings apply?</a:t>
+            </a:r>
+          </a:p>
+        </p:txBody>
+      </p:sp>
+      <p:sp>
+        <p:nvSpPr>
+          <p:cNvPr id="1020" name="card-rail" descr="">
+            <a:extLst>
+              <a:ext uri="{C183D7F6-B498-43B3-948B-1728B52AA6E4}">
+                <adec:decorative xmlns:adec="http://schemas.microsoft.com/office/drawing/2017/decorative" val="1"/>
+              </a:ext>
+            </a:extLst>
+          </p:cNvPr>
+          <p:cNvSpPr/>
+          <p:nvPr/>
+        </p:nvSpPr>
+        <p:spPr>
+          <a:xfrm>
+            <a:off x="6167628" y="2633472"/>
+            <a:ext cx="54864" cy="2225040"/>
+          </a:xfrm>
+          <a:prstGeom prst="roundRect">
+            <a:avLst>
+              <a:gd name="adj" fmla="val 20000"/>
+            </a:avLst>
+          </a:prstGeom>
+          <a:solidFill>
+            <a:srgbClr val="010B13"/>
+          </a:solidFill>
+          <a:ln>
+            <a:noFill/>
+          </a:ln>
+        </p:spPr>
+        <p:txBody>
+          <a:bodyPr lIns="182880" tIns="182880" rIns="182880" bIns="182880" anchor="t" wrap="square">
+            <a:normAutofit/>
+          </a:bodyPr>
+          <a:lstStyle/>
+          <a:p/>
         </p:txBody>
       </p:sp>
     </p:spTree>
@@ -7302,7 +7798,7 @@
             </a:pPr>
             <a:r>
               <a:rPr/>
-              <a:t>20 Build paragraphs around one point</a:t>
+              <a:t>19 Build paragraphs around one point</a:t>
             </a:r>
           </a:p>
         </p:txBody>
@@ -7327,7 +7823,7 @@
             </a:pPr>
             <a:r>
               <a:rPr/>
-              <a:t>State the paragraph’s main point.</a:t>
+              <a:t>State the paragraph’s main point</a:t>
             </a:r>
           </a:p>
           <a:p>
@@ -7336,7 +7832,7 @@
             </a:pPr>
             <a:r>
               <a:rPr/>
-              <a:t>Add evidence and explain why it matters.</a:t>
+              <a:t>Add evidence and explain why it matters</a:t>
             </a:r>
           </a:p>
           <a:p>
@@ -7345,7 +7841,7 @@
             </a:pPr>
             <a:r>
               <a:rPr/>
-              <a:t>Connect that point to what comes next.</a:t>
+              <a:t>Connect that point to what comes next</a:t>
             </a:r>
           </a:p>
         </p:txBody>
@@ -7397,14 +7893,14 @@
             </a:pPr>
             <a:r>
               <a:rPr/>
-              <a:t>21 Combine related facts</a:t>
-            </a:r>
-          </a:p>
-        </p:txBody>
-      </p:sp>
-      <p:sp>
-        <p:nvSpPr>
-          <p:cNvPr id="1005" name="card-steel" descr="card: Separate facts. Study 1 included 270 tables. A waiter served them. He flipped a coin. The coin determined his posture."/>
+              <a:t>20 Combine related facts</a:t>
+            </a:r>
+          </a:p>
+        </p:txBody>
+      </p:sp>
+      <p:sp>
+        <p:nvSpPr>
+          <p:cNvPr id="1021" name="card-steel" descr="card: Separate facts. Study 1 included 270 tables. A waiter served them. He flipped a coin. The coin determined his posture."/>
           <p:cNvSpPr/>
           <p:nvPr/>
         </p:nvSpPr>
@@ -7458,7 +7954,13 @@
       </p:sp>
       <p:sp>
         <p:nvSpPr>
-          <p:cNvPr id="1006" name="card-rail" descr=""/>
+          <p:cNvPr id="1022" name="card-rail" descr="">
+            <a:extLst>
+              <a:ext uri="{C183D7F6-B498-43B3-948B-1728B52AA6E4}">
+                <adec:decorative xmlns:adec="http://schemas.microsoft.com/office/drawing/2017/decorative" val="1"/>
+              </a:ext>
+            </a:extLst>
+          </p:cNvPr>
           <p:cNvSpPr/>
           <p:nvPr/>
         </p:nvSpPr>
@@ -7489,7 +7991,7 @@
       </p:sp>
       <p:sp>
         <p:nvSpPr>
-          <p:cNvPr id="1007" name="card-steel" descr="card: Integrated sentence. In Study 1, a waiter used a coin toss to assign 270 tables to a standing or squatting condition."/>
+          <p:cNvPr id="1023" name="card-steel" descr="card: Combined sentence. In Study 1, a waiter used a coin toss to assign 270 tables to a standing or squatting condition."/>
           <p:cNvSpPr/>
           <p:nvPr/>
         </p:nvSpPr>
@@ -7525,7 +8027,7 @@
                   <a:srgbClr val="010B13"/>
                 </a:solidFill>
               </a:rPr>
-              <a:t>Integrated sentence</a:t>
+              <a:t>Combined sentence</a:t>
             </a:r>
           </a:p>
           <a:p>
@@ -7543,7 +8045,13 @@
       </p:sp>
       <p:sp>
         <p:nvSpPr>
-          <p:cNvPr id="1008" name="card-rail" descr=""/>
+          <p:cNvPr id="1024" name="card-rail" descr="">
+            <a:extLst>
+              <a:ext uri="{C183D7F6-B498-43B3-948B-1728B52AA6E4}">
+                <adec:decorative xmlns:adec="http://schemas.microsoft.com/office/drawing/2017/decorative" val="1"/>
+              </a:ext>
+            </a:extLst>
+          </p:cNvPr>
           <p:cNvSpPr/>
           <p:nvPr/>
         </p:nvSpPr>
@@ -7619,7 +8127,7 @@
             </a:pPr>
             <a:r>
               <a:rPr/>
-              <a:t>22 Finish with the APA checklist</a:t>
+              <a:t>21 Finish with the APA checklist</a:t>
             </a:r>
           </a:p>
         </p:txBody>
@@ -7642,14 +8150,14 @@
             <a:pPr lvl="0"/>
             <a:r>
               <a:rPr/>
-              <a:t>Create an APA student title page.</a:t>
+              <a:t>Create an APA student title page</a:t>
             </a:r>
           </a:p>
           <a:p>
             <a:pPr lvl="0"/>
             <a:r>
               <a:rPr/>
-              <a:t>Use meaningful headings; do not add an </a:t>
+              <a:t>Use descriptive headings; do not add an </a:t>
             </a:r>
             <a:r>
               <a:rPr b="1"/>
@@ -7657,14 +8165,14 @@
             </a:r>
             <a:r>
               <a:rPr/>
-              <a:t> heading.</a:t>
+              <a:t> heading</a:t>
             </a:r>
           </a:p>
           <a:p>
             <a:pPr lvl="0"/>
             <a:r>
               <a:rPr/>
-              <a:t>Paraphrase and cite both course articles.</a:t>
+              <a:t>Paraphrase and cite both articles; do not use direct quotations</a:t>
             </a:r>
           </a:p>
           <a:p>
@@ -7679,14 +8187,14 @@
             </a:r>
             <a:r>
               <a:rPr/>
-              <a:t> page.</a:t>
+              <a:t> page</a:t>
             </a:r>
           </a:p>
           <a:p>
             <a:pPr lvl="0"/>
             <a:r>
               <a:rPr/>
-              <a:t>Double-space and proofread.</a:t>
+              <a:t>Double-space and proofread</a:t>
             </a:r>
           </a:p>
         </p:txBody>
@@ -7738,7 +8246,7 @@
             </a:pPr>
             <a:r>
               <a:rPr/>
-              <a:t>23 Work one stage at a time</a:t>
+              <a:t>22 Finish the worksheet, then the paper</a:t>
             </a:r>
           </a:p>
         </p:txBody>
@@ -7763,7 +8271,7 @@
             </a:pPr>
             <a:r>
               <a:rPr/>
-              <a:t>Finish and integrate both Lynn and Mynier studies.</a:t>
+              <a:t>Introduce the topic and scope of your review</a:t>
             </a:r>
           </a:p>
           <a:p>
@@ -7772,7 +8280,7 @@
             </a:pPr>
             <a:r>
               <a:rPr/>
-              <a:t>Summarize VanVolkinburg.</a:t>
+              <a:t>Summarize and integrate Lynn and Mynier’s two studies</a:t>
             </a:r>
           </a:p>
           <a:p>
@@ -7781,7 +8289,7 @@
             </a:pPr>
             <a:r>
               <a:rPr/>
-              <a:t>Write the cross-article synthesis.</a:t>
+              <a:t>Summarize VanVolkinburg’s study</a:t>
             </a:r>
           </a:p>
           <a:p>
@@ -7790,7 +8298,7 @@
             </a:pPr>
             <a:r>
               <a:rPr/>
-              <a:t>Draft the proposal from the remaining question.</a:t>
+              <a:t>Integrate the two articles</a:t>
             </a:r>
           </a:p>
           <a:p>
@@ -7799,7 +8307,20 @@
             </a:pPr>
             <a:r>
               <a:rPr/>
-              <a:t>Compose the paper after the worksheet is complete.</a:t>
+              <a:t>Explain your proposed study</a:t>
+            </a:r>
+          </a:p>
+          <a:p>
+            <a:pPr lvl="0" indent="0" marL="0">
+              <a:buNone/>
+            </a:pPr>
+            <a:r>
+              <a:rPr b="1"/>
+              <a:t>Before Week 5:</a:t>
+            </a:r>
+            <a:r>
+              <a:rPr/>
+              <a:t> Submit the completed worksheet with the APA paper on new pages, then check that you uploaded the correct file</a:t>
             </a:r>
           </a:p>
         </p:txBody>
@@ -7906,7 +8427,7 @@
             </a:pPr>
             <a:r>
               <a:rPr/>
-              <a:t>Complete one section at a time.</a:t>
+              <a:t>Write each section in sentences and paragraphs</a:t>
             </a:r>
           </a:p>
           <a:p>
@@ -7915,7 +8436,7 @@
             </a:pPr>
             <a:r>
               <a:rPr/>
-              <a:t>Use the hints sheet to check details.</a:t>
+              <a:t>Use the hints to check that you included the required details</a:t>
             </a:r>
           </a:p>
           <a:p>
@@ -7924,7 +8445,7 @@
             </a:pPr>
             <a:r>
               <a:rPr/>
-              <a:t>Compose the paper after the worksheet.</a:t>
+              <a:t>Compose the APA paper on new pages after the worksheet</a:t>
             </a:r>
           </a:p>
           <a:p>
@@ -7933,7 +8454,7 @@
             </a:pPr>
             <a:r>
               <a:rPr/>
-              <a:t>Leave the gray grading rows blank.</a:t>
+              <a:t>Leave the gray grading rows blank</a:t>
             </a:r>
           </a:p>
         </p:txBody>
@@ -8101,7 +8622,7 @@
             </a:pPr>
             <a:r>
               <a:rPr/>
-              <a:t>What did the researchers predict?</a:t>
+              <a:t>What did the authors predict?</a:t>
             </a:r>
           </a:p>
           <a:p>
@@ -8128,7 +8649,24 @@
             </a:pPr>
             <a:r>
               <a:rPr/>
-              <a:t>What does the finding mean?</a:t>
+              <a:t>How do the findings relate to earlier research?</a:t>
+            </a:r>
+          </a:p>
+          <a:p>
+            <a:pPr lvl="0" indent="0" marL="0">
+              <a:buNone/>
+            </a:pPr>
+            <a:r>
+              <a:rPr/>
+              <a:t>Report </a:t>
+            </a:r>
+            <a:r>
+              <a:rPr b="1"/>
+              <a:t>every result in words</a:t>
+            </a:r>
+            <a:r>
+              <a:rPr/>
+              <a:t>, as the hints require</a:t>
             </a:r>
           </a:p>
         </p:txBody>
@@ -8187,7 +8725,7 @@
       </p:sp>
       <p:pic>
         <p:nvPicPr>
-          <p:cNvPr descr="First page of Lynn and Mynier's article Effect of Server Posture on Restaurant Tipping, showing its title, abstract, and opening paragraphs" id="0" name="Picture 1"/>
+          <p:cNvPr descr="First page of Lynn and Mynier's course article Effect of Server Posture on Restaurant Tipping, showing its title, abstract, and opening paragraphs" id="0" name="Picture 1"/>
           <p:cNvPicPr>
             <a:picLocks noGrp="1" noChangeAspect="1"/>
           </p:cNvPicPr>
@@ -8267,8 +8805,10 @@
               <a:buNone/>
             </a:pPr>
             <a:r>
-              <a:rPr/>
-              <a:t>Course article: Lynn and Mynier (1993)</a:t>
+              <a:rPr>
+                <a:hlinkClick r:id="rId4"/>
+              </a:rPr>
+              <a:t>Lynn and Mynier (1993) · PDF</a:t>
             </a:r>
           </a:p>
         </p:txBody>
@@ -8345,15 +8885,11 @@
             </a:pPr>
             <a:r>
               <a:rPr/>
-              <a:t>A waiter served </a:t>
+              <a:t>A waiter recorded data for </a:t>
             </a:r>
             <a:r>
               <a:rPr b="1"/>
               <a:t>270 tables</a:t>
-            </a:r>
-            <a:r>
-              <a:rPr/>
-              <a:t>.</a:t>
             </a:r>
           </a:p>
           <a:p>
@@ -8362,7 +8898,7 @@
             </a:pPr>
             <a:r>
               <a:rPr/>
-              <a:t>A coin toss assigned standing or squatting.</a:t>
+              <a:t>A coin toss determined standing or squatting</a:t>
             </a:r>
           </a:p>
           <a:p>
@@ -8371,7 +8907,7 @@
             </a:pPr>
             <a:r>
               <a:rPr/>
-              <a:t>The posture occurred during the first visit.</a:t>
+              <a:t>The waiter used that posture during the first visit</a:t>
             </a:r>
           </a:p>
           <a:p>
@@ -8380,7 +8916,7 @@
             </a:pPr>
             <a:r>
               <a:rPr/>
-              <a:t>The waiter recorded the bill and tip.</a:t>
+              <a:t>He recorded the condition, bill size, and tip</a:t>
             </a:r>
           </a:p>
         </p:txBody>
@@ -8432,7 +8968,7 @@
             </a:pPr>
             <a:r>
               <a:rPr/>
-              <a:t>7 Record the result and limitation</a:t>
+              <a:t>7 Describe the result in words</a:t>
             </a:r>
           </a:p>
         </p:txBody>
@@ -8452,52 +8988,42 @@
           <a:bodyPr/>
           <a:lstStyle/>
           <a:p>
+            <a:pPr lvl="0" indent="0" marL="0">
+              <a:buNone/>
+            </a:pPr>
+            <a:r>
+              <a:rPr b="1"/>
+              <a:t>Example paraphrase · Study 1</a:t>
+            </a:r>
+          </a:p>
+          <a:p>
+            <a:pPr lvl="0" indent="0" marL="0">
+              <a:buNone/>
+            </a:pPr>
+            <a:r>
+              <a:rPr/>
+              <a:t>Customers left larger tips when the waiter squatted during his first visit to the table.</a:t>
+            </a:r>
+          </a:p>
+          <a:p>
             <a:pPr lvl="0"/>
             <a:r>
-              <a:rPr b="1"/>
-              <a:t>Result:</a:t>
-            </a:r>
-            <a:r>
-              <a:rPr/>
-              <a:t> Average tips were </a:t>
-            </a:r>
-            <a:r>
-              <a:rPr b="1"/>
-              <a:t>$5.18 standing</a:t>
-            </a:r>
-            <a:r>
-              <a:rPr/>
-              <a:t> and </a:t>
-            </a:r>
-            <a:r>
-              <a:rPr b="1"/>
-              <a:t>$6.40 squatting</a:t>
-            </a:r>
-            <a:r>
-              <a:rPr/>
-              <a:t>.</a:t>
+              <a:rPr/>
+              <a:t>What other findings does the Results section report?</a:t>
             </a:r>
           </a:p>
           <a:p>
             <a:pPr lvl="0"/>
             <a:r>
-              <a:rPr b="1"/>
-              <a:t>Interpretation:</a:t>
-            </a:r>
-            <a:r>
-              <a:rPr/>
-              <a:t> Random assignment supports a causal conclusion.</a:t>
+              <a:rPr/>
+              <a:t>How does assignment affect the conclusion you can draw?</a:t>
             </a:r>
           </a:p>
           <a:p>
             <a:pPr lvl="0"/>
             <a:r>
-              <a:rPr b="1"/>
-              <a:t>Limitation:</a:t>
-            </a:r>
-            <a:r>
-              <a:rPr/>
-              <a:t> One waiter collected the data and expected squatting to help.</a:t>
+              <a:rPr/>
+              <a:t>What limitation do the authors discuss?</a:t>
             </a:r>
           </a:p>
         </p:txBody>
@@ -8549,7 +9075,7 @@
             </a:pPr>
             <a:r>
               <a:rPr/>
-              <a:t>8 Study 2 tests replication</a:t>
+              <a:t>8 Use Study 2 for practice</a:t>
             </a:r>
           </a:p>
         </p:txBody>
@@ -8571,46 +9097,29 @@
           <a:p>
             <a:pPr lvl="0"/>
             <a:r>
-              <a:rPr b="1"/>
-              <a:t>New context:</a:t>
-            </a:r>
-            <a:r>
-              <a:rPr/>
-              <a:t> 148 tables, a different server, and a different restaurant</a:t>
+              <a:rPr/>
+              <a:t>Why did the authors conduct a second study?</a:t>
             </a:r>
           </a:p>
           <a:p>
             <a:pPr lvl="0"/>
             <a:r>
-              <a:rPr b="1"/>
-              <a:t>Same design:</a:t>
-            </a:r>
-            <a:r>
-              <a:rPr/>
-              <a:t> Coin-toss assignment to standing or squatting</a:t>
+              <a:rPr/>
+              <a:t>What stayed the same, and what changed in the method?</a:t>
             </a:r>
           </a:p>
           <a:p>
             <a:pPr lvl="0"/>
             <a:r>
-              <a:rPr b="1"/>
-              <a:t>Same direction:</a:t>
-            </a:r>
-            <a:r>
-              <a:rPr/>
-              <a:t> </a:t>
-            </a:r>
-            <a:r>
-              <a:rPr b="1"/>
-              <a:t>$2.56 standing</a:t>
-            </a:r>
-            <a:r>
-              <a:rPr/>
-              <a:t> and </a:t>
-            </a:r>
-            <a:r>
-              <a:rPr b="1"/>
-              <a:t>$3.28 squatting</a:t>
+              <a:rPr/>
+              <a:t>Which findings repeated, and which differed?</a:t>
+            </a:r>
+          </a:p>
+          <a:p>
+            <a:pPr lvl="0"/>
+            <a:r>
+              <a:rPr/>
+              <a:t>How did the authors connect these findings to earlier research?</a:t>
             </a:r>
           </a:p>
         </p:txBody>
